--- a/applications/gadfly/documents/gadfly_ppt.pptx
+++ b/applications/gadfly/documents/gadfly_ppt.pptx
@@ -13,8 +13,6 @@
     <p:sldId id="261" r:id="rId12"/>
     <p:sldId id="262" r:id="rId13"/>
     <p:sldId id="263" r:id="rId14"/>
-    <p:sldId id="264" r:id="rId15"/>
-    <p:sldId id="265" r:id="rId16"/>
   </p:sldIdLst>
   <p:sldSz cx="12191695" cy="6858000" type="screen4x3"/>
   <p:notesSz cx="6858000" cy="9144000"/>
@@ -3099,7 +3097,7 @@
       <p:grpSpPr/>
       <p:pic>
         <p:nvPicPr>
-          <p:cNvPr id="2" name="Picture 1" descr="cover_hero_cinematic_opt.jpg"/>
+          <p:cNvPr id="2" name="Picture 1" descr="hero_chw_mobile_opt.jpg"/>
           <p:cNvPicPr>
             <a:picLocks noChangeAspect="1"/>
           </p:cNvPicPr>
@@ -3107,15 +3105,14 @@
         </p:nvPicPr>
         <p:blipFill>
           <a:blip r:embed="rId2"/>
-          <a:srcRect l="33" r="33"/>
           <a:stretch>
             <a:fillRect/>
           </a:stretch>
         </p:blipFill>
         <p:spPr>
           <a:xfrm>
-            <a:off x="0" y="0"/>
-            <a:ext cx="12191695" cy="6858000"/>
+            <a:off x="952347" y="0"/>
+            <a:ext cx="10287000" cy="6858000"/>
           </a:xfrm>
           <a:prstGeom prst="rect">
             <a:avLst/>
@@ -3130,8 +3127,8 @@
         </p:nvSpPr>
         <p:spPr>
           <a:xfrm>
-            <a:off x="0" y="3474720"/>
-            <a:ext cx="12191695" cy="3383280"/>
+            <a:off x="0" y="3931920"/>
+            <a:ext cx="12191695" cy="2926080"/>
           </a:xfrm>
           <a:prstGeom prst="rect">
             <a:avLst/>
@@ -3142,7 +3139,6 @@
           <a:ln>
             <a:noFill/>
           </a:ln>
-          <a:effectLst/>
         </p:spPr>
         <p:style>
           <a:lnRef idx="1">
@@ -3174,7 +3170,7 @@
         </p:nvSpPr>
         <p:spPr>
           <a:xfrm>
-            <a:off x="594360" y="3749040"/>
+            <a:off x="548640" y="4160520"/>
             <a:ext cx="10972800" cy="320040"/>
           </a:xfrm>
           <a:prstGeom prst="rect">
@@ -3183,24 +3179,20 @@
           <a:noFill/>
         </p:spPr>
         <p:txBody>
-          <a:bodyPr wrap="square" anchor="t">
+          <a:bodyPr wrap="square">
             <a:spAutoFit/>
           </a:bodyPr>
           <a:lstStyle/>
           <a:p>
-            <a:pPr algn="l">
-              <a:spcAft>
-                <a:spcPts val="0"/>
-              </a:spcAft>
-            </a:pPr>
+            <a:pPr algn="l"/>
             <a:r>
               <a:rPr sz="1300" b="1" i="0">
                 <a:solidFill>
-                  <a:srgbClr val="14A3A3"/>
+                  <a:srgbClr val="0D6E6E"/>
                 </a:solidFill>
                 <a:latin typeface="Calibri"/>
               </a:rPr>
-              <a:t>The Gadfly Project Custom Web Application Grant 2026</a:t>
+              <a:t>The Gadfly Project — Custom Web Application Grant 2026</a:t>
             </a:r>
           </a:p>
         </p:txBody>
@@ -3213,7 +3205,7 @@
         </p:nvSpPr>
         <p:spPr>
           <a:xfrm>
-            <a:off x="594360" y="4206240"/>
+            <a:off x="548640" y="4663440"/>
             <a:ext cx="10972800" cy="640080"/>
           </a:xfrm>
           <a:prstGeom prst="rect">
@@ -3222,16 +3214,12 @@
           <a:noFill/>
         </p:spPr>
         <p:txBody>
-          <a:bodyPr wrap="square" anchor="t">
+          <a:bodyPr wrap="square">
             <a:spAutoFit/>
           </a:bodyPr>
           <a:lstStyle/>
           <a:p>
-            <a:pPr algn="l">
-              <a:spcAft>
-                <a:spcPts val="0"/>
-              </a:spcAft>
-            </a:pPr>
+            <a:pPr algn="l"/>
             <a:r>
               <a:rPr sz="2600" b="1" i="0">
                 <a:solidFill>
@@ -3239,7 +3227,7 @@
                 </a:solidFill>
                 <a:latin typeface="Calibri"/>
               </a:rPr>
-              <a:t>Build FCHIP Community Capture &amp; Partner Dashboards</a:t>
+              <a:t>FCHIP Pilot Build — Community Health Data Platform</a:t>
             </a:r>
           </a:p>
         </p:txBody>
@@ -3252,7 +3240,7 @@
         </p:nvSpPr>
         <p:spPr>
           <a:xfrm>
-            <a:off x="594360" y="4983481"/>
+            <a:off x="548640" y="5440680"/>
             <a:ext cx="10972800" cy="365760"/>
           </a:xfrm>
           <a:prstGeom prst="rect">
@@ -3261,24 +3249,20 @@
           <a:noFill/>
         </p:spPr>
         <p:txBody>
-          <a:bodyPr wrap="square" anchor="t">
+          <a:bodyPr wrap="square">
             <a:spAutoFit/>
           </a:bodyPr>
           <a:lstStyle/>
           <a:p>
-            <a:pPr algn="l">
-              <a:spcAft>
-                <a:spcPts val="0"/>
-              </a:spcAft>
-            </a:pPr>
-            <a:r>
-              <a:rPr sz="1500" b="0" i="1">
+            <a:pPr algn="l"/>
+            <a:r>
+              <a:rPr sz="1400" b="0" i="1">
                 <a:solidFill>
                   <a:srgbClr val="F2C79B"/>
                 </a:solidFill>
                 <a:latin typeface="Calibri"/>
               </a:rPr>
-              <a:t>In-kind software development that expands community health impact</a:t>
+              <a:t>In-kind engineering scope for CHW capture, sync, and dashboards</a:t>
             </a:r>
           </a:p>
         </p:txBody>
@@ -3291,8 +3275,8 @@
         </p:nvSpPr>
         <p:spPr>
           <a:xfrm>
-            <a:off x="594360" y="5532120"/>
-            <a:ext cx="10972800" cy="274320"/>
+            <a:off x="548640" y="5989320"/>
+            <a:ext cx="10972800" cy="320040"/>
           </a:xfrm>
           <a:prstGeom prst="rect">
             <a:avLst/>
@@ -3300,300 +3284,14 @@
           <a:noFill/>
         </p:spPr>
         <p:txBody>
-          <a:bodyPr wrap="square" anchor="t">
+          <a:bodyPr wrap="square">
             <a:spAutoFit/>
           </a:bodyPr>
           <a:lstStyle/>
           <a:p>
-            <a:pPr algn="l">
-              <a:spcAft>
-                <a:spcPts val="0"/>
-              </a:spcAft>
-            </a:pPr>
+            <a:pPr algn="l"/>
             <a:r>
               <a:rPr sz="1300" b="1" i="0">
-                <a:solidFill>
-                  <a:srgbClr val="FFFFFF"/>
-                </a:solidFill>
-                <a:latin typeface="Calibri"/>
-              </a:rPr>
-              <a:t>Your health, our mission.</a:t>
-            </a:r>
-          </a:p>
-        </p:txBody>
-      </p:sp>
-      <p:sp>
-        <p:nvSpPr>
-          <p:cNvPr id="8" name="TextBox 7"/>
-          <p:cNvSpPr txBox="1"/>
-          <p:nvPr/>
-        </p:nvSpPr>
-        <p:spPr>
-          <a:xfrm>
-            <a:off x="594360" y="5989320"/>
-            <a:ext cx="10972800" cy="365760"/>
-          </a:xfrm>
-          <a:prstGeom prst="rect">
-            <a:avLst/>
-          </a:prstGeom>
-          <a:noFill/>
-        </p:spPr>
-        <p:txBody>
-          <a:bodyPr wrap="square" anchor="t">
-            <a:spAutoFit/>
-          </a:bodyPr>
-          <a:lstStyle/>
-          <a:p>
-            <a:pPr algn="l">
-              <a:spcAft>
-                <a:spcPts val="0"/>
-              </a:spcAft>
-            </a:pPr>
-            <a:r>
-              <a:rPr sz="1200" b="0" i="0">
-                <a:solidFill>
-                  <a:srgbClr val="D0E8E8"/>
-                </a:solidFill>
-                <a:latin typeface="Calibri"/>
-              </a:rPr>
-              <a:t>Award in-kind engineering (valued toward US$5,000–100,000) to build FCHIP web and data tools.</a:t>
-            </a:r>
-          </a:p>
-        </p:txBody>
-      </p:sp>
-    </p:spTree>
-  </p:cSld>
-  <p:clrMapOvr>
-    <a:masterClrMapping/>
-  </p:clrMapOvr>
-</p:sld>
-</file>
-
-<file path=ppt/slides/slide10.xml><?xml version="1.0" encoding="utf-8"?>
-<p:sld xmlns:a="http://schemas.openxmlformats.org/drawingml/2006/main" xmlns:p="http://schemas.openxmlformats.org/presentationml/2006/main" xmlns:r="http://schemas.openxmlformats.org/officeDocument/2006/relationships">
-  <p:cSld>
-    <p:spTree>
-      <p:nvGrpSpPr>
-        <p:cNvPr id="1" name=""/>
-        <p:cNvGrpSpPr/>
-        <p:nvPr/>
-      </p:nvGrpSpPr>
-      <p:grpSpPr/>
-      <p:pic>
-        <p:nvPicPr>
-          <p:cNvPr id="2" name="Picture 1" descr="outreach_audience_full_group_01_opt.jpg"/>
-          <p:cNvPicPr>
-            <a:picLocks noChangeAspect="1"/>
-          </p:cNvPicPr>
-          <p:nvPr/>
-        </p:nvPicPr>
-        <p:blipFill>
-          <a:blip r:embed="rId2"/>
-          <a:srcRect t="7796" b="7796"/>
-          <a:stretch>
-            <a:fillRect/>
-          </a:stretch>
-        </p:blipFill>
-        <p:spPr>
-          <a:xfrm>
-            <a:off x="0" y="0"/>
-            <a:ext cx="12191695" cy="6858000"/>
-          </a:xfrm>
-          <a:prstGeom prst="rect">
-            <a:avLst/>
-          </a:prstGeom>
-        </p:spPr>
-      </p:pic>
-      <p:sp>
-        <p:nvSpPr>
-          <p:cNvPr id="3" name="Rectangle 2"/>
-          <p:cNvSpPr/>
-          <p:nvPr/>
-        </p:nvSpPr>
-        <p:spPr>
-          <a:xfrm>
-            <a:off x="0" y="3657600"/>
-            <a:ext cx="12191695" cy="3200400"/>
-          </a:xfrm>
-          <a:prstGeom prst="rect">
-            <a:avLst/>
-          </a:prstGeom>
-          <a:solidFill>
-            <a:srgbClr val="0A1F2E"/>
-          </a:solidFill>
-          <a:ln>
-            <a:noFill/>
-          </a:ln>
-          <a:effectLst/>
-        </p:spPr>
-        <p:style>
-          <a:lnRef idx="1">
-            <a:schemeClr val="accent1"/>
-          </a:lnRef>
-          <a:fillRef idx="3">
-            <a:schemeClr val="accent1"/>
-          </a:fillRef>
-          <a:effectRef idx="2">
-            <a:schemeClr val="accent1"/>
-          </a:effectRef>
-          <a:fontRef idx="minor">
-            <a:schemeClr val="lt1"/>
-          </a:fontRef>
-        </p:style>
-        <p:txBody>
-          <a:bodyPr rtlCol="0" anchor="ctr"/>
-          <a:lstStyle/>
-          <a:p>
-            <a:pPr algn="ctr"/>
-          </a:p>
-        </p:txBody>
-      </p:sp>
-      <p:sp>
-        <p:nvSpPr>
-          <p:cNvPr id="4" name="TextBox 3"/>
-          <p:cNvSpPr txBox="1"/>
-          <p:nvPr/>
-        </p:nvSpPr>
-        <p:spPr>
-          <a:xfrm>
-            <a:off x="594360" y="3931920"/>
-            <a:ext cx="10972800" cy="274320"/>
-          </a:xfrm>
-          <a:prstGeom prst="rect">
-            <a:avLst/>
-          </a:prstGeom>
-          <a:noFill/>
-        </p:spPr>
-        <p:txBody>
-          <a:bodyPr wrap="square" anchor="t">
-            <a:spAutoFit/>
-          </a:bodyPr>
-          <a:lstStyle/>
-          <a:p>
-            <a:pPr algn="l">
-              <a:spcAft>
-                <a:spcPts val="0"/>
-              </a:spcAft>
-            </a:pPr>
-            <a:r>
-              <a:rPr sz="1300" b="1" i="0">
-                <a:solidFill>
-                  <a:srgbClr val="14A3A3"/>
-                </a:solidFill>
-                <a:latin typeface="Calibri"/>
-              </a:rPr>
-              <a:t>The ask</a:t>
-            </a:r>
-          </a:p>
-        </p:txBody>
-      </p:sp>
-      <p:sp>
-        <p:nvSpPr>
-          <p:cNvPr id="5" name="TextBox 4"/>
-          <p:cNvSpPr txBox="1"/>
-          <p:nvPr/>
-        </p:nvSpPr>
-        <p:spPr>
-          <a:xfrm>
-            <a:off x="594360" y="4389120"/>
-            <a:ext cx="10972800" cy="822960"/>
-          </a:xfrm>
-          <a:prstGeom prst="rect">
-            <a:avLst/>
-          </a:prstGeom>
-          <a:noFill/>
-        </p:spPr>
-        <p:txBody>
-          <a:bodyPr wrap="square" anchor="t">
-            <a:spAutoFit/>
-          </a:bodyPr>
-          <a:lstStyle/>
-          <a:p>
-            <a:pPr algn="l">
-              <a:spcAft>
-                <a:spcPts val="0"/>
-              </a:spcAft>
-            </a:pPr>
-            <a:r>
-              <a:rPr sz="2200" b="1" i="0">
-                <a:solidFill>
-                  <a:srgbClr val="FFFFFF"/>
-                </a:solidFill>
-                <a:latin typeface="Calibri"/>
-              </a:rPr>
-              <a:t>Award in-kind engineering (valued toward US$5,000–100,000) to build FCHIP web and data tools.</a:t>
-            </a:r>
-          </a:p>
-        </p:txBody>
-      </p:sp>
-      <p:sp>
-        <p:nvSpPr>
-          <p:cNvPr id="6" name="TextBox 5"/>
-          <p:cNvSpPr txBox="1"/>
-          <p:nvPr/>
-        </p:nvSpPr>
-        <p:spPr>
-          <a:xfrm>
-            <a:off x="594360" y="5394960"/>
-            <a:ext cx="10972800" cy="365760"/>
-          </a:xfrm>
-          <a:prstGeom prst="rect">
-            <a:avLst/>
-          </a:prstGeom>
-          <a:noFill/>
-        </p:spPr>
-        <p:txBody>
-          <a:bodyPr wrap="square" anchor="t">
-            <a:spAutoFit/>
-          </a:bodyPr>
-          <a:lstStyle/>
-          <a:p>
-            <a:pPr algn="l">
-              <a:spcAft>
-                <a:spcPts val="0"/>
-              </a:spcAft>
-            </a:pPr>
-            <a:r>
-              <a:rPr sz="1400" b="0" i="1">
-                <a:solidFill>
-                  <a:srgbClr val="F2C79B"/>
-                </a:solidFill>
-                <a:latin typeface="Calibri"/>
-              </a:rPr>
-              <a:t>In-kind software development that expands community health impact</a:t>
-            </a:r>
-          </a:p>
-        </p:txBody>
-      </p:sp>
-      <p:sp>
-        <p:nvSpPr>
-          <p:cNvPr id="7" name="TextBox 6"/>
-          <p:cNvSpPr txBox="1"/>
-          <p:nvPr/>
-        </p:nvSpPr>
-        <p:spPr>
-          <a:xfrm>
-            <a:off x="594360" y="5943600"/>
-            <a:ext cx="10972800" cy="320040"/>
-          </a:xfrm>
-          <a:prstGeom prst="rect">
-            <a:avLst/>
-          </a:prstGeom>
-          <a:noFill/>
-        </p:spPr>
-        <p:txBody>
-          <a:bodyPr wrap="square" anchor="t">
-            <a:spAutoFit/>
-          </a:bodyPr>
-          <a:lstStyle/>
-          <a:p>
-            <a:pPr algn="l">
-              <a:spcAft>
-                <a:spcPts val="0"/>
-              </a:spcAft>
-            </a:pPr>
-            <a:r>
-              <a:rPr sz="1400" b="1" i="0">
                 <a:solidFill>
                   <a:srgbClr val="FFFFFF"/>
                 </a:solidFill>
@@ -3631,7 +3329,7 @@
         <p:spPr>
           <a:xfrm>
             <a:off x="0" y="0"/>
-            <a:ext cx="12191695" cy="960120"/>
+            <a:ext cx="12191695" cy="914400"/>
           </a:xfrm>
           <a:prstGeom prst="rect">
             <a:avLst/>
@@ -3642,7 +3340,6 @@
           <a:ln>
             <a:noFill/>
           </a:ln>
-          <a:effectLst/>
         </p:spPr>
         <p:style>
           <a:lnRef idx="1">
@@ -3675,7 +3372,7 @@
         <p:spPr>
           <a:xfrm>
             <a:off x="0" y="0"/>
-            <a:ext cx="164592" cy="960120"/>
+            <a:ext cx="137160" cy="914400"/>
           </a:xfrm>
           <a:prstGeom prst="rect">
             <a:avLst/>
@@ -3686,7 +3383,6 @@
           <a:ln>
             <a:noFill/>
           </a:ln>
-          <a:effectLst/>
         </p:spPr>
         <p:style>
           <a:lnRef idx="1">
@@ -3718,125 +3414,8 @@
         </p:nvSpPr>
         <p:spPr>
           <a:xfrm>
-            <a:off x="457200" y="109728"/>
-            <a:ext cx="10972800" cy="256032"/>
-          </a:xfrm>
-          <a:prstGeom prst="rect">
-            <a:avLst/>
-          </a:prstGeom>
-          <a:noFill/>
-        </p:spPr>
-        <p:txBody>
-          <a:bodyPr wrap="square" anchor="t">
-            <a:spAutoFit/>
-          </a:bodyPr>
-          <a:lstStyle/>
-          <a:p>
-            <a:pPr algn="l">
-              <a:spcAft>
-                <a:spcPts val="0"/>
-              </a:spcAft>
-            </a:pPr>
-            <a:r>
-              <a:rPr sz="1100" b="1" i="0">
-                <a:solidFill>
-                  <a:srgbClr val="C45C26"/>
-                </a:solidFill>
-                <a:latin typeface="Calibri"/>
-              </a:rPr>
-              <a:t>WIN-WIN</a:t>
-            </a:r>
-          </a:p>
-        </p:txBody>
-      </p:sp>
-      <p:sp>
-        <p:nvSpPr>
-          <p:cNvPr id="5" name="TextBox 4"/>
-          <p:cNvSpPr txBox="1"/>
-          <p:nvPr/>
-        </p:nvSpPr>
-        <p:spPr>
-          <a:xfrm>
-            <a:off x="457200" y="384048"/>
-            <a:ext cx="11247120" cy="475488"/>
-          </a:xfrm>
-          <a:prstGeom prst="rect">
-            <a:avLst/>
-          </a:prstGeom>
-          <a:noFill/>
-        </p:spPr>
-        <p:txBody>
-          <a:bodyPr wrap="square" anchor="t">
-            <a:spAutoFit/>
-          </a:bodyPr>
-          <a:lstStyle/>
-          <a:p>
-            <a:pPr algn="l">
-              <a:spcAft>
-                <a:spcPts val="0"/>
-              </a:spcAft>
-            </a:pPr>
-            <a:r>
-              <a:rPr sz="2200" b="1" i="0">
-                <a:solidFill>
-                  <a:srgbClr val="0A1F2E"/>
-                </a:solidFill>
-                <a:latin typeface="Calibri"/>
-              </a:rPr>
-              <a:t>Mutual value for FairBanks and the programme</a:t>
-            </a:r>
-          </a:p>
-        </p:txBody>
-      </p:sp>
-      <p:sp>
-        <p:nvSpPr>
-          <p:cNvPr id="6" name="TextBox 5"/>
-          <p:cNvSpPr txBox="1"/>
-          <p:nvPr/>
-        </p:nvSpPr>
-        <p:spPr>
-          <a:xfrm>
-            <a:off x="457200" y="1143000"/>
-            <a:ext cx="5486400" cy="320040"/>
-          </a:xfrm>
-          <a:prstGeom prst="rect">
-            <a:avLst/>
-          </a:prstGeom>
-          <a:noFill/>
-        </p:spPr>
-        <p:txBody>
-          <a:bodyPr wrap="square" anchor="t">
-            <a:spAutoFit/>
-          </a:bodyPr>
-          <a:lstStyle/>
-          <a:p>
-            <a:pPr algn="l">
-              <a:spcAft>
-                <a:spcPts val="0"/>
-              </a:spcAft>
-            </a:pPr>
-            <a:r>
-              <a:rPr sz="1600" b="1" i="0">
-                <a:solidFill>
-                  <a:srgbClr val="0D6E6E"/>
-                </a:solidFill>
-                <a:latin typeface="Calibri"/>
-              </a:rPr>
-              <a:t>What we gain</a:t>
-            </a:r>
-          </a:p>
-        </p:txBody>
-      </p:sp>
-      <p:sp>
-        <p:nvSpPr>
-          <p:cNvPr id="7" name="TextBox 6"/>
-          <p:cNvSpPr txBox="1"/>
-          <p:nvPr/>
-        </p:nvSpPr>
-        <p:spPr>
-          <a:xfrm>
-            <a:off x="457200" y="1508760"/>
-            <a:ext cx="5486400" cy="4800600"/>
+            <a:off x="411480" y="91440"/>
+            <a:ext cx="10972800" cy="274320"/>
           </a:xfrm>
           <a:prstGeom prst="rect">
             <a:avLst/>
@@ -3849,120 +3428,29 @@
           </a:bodyPr>
           <a:lstStyle/>
           <a:p>
-            <a:pPr>
-              <a:spcAft>
-                <a:spcPts val="800"/>
-              </a:spcAft>
-            </a:pPr>
-            <a:r>
-              <a:rPr sz="1300">
-                <a:solidFill>
-                  <a:srgbClr val="1E2F38"/>
+            <a:pPr algn="l"/>
+            <a:r>
+              <a:rPr sz="1100" b="1" i="0">
+                <a:solidFill>
+                  <a:srgbClr val="C45C26"/>
                 </a:solidFill>
                 <a:latin typeface="Calibri"/>
               </a:rPr>
-              <a:t>•  Professional engineering capacity we cannot yet fund at full strength</a:t>
-            </a:r>
-          </a:p>
-          <a:p>
-            <a:pPr>
-              <a:spcAft>
-                <a:spcPts val="800"/>
-              </a:spcAft>
-            </a:pPr>
-            <a:r>
-              <a:rPr sz="1300">
-                <a:solidFill>
-                  <a:srgbClr val="1E2F38"/>
-                </a:solidFill>
-                <a:latin typeface="Calibri"/>
-              </a:rPr>
-              <a:t>•  Faster delivery of CHW capture and partner dashboard MVP</a:t>
-            </a:r>
-          </a:p>
-          <a:p>
-            <a:pPr>
-              <a:spcAft>
-                <a:spcPts val="800"/>
-              </a:spcAft>
-            </a:pPr>
-            <a:r>
-              <a:rPr sz="1300">
-                <a:solidFill>
-                  <a:srgbClr val="1E2F38"/>
-                </a:solidFill>
-                <a:latin typeface="Calibri"/>
-              </a:rPr>
-              <a:t>•  Cleaner architecture for later AI and GIS modules</a:t>
-            </a:r>
-          </a:p>
-          <a:p>
-            <a:pPr>
-              <a:spcAft>
-                <a:spcPts val="800"/>
-              </a:spcAft>
-            </a:pPr>
-            <a:r>
-              <a:rPr sz="1300">
-                <a:solidFill>
-                  <a:srgbClr val="1E2F38"/>
-                </a:solidFill>
-                <a:latin typeface="Calibri"/>
-              </a:rPr>
-              <a:t>•  Reduced risk of brittle custom code built under field pressure</a:t>
-            </a:r>
-          </a:p>
-        </p:txBody>
-      </p:sp>
-      <p:sp>
-        <p:nvSpPr>
-          <p:cNvPr id="8" name="TextBox 7"/>
+              <a:t>THE ASK</a:t>
+            </a:r>
+          </a:p>
+        </p:txBody>
+      </p:sp>
+      <p:sp>
+        <p:nvSpPr>
+          <p:cNvPr id="5" name="TextBox 4"/>
           <p:cNvSpPr txBox="1"/>
           <p:nvPr/>
         </p:nvSpPr>
         <p:spPr>
           <a:xfrm>
-            <a:off x="6309360" y="1143000"/>
-            <a:ext cx="5486400" cy="320040"/>
-          </a:xfrm>
-          <a:prstGeom prst="rect">
-            <a:avLst/>
-          </a:prstGeom>
-          <a:noFill/>
-        </p:spPr>
-        <p:txBody>
-          <a:bodyPr wrap="square" anchor="t">
-            <a:spAutoFit/>
-          </a:bodyPr>
-          <a:lstStyle/>
-          <a:p>
-            <a:pPr algn="l">
-              <a:spcAft>
-                <a:spcPts val="0"/>
-              </a:spcAft>
-            </a:pPr>
-            <a:r>
-              <a:rPr sz="1600" b="1" i="0">
-                <a:solidFill>
-                  <a:srgbClr val="0D6E6E"/>
-                </a:solidFill>
-                <a:latin typeface="Calibri"/>
-              </a:rPr>
-              <a:t>What they gain</a:t>
-            </a:r>
-          </a:p>
-        </p:txBody>
-      </p:sp>
-      <p:sp>
-        <p:nvSpPr>
-          <p:cNvPr id="9" name="TextBox 8"/>
-          <p:cNvSpPr txBox="1"/>
-          <p:nvPr/>
-        </p:nvSpPr>
-        <p:spPr>
-          <a:xfrm>
-            <a:off x="6309360" y="1508760"/>
-            <a:ext cx="5394960" cy="4800600"/>
+            <a:off x="411480" y="384048"/>
+            <a:ext cx="10972800" cy="457200"/>
           </a:xfrm>
           <a:prstGeom prst="rect">
             <a:avLst/>
@@ -3975,81 +3463,112 @@
           </a:bodyPr>
           <a:lstStyle/>
           <a:p>
-            <a:pPr>
-              <a:spcAft>
-                <a:spcPts val="800"/>
-              </a:spcAft>
-            </a:pPr>
-            <a:r>
-              <a:rPr sz="1300">
-                <a:solidFill>
-                  <a:srgbClr val="1E2F38"/>
+            <a:pPr algn="l"/>
+            <a:r>
+              <a:rPr sz="2400" b="1" i="0">
+                <a:solidFill>
+                  <a:srgbClr val="0A1F2E"/>
                 </a:solidFill>
                 <a:latin typeface="Calibri"/>
               </a:rPr>
-              <a:t>•  Measurable users: CHWs, clinicians, and outreach teams already active</a:t>
-            </a:r>
-          </a:p>
-          <a:p>
-            <a:pPr>
-              <a:spcAft>
-                <a:spcPts val="800"/>
-              </a:spcAft>
-            </a:pPr>
-            <a:r>
-              <a:rPr sz="1300">
+              <a:t>In-kind engineering, not a cash grant</a:t>
+            </a:r>
+          </a:p>
+        </p:txBody>
+      </p:sp>
+      <p:sp>
+        <p:nvSpPr>
+          <p:cNvPr id="6" name="TextBox 5"/>
+          <p:cNvSpPr txBox="1"/>
+          <p:nvPr/>
+        </p:nvSpPr>
+        <p:spPr>
+          <a:xfrm>
+            <a:off x="457200" y="1097280"/>
+            <a:ext cx="5486400" cy="5029200"/>
+          </a:xfrm>
+          <a:prstGeom prst="rect">
+            <a:avLst/>
+          </a:prstGeom>
+          <a:noFill/>
+        </p:spPr>
+        <p:txBody>
+          <a:bodyPr wrap="square">
+            <a:spAutoFit/>
+          </a:bodyPr>
+          <a:lstStyle/>
+          <a:p>
+            <a:pPr algn="l"/>
+            <a:r>
+              <a:rPr sz="2000" b="0" i="0">
                 <a:solidFill>
                   <a:srgbClr val="1E2F38"/>
                 </a:solidFill>
                 <a:latin typeface="Calibri"/>
               </a:rPr>
-              <a:t>•  Clear community impact story — prevention, referrals, stock awareness</a:t>
-            </a:r>
-          </a:p>
-          <a:p>
-            <a:pPr>
-              <a:spcAft>
-                <a:spcPts val="800"/>
-              </a:spcAft>
-            </a:pPr>
-            <a:r>
-              <a:rPr sz="1300">
+              <a:t>Gadfly builds the pilot product.</a:t>
+            </a:r>
+          </a:p>
+          <a:p>
+            <a:pPr algn="l"/>
+            <a:r>
+              <a:rPr sz="2000" b="0" i="0">
                 <a:solidFill>
                   <a:srgbClr val="1E2F38"/>
                 </a:solidFill>
                 <a:latin typeface="Calibri"/>
               </a:rPr>
-              <a:t>•  A social enterprise that will actually deploy and maintain the product</a:t>
-            </a:r>
-          </a:p>
-          <a:p>
-            <a:pPr>
-              <a:spcAft>
-                <a:spcPts val="800"/>
-              </a:spcAft>
-            </a:pPr>
-            <a:r>
-              <a:rPr sz="1300">
+              <a:t>FairBanks runs it in live CHW outreach.</a:t>
+            </a:r>
+          </a:p>
+          <a:p>
+            <a:pPr algn="l"/>
+            <a:r>
+              <a:rPr sz="2000" b="0" i="0">
                 <a:solidFill>
                   <a:srgbClr val="1E2F38"/>
                 </a:solidFill>
                 <a:latin typeface="Calibri"/>
               </a:rPr>
-              <a:t>•  Portfolio proof that in-kind software can change primary care access</a:t>
-            </a:r>
-          </a:p>
-        </p:txBody>
-      </p:sp>
-      <p:sp>
-        <p:nvSpPr>
-          <p:cNvPr id="10" name="Rectangle 9"/>
+              <a:t>Both sides get a measurable community-health case study.</a:t>
+            </a:r>
+          </a:p>
+        </p:txBody>
+      </p:sp>
+      <p:pic>
+        <p:nvPicPr>
+          <p:cNvPr id="7" name="Picture 6" descr="mobile_capture_opt.jpg"/>
+          <p:cNvPicPr>
+            <a:picLocks noChangeAspect="1"/>
+          </p:cNvPicPr>
+          <p:nvPr/>
+        </p:nvPicPr>
+        <p:blipFill>
+          <a:blip r:embed="rId2"/>
+          <a:stretch>
+            <a:fillRect/>
+          </a:stretch>
+        </p:blipFill>
+        <p:spPr>
+          <a:xfrm>
+            <a:off x="6217920" y="1783080"/>
+            <a:ext cx="5486400" cy="3657600"/>
+          </a:xfrm>
+          <a:prstGeom prst="rect">
+            <a:avLst/>
+          </a:prstGeom>
+        </p:spPr>
+      </p:pic>
+      <p:sp>
+        <p:nvSpPr>
+          <p:cNvPr id="8" name="Rectangle 7"/>
           <p:cNvSpPr/>
           <p:nvPr/>
         </p:nvSpPr>
         <p:spPr>
           <a:xfrm>
-            <a:off x="0" y="6565392"/>
-            <a:ext cx="12191695" cy="292608"/>
+            <a:off x="0" y="6583680"/>
+            <a:ext cx="12191695" cy="274320"/>
           </a:xfrm>
           <a:prstGeom prst="rect">
             <a:avLst/>
@@ -4060,7 +3579,6 @@
           <a:ln>
             <a:noFill/>
           </a:ln>
-          <a:effectLst/>
         </p:spPr>
         <p:style>
           <a:lnRef idx="1">
@@ -4086,14 +3604,14 @@
       </p:sp>
       <p:sp>
         <p:nvSpPr>
-          <p:cNvPr id="11" name="TextBox 10"/>
+          <p:cNvPr id="9" name="TextBox 8"/>
           <p:cNvSpPr txBox="1"/>
           <p:nvPr/>
         </p:nvSpPr>
         <p:spPr>
           <a:xfrm>
-            <a:off x="365760" y="6574536"/>
-            <a:ext cx="9144000" cy="274320"/>
+            <a:off x="365760" y="6601968"/>
+            <a:ext cx="10058400" cy="228600"/>
           </a:xfrm>
           <a:prstGeom prst="rect">
             <a:avLst/>
@@ -4101,16 +3619,12 @@
           <a:noFill/>
         </p:spPr>
         <p:txBody>
-          <a:bodyPr wrap="square" anchor="ctr">
+          <a:bodyPr wrap="square">
             <a:spAutoFit/>
           </a:bodyPr>
           <a:lstStyle/>
           <a:p>
-            <a:pPr algn="l">
-              <a:spcAft>
-                <a:spcPts val="0"/>
-              </a:spcAft>
-            </a:pPr>
+            <a:pPr algn="l"/>
             <a:r>
               <a:rPr sz="900" b="0" i="0">
                 <a:solidFill>
@@ -4118,21 +3632,21 @@
                 </a:solidFill>
                 <a:latin typeface="Calibri"/>
               </a:rPr>
-              <a:t>FairBanks FCHIP  |  The Gadfly Project Custom Web Applicatio  |  Your health, our mission.</a:t>
-            </a:r>
-          </a:p>
-        </p:txBody>
-      </p:sp>
-      <p:sp>
-        <p:nvSpPr>
-          <p:cNvPr id="12" name="TextBox 11"/>
+              <a:t>FairBanks FCHIP  |  Gadfly Grant 2026  |  Your health, our mission.</a:t>
+            </a:r>
+          </a:p>
+        </p:txBody>
+      </p:sp>
+      <p:sp>
+        <p:nvSpPr>
+          <p:cNvPr id="10" name="TextBox 9"/>
           <p:cNvSpPr txBox="1"/>
           <p:nvPr/>
         </p:nvSpPr>
         <p:spPr>
           <a:xfrm>
-            <a:off x="11094415" y="6574536"/>
-            <a:ext cx="731520" cy="274320"/>
+            <a:off x="11368735" y="6601968"/>
+            <a:ext cx="548640" cy="228600"/>
           </a:xfrm>
           <a:prstGeom prst="rect">
             <a:avLst/>
@@ -4140,16 +3654,12 @@
           <a:noFill/>
         </p:spPr>
         <p:txBody>
-          <a:bodyPr wrap="square" anchor="ctr">
+          <a:bodyPr wrap="square">
             <a:spAutoFit/>
           </a:bodyPr>
           <a:lstStyle/>
           <a:p>
-            <a:pPr algn="r">
-              <a:spcAft>
-                <a:spcPts val="0"/>
-              </a:spcAft>
-            </a:pPr>
+            <a:pPr algn="r"/>
             <a:r>
               <a:rPr sz="900" b="0" i="0">
                 <a:solidFill>
@@ -4189,7 +3699,7 @@
         <p:spPr>
           <a:xfrm>
             <a:off x="0" y="0"/>
-            <a:ext cx="12191695" cy="960120"/>
+            <a:ext cx="12191695" cy="914400"/>
           </a:xfrm>
           <a:prstGeom prst="rect">
             <a:avLst/>
@@ -4200,7 +3710,6 @@
           <a:ln>
             <a:noFill/>
           </a:ln>
-          <a:effectLst/>
         </p:spPr>
         <p:style>
           <a:lnRef idx="1">
@@ -4233,7 +3742,7 @@
         <p:spPr>
           <a:xfrm>
             <a:off x="0" y="0"/>
-            <a:ext cx="164592" cy="960120"/>
+            <a:ext cx="137160" cy="914400"/>
           </a:xfrm>
           <a:prstGeom prst="rect">
             <a:avLst/>
@@ -4244,7 +3753,6 @@
           <a:ln>
             <a:noFill/>
           </a:ln>
-          <a:effectLst/>
         </p:spPr>
         <p:style>
           <a:lnRef idx="1">
@@ -4276,110 +3784,8 @@
         </p:nvSpPr>
         <p:spPr>
           <a:xfrm>
-            <a:off x="457200" y="109728"/>
-            <a:ext cx="10972800" cy="256032"/>
-          </a:xfrm>
-          <a:prstGeom prst="rect">
-            <a:avLst/>
-          </a:prstGeom>
-          <a:noFill/>
-        </p:spPr>
-        <p:txBody>
-          <a:bodyPr wrap="square" anchor="t">
-            <a:spAutoFit/>
-          </a:bodyPr>
-          <a:lstStyle/>
-          <a:p>
-            <a:pPr algn="l">
-              <a:spcAft>
-                <a:spcPts val="0"/>
-              </a:spcAft>
-            </a:pPr>
-            <a:r>
-              <a:rPr sz="1100" b="1" i="0">
-                <a:solidFill>
-                  <a:srgbClr val="C45C26"/>
-                </a:solidFill>
-                <a:latin typeface="Calibri"/>
-              </a:rPr>
-              <a:t>THE PROBLEM</a:t>
-            </a:r>
-          </a:p>
-        </p:txBody>
-      </p:sp>
-      <p:sp>
-        <p:nvSpPr>
-          <p:cNvPr id="5" name="TextBox 4"/>
-          <p:cNvSpPr txBox="1"/>
-          <p:nvPr/>
-        </p:nvSpPr>
-        <p:spPr>
-          <a:xfrm>
-            <a:off x="457200" y="384048"/>
-            <a:ext cx="11247120" cy="475488"/>
-          </a:xfrm>
-          <a:prstGeom prst="rect">
-            <a:avLst/>
-          </a:prstGeom>
-          <a:noFill/>
-        </p:spPr>
-        <p:txBody>
-          <a:bodyPr wrap="square" anchor="t">
-            <a:spAutoFit/>
-          </a:bodyPr>
-          <a:lstStyle/>
-          <a:p>
-            <a:pPr algn="l">
-              <a:spcAft>
-                <a:spcPts val="0"/>
-              </a:spcAft>
-            </a:pPr>
-            <a:r>
-              <a:rPr sz="2200" b="1" i="0">
-                <a:solidFill>
-                  <a:srgbClr val="0A1F2E"/>
-                </a:solidFill>
-                <a:latin typeface="Calibri"/>
-              </a:rPr>
-              <a:t>Health systems react too late</a:t>
-            </a:r>
-          </a:p>
-        </p:txBody>
-      </p:sp>
-      <p:pic>
-        <p:nvPicPr>
-          <p:cNvPr id="6" name="Picture 5" descr="reactive_clinic_opt.jpg"/>
-          <p:cNvPicPr>
-            <a:picLocks noChangeAspect="1"/>
-          </p:cNvPicPr>
-          <p:nvPr/>
-        </p:nvPicPr>
-        <p:blipFill>
-          <a:blip r:embed="rId2"/>
-          <a:stretch>
-            <a:fillRect/>
-          </a:stretch>
-        </p:blipFill>
-        <p:spPr>
-          <a:xfrm>
-            <a:off x="411480" y="2004691"/>
-            <a:ext cx="5303520" cy="3534417"/>
-          </a:xfrm>
-          <a:prstGeom prst="rect">
-            <a:avLst/>
-          </a:prstGeom>
-        </p:spPr>
-      </p:pic>
-      <p:sp>
-        <p:nvSpPr>
-          <p:cNvPr id="7" name="TextBox 6"/>
-          <p:cNvSpPr txBox="1"/>
-          <p:nvPr/>
-        </p:nvSpPr>
-        <p:spPr>
-          <a:xfrm>
-            <a:off x="6035040" y="1234440"/>
-            <a:ext cx="5669280" cy="5074920"/>
+            <a:off x="411480" y="91440"/>
+            <a:ext cx="10972800" cy="274320"/>
           </a:xfrm>
           <a:prstGeom prst="rect">
             <a:avLst/>
@@ -4392,97 +3798,538 @@
           </a:bodyPr>
           <a:lstStyle/>
           <a:p>
-            <a:pPr>
-              <a:spcAft>
-                <a:spcPts val="800"/>
-              </a:spcAft>
-            </a:pPr>
-            <a:r>
-              <a:rPr sz="1400">
-                <a:solidFill>
-                  <a:srgbClr val="1E2F38"/>
+            <a:pPr algn="l"/>
+            <a:r>
+              <a:rPr sz="1100" b="1" i="0">
+                <a:solidFill>
+                  <a:srgbClr val="C45C26"/>
                 </a:solidFill>
                 <a:latin typeface="Calibri"/>
               </a:rPr>
-              <a:t>•  Care often starts only after people fall sick</a:t>
-            </a:r>
-          </a:p>
-          <a:p>
-            <a:pPr>
-              <a:spcAft>
-                <a:spcPts val="800"/>
-              </a:spcAft>
-            </a:pPr>
-            <a:r>
-              <a:rPr sz="1400">
-                <a:solidFill>
-                  <a:srgbClr val="1E2F38"/>
+              <a:t>PRODUCT SCOPE</a:t>
+            </a:r>
+          </a:p>
+        </p:txBody>
+      </p:sp>
+      <p:sp>
+        <p:nvSpPr>
+          <p:cNvPr id="5" name="TextBox 4"/>
+          <p:cNvSpPr txBox="1"/>
+          <p:nvPr/>
+        </p:nvSpPr>
+        <p:spPr>
+          <a:xfrm>
+            <a:off x="411480" y="384048"/>
+            <a:ext cx="10972800" cy="457200"/>
+          </a:xfrm>
+          <a:prstGeom prst="rect">
+            <a:avLst/>
+          </a:prstGeom>
+          <a:noFill/>
+        </p:spPr>
+        <p:txBody>
+          <a:bodyPr wrap="square">
+            <a:spAutoFit/>
+          </a:bodyPr>
+          <a:lstStyle/>
+          <a:p>
+            <a:pPr algn="l"/>
+            <a:r>
+              <a:rPr sz="2400" b="1" i="0">
+                <a:solidFill>
+                  <a:srgbClr val="0A1F2E"/>
                 </a:solidFill>
                 <a:latin typeface="Calibri"/>
               </a:rPr>
-              <a:t>•  Community health data sits in paper registers and silos</a:t>
-            </a:r>
-          </a:p>
-          <a:p>
-            <a:pPr>
-              <a:spcAft>
-                <a:spcPts val="800"/>
-              </a:spcAft>
-            </a:pPr>
-            <a:r>
-              <a:rPr sz="1400">
-                <a:solidFill>
-                  <a:srgbClr val="1E2F38"/>
+              <a:t>Three modules that complete the loop</a:t>
+            </a:r>
+          </a:p>
+        </p:txBody>
+      </p:sp>
+      <p:sp>
+        <p:nvSpPr>
+          <p:cNvPr id="6" name="Rectangle 5"/>
+          <p:cNvSpPr/>
+          <p:nvPr/>
+        </p:nvSpPr>
+        <p:spPr>
+          <a:xfrm>
+            <a:off x="365760" y="1188720"/>
+            <a:ext cx="3749039" cy="4846320"/>
+          </a:xfrm>
+          <a:prstGeom prst="rect">
+            <a:avLst/>
+          </a:prstGeom>
+          <a:solidFill>
+            <a:srgbClr val="FFFFFF"/>
+          </a:solidFill>
+          <a:ln>
+            <a:solidFill>
+              <a:srgbClr val="D0DCDC"/>
+            </a:solidFill>
+          </a:ln>
+        </p:spPr>
+        <p:style>
+          <a:lnRef idx="1">
+            <a:schemeClr val="accent1"/>
+          </a:lnRef>
+          <a:fillRef idx="3">
+            <a:schemeClr val="accent1"/>
+          </a:fillRef>
+          <a:effectRef idx="2">
+            <a:schemeClr val="accent1"/>
+          </a:effectRef>
+          <a:fontRef idx="minor">
+            <a:schemeClr val="lt1"/>
+          </a:fontRef>
+        </p:style>
+        <p:txBody>
+          <a:bodyPr rtlCol="0" anchor="ctr"/>
+          <a:lstStyle/>
+          <a:p>
+            <a:pPr algn="ctr"/>
+          </a:p>
+        </p:txBody>
+      </p:sp>
+      <p:sp>
+        <p:nvSpPr>
+          <p:cNvPr id="7" name="Rectangle 6"/>
+          <p:cNvSpPr/>
+          <p:nvPr/>
+        </p:nvSpPr>
+        <p:spPr>
+          <a:xfrm>
+            <a:off x="365760" y="1188720"/>
+            <a:ext cx="3749039" cy="109728"/>
+          </a:xfrm>
+          <a:prstGeom prst="rect">
+            <a:avLst/>
+          </a:prstGeom>
+          <a:solidFill>
+            <a:srgbClr val="0D6E6E"/>
+          </a:solidFill>
+          <a:ln>
+            <a:noFill/>
+          </a:ln>
+        </p:spPr>
+        <p:style>
+          <a:lnRef idx="1">
+            <a:schemeClr val="accent1"/>
+          </a:lnRef>
+          <a:fillRef idx="3">
+            <a:schemeClr val="accent1"/>
+          </a:fillRef>
+          <a:effectRef idx="2">
+            <a:schemeClr val="accent1"/>
+          </a:effectRef>
+          <a:fontRef idx="minor">
+            <a:schemeClr val="lt1"/>
+          </a:fontRef>
+        </p:style>
+        <p:txBody>
+          <a:bodyPr rtlCol="0" anchor="ctr"/>
+          <a:lstStyle/>
+          <a:p>
+            <a:pPr algn="ctr"/>
+          </a:p>
+        </p:txBody>
+      </p:sp>
+      <p:sp>
+        <p:nvSpPr>
+          <p:cNvPr id="8" name="TextBox 7"/>
+          <p:cNvSpPr txBox="1"/>
+          <p:nvPr/>
+        </p:nvSpPr>
+        <p:spPr>
+          <a:xfrm>
+            <a:off x="548640" y="1417320"/>
+            <a:ext cx="3383280" cy="457200"/>
+          </a:xfrm>
+          <a:prstGeom prst="rect">
+            <a:avLst/>
+          </a:prstGeom>
+          <a:noFill/>
+        </p:spPr>
+        <p:txBody>
+          <a:bodyPr wrap="square">
+            <a:spAutoFit/>
+          </a:bodyPr>
+          <a:lstStyle/>
+          <a:p>
+            <a:pPr algn="l"/>
+            <a:r>
+              <a:rPr sz="1800" b="1" i="0">
+                <a:solidFill>
+                  <a:srgbClr val="0D6E6E"/>
                 </a:solidFill>
                 <a:latin typeface="Calibri"/>
               </a:rPr>
-              <a:t>•  High-risk pregnancies and NCDs are found too late</a:t>
-            </a:r>
-          </a:p>
-          <a:p>
-            <a:pPr>
-              <a:spcAft>
-                <a:spcPts val="800"/>
-              </a:spcAft>
-            </a:pPr>
-            <a:r>
-              <a:rPr sz="1400">
-                <a:solidFill>
-                  <a:srgbClr val="1E2F38"/>
+              <a:t>CHW Field Capture</a:t>
+            </a:r>
+          </a:p>
+        </p:txBody>
+      </p:sp>
+      <p:sp>
+        <p:nvSpPr>
+          <p:cNvPr id="9" name="TextBox 8"/>
+          <p:cNvSpPr txBox="1"/>
+          <p:nvPr/>
+        </p:nvSpPr>
+        <p:spPr>
+          <a:xfrm>
+            <a:off x="548640" y="2011680"/>
+            <a:ext cx="3383280" cy="3657600"/>
+          </a:xfrm>
+          <a:prstGeom prst="rect">
+            <a:avLst/>
+          </a:prstGeom>
+          <a:noFill/>
+        </p:spPr>
+        <p:txBody>
+          <a:bodyPr wrap="square">
+            <a:spAutoFit/>
+          </a:bodyPr>
+          <a:lstStyle/>
+          <a:p>
+            <a:pPr algn="l"/>
+            <a:r>
+              <a:rPr sz="1400" b="0" i="0">
+                <a:solidFill>
+                  <a:srgbClr val="3A4A54"/>
                 </a:solidFill>
                 <a:latin typeface="Calibri"/>
               </a:rPr>
-              <a:t>•  Medicine stock-outs hit hard during disease surges</a:t>
-            </a:r>
-          </a:p>
-          <a:p>
-            <a:pPr>
-              <a:spcAft>
-                <a:spcPts val="800"/>
-              </a:spcAft>
-            </a:pPr>
-            <a:r>
-              <a:rPr sz="1400">
-                <a:solidFill>
-                  <a:srgbClr val="1E2F38"/>
+              <a:t>Offline-first mobile web forms for household visits: vitals, maternal flags, immunisation, NCD screening, referrals. Works on low-end Android phones; queues submissions when connectivity drops.</a:t>
+            </a:r>
+          </a:p>
+        </p:txBody>
+      </p:sp>
+      <p:sp>
+        <p:nvSpPr>
+          <p:cNvPr id="10" name="Rectangle 9"/>
+          <p:cNvSpPr/>
+          <p:nvPr/>
+        </p:nvSpPr>
+        <p:spPr>
+          <a:xfrm>
+            <a:off x="4343400" y="1188720"/>
+            <a:ext cx="3749039" cy="4846320"/>
+          </a:xfrm>
+          <a:prstGeom prst="rect">
+            <a:avLst/>
+          </a:prstGeom>
+          <a:solidFill>
+            <a:srgbClr val="FFFFFF"/>
+          </a:solidFill>
+          <a:ln>
+            <a:solidFill>
+              <a:srgbClr val="D0DCDC"/>
+            </a:solidFill>
+          </a:ln>
+        </p:spPr>
+        <p:style>
+          <a:lnRef idx="1">
+            <a:schemeClr val="accent1"/>
+          </a:lnRef>
+          <a:fillRef idx="3">
+            <a:schemeClr val="accent1"/>
+          </a:fillRef>
+          <a:effectRef idx="2">
+            <a:schemeClr val="accent1"/>
+          </a:effectRef>
+          <a:fontRef idx="minor">
+            <a:schemeClr val="lt1"/>
+          </a:fontRef>
+        </p:style>
+        <p:txBody>
+          <a:bodyPr rtlCol="0" anchor="ctr"/>
+          <a:lstStyle/>
+          <a:p>
+            <a:pPr algn="ctr"/>
+          </a:p>
+        </p:txBody>
+      </p:sp>
+      <p:sp>
+        <p:nvSpPr>
+          <p:cNvPr id="11" name="Rectangle 10"/>
+          <p:cNvSpPr/>
+          <p:nvPr/>
+        </p:nvSpPr>
+        <p:spPr>
+          <a:xfrm>
+            <a:off x="4343400" y="1188720"/>
+            <a:ext cx="3749039" cy="109728"/>
+          </a:xfrm>
+          <a:prstGeom prst="rect">
+            <a:avLst/>
+          </a:prstGeom>
+          <a:solidFill>
+            <a:srgbClr val="0D6E6E"/>
+          </a:solidFill>
+          <a:ln>
+            <a:noFill/>
+          </a:ln>
+        </p:spPr>
+        <p:style>
+          <a:lnRef idx="1">
+            <a:schemeClr val="accent1"/>
+          </a:lnRef>
+          <a:fillRef idx="3">
+            <a:schemeClr val="accent1"/>
+          </a:fillRef>
+          <a:effectRef idx="2">
+            <a:schemeClr val="accent1"/>
+          </a:effectRef>
+          <a:fontRef idx="minor">
+            <a:schemeClr val="lt1"/>
+          </a:fontRef>
+        </p:style>
+        <p:txBody>
+          <a:bodyPr rtlCol="0" anchor="ctr"/>
+          <a:lstStyle/>
+          <a:p>
+            <a:pPr algn="ctr"/>
+          </a:p>
+        </p:txBody>
+      </p:sp>
+      <p:sp>
+        <p:nvSpPr>
+          <p:cNvPr id="12" name="TextBox 11"/>
+          <p:cNvSpPr txBox="1"/>
+          <p:nvPr/>
+        </p:nvSpPr>
+        <p:spPr>
+          <a:xfrm>
+            <a:off x="4526280" y="1417320"/>
+            <a:ext cx="3383280" cy="457200"/>
+          </a:xfrm>
+          <a:prstGeom prst="rect">
+            <a:avLst/>
+          </a:prstGeom>
+          <a:noFill/>
+        </p:spPr>
+        <p:txBody>
+          <a:bodyPr wrap="square">
+            <a:spAutoFit/>
+          </a:bodyPr>
+          <a:lstStyle/>
+          <a:p>
+            <a:pPr algn="l"/>
+            <a:r>
+              <a:rPr sz="1800" b="1" i="0">
+                <a:solidFill>
+                  <a:srgbClr val="0D6E6E"/>
                 </a:solidFill>
                 <a:latin typeface="Calibri"/>
               </a:rPr>
-              <a:t>•  Health shocks push poor families deeper into hardship</a:t>
-            </a:r>
-          </a:p>
-        </p:txBody>
-      </p:sp>
-      <p:sp>
-        <p:nvSpPr>
-          <p:cNvPr id="8" name="Rectangle 7"/>
+              <a:t>Sync &amp; Data Layer</a:t>
+            </a:r>
+          </a:p>
+        </p:txBody>
+      </p:sp>
+      <p:sp>
+        <p:nvSpPr>
+          <p:cNvPr id="13" name="TextBox 12"/>
+          <p:cNvSpPr txBox="1"/>
+          <p:nvPr/>
+        </p:nvSpPr>
+        <p:spPr>
+          <a:xfrm>
+            <a:off x="4526280" y="2011680"/>
+            <a:ext cx="3383280" cy="3657600"/>
+          </a:xfrm>
+          <a:prstGeom prst="rect">
+            <a:avLst/>
+          </a:prstGeom>
+          <a:noFill/>
+        </p:spPr>
+        <p:txBody>
+          <a:bodyPr wrap="square">
+            <a:spAutoFit/>
+          </a:bodyPr>
+          <a:lstStyle/>
+          <a:p>
+            <a:pPr algn="l"/>
+            <a:r>
+              <a:rPr sz="1400" b="0" i="0">
+                <a:solidFill>
+                  <a:srgbClr val="3A4A54"/>
+                </a:solidFill>
+                <a:latin typeface="Calibri"/>
+              </a:rPr>
+              <a:t>Secure API, role-based access, conflict handling, and audit trail from device to cloud. Structured records ready for analytics and export.</a:t>
+            </a:r>
+          </a:p>
+        </p:txBody>
+      </p:sp>
+      <p:sp>
+        <p:nvSpPr>
+          <p:cNvPr id="14" name="Rectangle 13"/>
           <p:cNvSpPr/>
           <p:nvPr/>
         </p:nvSpPr>
         <p:spPr>
           <a:xfrm>
-            <a:off x="0" y="6565392"/>
-            <a:ext cx="12191695" cy="292608"/>
+            <a:off x="8321040" y="1188720"/>
+            <a:ext cx="3749039" cy="4846320"/>
+          </a:xfrm>
+          <a:prstGeom prst="rect">
+            <a:avLst/>
+          </a:prstGeom>
+          <a:solidFill>
+            <a:srgbClr val="FFFFFF"/>
+          </a:solidFill>
+          <a:ln>
+            <a:solidFill>
+              <a:srgbClr val="D0DCDC"/>
+            </a:solidFill>
+          </a:ln>
+        </p:spPr>
+        <p:style>
+          <a:lnRef idx="1">
+            <a:schemeClr val="accent1"/>
+          </a:lnRef>
+          <a:fillRef idx="3">
+            <a:schemeClr val="accent1"/>
+          </a:fillRef>
+          <a:effectRef idx="2">
+            <a:schemeClr val="accent1"/>
+          </a:effectRef>
+          <a:fontRef idx="minor">
+            <a:schemeClr val="lt1"/>
+          </a:fontRef>
+        </p:style>
+        <p:txBody>
+          <a:bodyPr rtlCol="0" anchor="ctr"/>
+          <a:lstStyle/>
+          <a:p>
+            <a:pPr algn="ctr"/>
+          </a:p>
+        </p:txBody>
+      </p:sp>
+      <p:sp>
+        <p:nvSpPr>
+          <p:cNvPr id="15" name="Rectangle 14"/>
+          <p:cNvSpPr/>
+          <p:nvPr/>
+        </p:nvSpPr>
+        <p:spPr>
+          <a:xfrm>
+            <a:off x="8321040" y="1188720"/>
+            <a:ext cx="3749039" cy="109728"/>
+          </a:xfrm>
+          <a:prstGeom prst="rect">
+            <a:avLst/>
+          </a:prstGeom>
+          <a:solidFill>
+            <a:srgbClr val="0D6E6E"/>
+          </a:solidFill>
+          <a:ln>
+            <a:noFill/>
+          </a:ln>
+        </p:spPr>
+        <p:style>
+          <a:lnRef idx="1">
+            <a:schemeClr val="accent1"/>
+          </a:lnRef>
+          <a:fillRef idx="3">
+            <a:schemeClr val="accent1"/>
+          </a:fillRef>
+          <a:effectRef idx="2">
+            <a:schemeClr val="accent1"/>
+          </a:effectRef>
+          <a:fontRef idx="minor">
+            <a:schemeClr val="lt1"/>
+          </a:fontRef>
+        </p:style>
+        <p:txBody>
+          <a:bodyPr rtlCol="0" anchor="ctr"/>
+          <a:lstStyle/>
+          <a:p>
+            <a:pPr algn="ctr"/>
+          </a:p>
+        </p:txBody>
+      </p:sp>
+      <p:sp>
+        <p:nvSpPr>
+          <p:cNvPr id="16" name="TextBox 15"/>
+          <p:cNvSpPr txBox="1"/>
+          <p:nvPr/>
+        </p:nvSpPr>
+        <p:spPr>
+          <a:xfrm>
+            <a:off x="8503920" y="1417320"/>
+            <a:ext cx="3383280" cy="457200"/>
+          </a:xfrm>
+          <a:prstGeom prst="rect">
+            <a:avLst/>
+          </a:prstGeom>
+          <a:noFill/>
+        </p:spPr>
+        <p:txBody>
+          <a:bodyPr wrap="square">
+            <a:spAutoFit/>
+          </a:bodyPr>
+          <a:lstStyle/>
+          <a:p>
+            <a:pPr algn="l"/>
+            <a:r>
+              <a:rPr sz="1800" b="1" i="0">
+                <a:solidFill>
+                  <a:srgbClr val="0D6E6E"/>
+                </a:solidFill>
+                <a:latin typeface="Calibri"/>
+              </a:rPr>
+              <a:t>Operations Dashboard</a:t>
+            </a:r>
+          </a:p>
+        </p:txBody>
+      </p:sp>
+      <p:sp>
+        <p:nvSpPr>
+          <p:cNvPr id="17" name="TextBox 16"/>
+          <p:cNvSpPr txBox="1"/>
+          <p:nvPr/>
+        </p:nvSpPr>
+        <p:spPr>
+          <a:xfrm>
+            <a:off x="8503920" y="2011680"/>
+            <a:ext cx="3383280" cy="3657600"/>
+          </a:xfrm>
+          <a:prstGeom prst="rect">
+            <a:avLst/>
+          </a:prstGeom>
+          <a:noFill/>
+        </p:spPr>
+        <p:txBody>
+          <a:bodyPr wrap="square">
+            <a:spAutoFit/>
+          </a:bodyPr>
+          <a:lstStyle/>
+          <a:p>
+            <a:pPr algn="l"/>
+            <a:r>
+              <a:rPr sz="1400" b="0" i="0">
+                <a:solidFill>
+                  <a:srgbClr val="3A4A54"/>
+                </a:solidFill>
+                <a:latin typeface="Calibri"/>
+              </a:rPr>
+              <a:t>Live view of submissions by area and programme; alert queue for high-risk cases; basic GIS map of activity hotspots; export for reporting.</a:t>
+            </a:r>
+          </a:p>
+        </p:txBody>
+      </p:sp>
+      <p:sp>
+        <p:nvSpPr>
+          <p:cNvPr id="18" name="Rectangle 17"/>
+          <p:cNvSpPr/>
+          <p:nvPr/>
+        </p:nvSpPr>
+        <p:spPr>
+          <a:xfrm>
+            <a:off x="0" y="6583680"/>
+            <a:ext cx="12191695" cy="274320"/>
           </a:xfrm>
           <a:prstGeom prst="rect">
             <a:avLst/>
@@ -4493,7 +4340,6 @@
           <a:ln>
             <a:noFill/>
           </a:ln>
-          <a:effectLst/>
         </p:spPr>
         <p:style>
           <a:lnRef idx="1">
@@ -4519,14 +4365,14 @@
       </p:sp>
       <p:sp>
         <p:nvSpPr>
-          <p:cNvPr id="9" name="TextBox 8"/>
+          <p:cNvPr id="19" name="TextBox 18"/>
           <p:cNvSpPr txBox="1"/>
           <p:nvPr/>
         </p:nvSpPr>
         <p:spPr>
           <a:xfrm>
-            <a:off x="365760" y="6574536"/>
-            <a:ext cx="9144000" cy="274320"/>
+            <a:off x="365760" y="6601968"/>
+            <a:ext cx="10058400" cy="228600"/>
           </a:xfrm>
           <a:prstGeom prst="rect">
             <a:avLst/>
@@ -4534,16 +4380,12 @@
           <a:noFill/>
         </p:spPr>
         <p:txBody>
-          <a:bodyPr wrap="square" anchor="ctr">
+          <a:bodyPr wrap="square">
             <a:spAutoFit/>
           </a:bodyPr>
           <a:lstStyle/>
           <a:p>
-            <a:pPr algn="l">
-              <a:spcAft>
-                <a:spcPts val="0"/>
-              </a:spcAft>
-            </a:pPr>
+            <a:pPr algn="l"/>
             <a:r>
               <a:rPr sz="900" b="0" i="0">
                 <a:solidFill>
@@ -4551,21 +4393,21 @@
                 </a:solidFill>
                 <a:latin typeface="Calibri"/>
               </a:rPr>
-              <a:t>FairBanks FCHIP  |  The Gadfly Project Custom Web Applicatio  |  Your health, our mission.</a:t>
-            </a:r>
-          </a:p>
-        </p:txBody>
-      </p:sp>
-      <p:sp>
-        <p:nvSpPr>
-          <p:cNvPr id="10" name="TextBox 9"/>
+              <a:t>FairBanks FCHIP  |  Gadfly Grant 2026  |  Your health, our mission.</a:t>
+            </a:r>
+          </a:p>
+        </p:txBody>
+      </p:sp>
+      <p:sp>
+        <p:nvSpPr>
+          <p:cNvPr id="20" name="TextBox 19"/>
           <p:cNvSpPr txBox="1"/>
           <p:nvPr/>
         </p:nvSpPr>
         <p:spPr>
           <a:xfrm>
-            <a:off x="11094415" y="6574536"/>
-            <a:ext cx="731520" cy="274320"/>
+            <a:off x="11368735" y="6601968"/>
+            <a:ext cx="548640" cy="228600"/>
           </a:xfrm>
           <a:prstGeom prst="rect">
             <a:avLst/>
@@ -4573,16 +4415,12 @@
           <a:noFill/>
         </p:spPr>
         <p:txBody>
-          <a:bodyPr wrap="square" anchor="ctr">
+          <a:bodyPr wrap="square">
             <a:spAutoFit/>
           </a:bodyPr>
           <a:lstStyle/>
           <a:p>
-            <a:pPr algn="r">
-              <a:spcAft>
-                <a:spcPts val="0"/>
-              </a:spcAft>
-            </a:pPr>
+            <a:pPr algn="r"/>
             <a:r>
               <a:rPr sz="900" b="0" i="0">
                 <a:solidFill>
@@ -4622,7 +4460,7 @@
         <p:spPr>
           <a:xfrm>
             <a:off x="0" y="0"/>
-            <a:ext cx="12191695" cy="960120"/>
+            <a:ext cx="12191695" cy="914400"/>
           </a:xfrm>
           <a:prstGeom prst="rect">
             <a:avLst/>
@@ -4633,7 +4471,6 @@
           <a:ln>
             <a:noFill/>
           </a:ln>
-          <a:effectLst/>
         </p:spPr>
         <p:style>
           <a:lnRef idx="1">
@@ -4666,7 +4503,7 @@
         <p:spPr>
           <a:xfrm>
             <a:off x="0" y="0"/>
-            <a:ext cx="164592" cy="960120"/>
+            <a:ext cx="137160" cy="914400"/>
           </a:xfrm>
           <a:prstGeom prst="rect">
             <a:avLst/>
@@ -4677,7 +4514,6 @@
           <a:ln>
             <a:noFill/>
           </a:ln>
-          <a:effectLst/>
         </p:spPr>
         <p:style>
           <a:lnRef idx="1">
@@ -4709,8 +4545,8 @@
         </p:nvSpPr>
         <p:spPr>
           <a:xfrm>
-            <a:off x="457200" y="109728"/>
-            <a:ext cx="10972800" cy="256032"/>
+            <a:off x="411480" y="91440"/>
+            <a:ext cx="10972800" cy="274320"/>
           </a:xfrm>
           <a:prstGeom prst="rect">
             <a:avLst/>
@@ -4718,16 +4554,12 @@
           <a:noFill/>
         </p:spPr>
         <p:txBody>
-          <a:bodyPr wrap="square" anchor="t">
+          <a:bodyPr wrap="square">
             <a:spAutoFit/>
           </a:bodyPr>
           <a:lstStyle/>
           <a:p>
-            <a:pPr algn="l">
-              <a:spcAft>
-                <a:spcPts val="0"/>
-              </a:spcAft>
-            </a:pPr>
+            <a:pPr algn="l"/>
             <a:r>
               <a:rPr sz="1100" b="1" i="0">
                 <a:solidFill>
@@ -4735,7 +4567,7 @@
                 </a:solidFill>
                 <a:latin typeface="Calibri"/>
               </a:rPr>
-              <a:t>THE SOLUTION</a:t>
+              <a:t>USERS SERVED</a:t>
             </a:r>
           </a:p>
         </p:txBody>
@@ -4748,8 +4580,8 @@
         </p:nvSpPr>
         <p:spPr>
           <a:xfrm>
-            <a:off x="457200" y="384048"/>
-            <a:ext cx="11247120" cy="475488"/>
+            <a:off x="411480" y="384048"/>
+            <a:ext cx="10972800" cy="457200"/>
           </a:xfrm>
           <a:prstGeom prst="rect">
             <a:avLst/>
@@ -4757,31 +4589,27 @@
           <a:noFill/>
         </p:spPr>
         <p:txBody>
-          <a:bodyPr wrap="square" anchor="t">
+          <a:bodyPr wrap="square">
             <a:spAutoFit/>
           </a:bodyPr>
           <a:lstStyle/>
           <a:p>
-            <a:pPr algn="l">
-              <a:spcAft>
-                <a:spcPts val="0"/>
-              </a:spcAft>
-            </a:pPr>
-            <a:r>
-              <a:rPr sz="2200" b="1" i="0">
+            <a:pPr algn="l"/>
+            <a:r>
+              <a:rPr sz="2400" b="1" i="0">
                 <a:solidFill>
                   <a:srgbClr val="0A1F2E"/>
                 </a:solidFill>
                 <a:latin typeface="Calibri"/>
               </a:rPr>
-              <a:t>FCHIP — community health intelligence</a:t>
+              <a:t>Real people, real weekly workflows</a:t>
             </a:r>
           </a:p>
         </p:txBody>
       </p:sp>
       <p:pic>
         <p:nvPicPr>
-          <p:cNvPr id="6" name="Picture 5" descr="data_flow_iso_labeled_opt.jpg"/>
+          <p:cNvPr id="6" name="Picture 5" descr="staff_outreach_conversation_01_opt.jpg"/>
           <p:cNvPicPr>
             <a:picLocks noChangeAspect="1"/>
           </p:cNvPicPr>
@@ -4795,8 +4623,8 @@
         </p:blipFill>
         <p:spPr>
           <a:xfrm>
-            <a:off x="365760" y="1639062"/>
-            <a:ext cx="6400800" cy="4265676"/>
+            <a:off x="365760" y="1889760"/>
+            <a:ext cx="5303520" cy="3535680"/>
           </a:xfrm>
           <a:prstGeom prst="rect">
             <a:avLst/>
@@ -4811,8 +4639,8 @@
         </p:nvSpPr>
         <p:spPr>
           <a:xfrm>
-            <a:off x="7040880" y="1234440"/>
-            <a:ext cx="4754880" cy="5074920"/>
+            <a:off x="5943600" y="1234440"/>
+            <a:ext cx="5760720" cy="1097280"/>
           </a:xfrm>
           <a:prstGeom prst="rect">
             <a:avLst/>
@@ -4825,81 +4653,134 @@
           </a:bodyPr>
           <a:lstStyle/>
           <a:p>
-            <a:pPr>
-              <a:spcAft>
-                <a:spcPts val="800"/>
-              </a:spcAft>
-            </a:pPr>
-            <a:r>
-              <a:rPr sz="1400">
+            <a:pPr algn="l"/>
+            <a:r>
+              <a:rPr sz="1500" b="0" i="0">
                 <a:solidFill>
                   <a:srgbClr val="1E2F38"/>
                 </a:solidFill>
                 <a:latin typeface="Calibri"/>
               </a:rPr>
-              <a:t>•  CHWs and VHTs capture structured data at household level</a:t>
-            </a:r>
-          </a:p>
-          <a:p>
-            <a:pPr>
-              <a:spcAft>
-                <a:spcPts val="800"/>
-              </a:spcAft>
-            </a:pPr>
-            <a:r>
-              <a:rPr sz="1400">
+              <a:t>•  40+ Community Health Workers and VHTs in Bukoto, Kyebando, Kisaasi, Kamwokya, Kikaaya</a:t>
+            </a:r>
+          </a:p>
+        </p:txBody>
+      </p:sp>
+      <p:sp>
+        <p:nvSpPr>
+          <p:cNvPr id="8" name="TextBox 7"/>
+          <p:cNvSpPr txBox="1"/>
+          <p:nvPr/>
+        </p:nvSpPr>
+        <p:spPr>
+          <a:xfrm>
+            <a:off x="5943600" y="2377440"/>
+            <a:ext cx="5760720" cy="1097280"/>
+          </a:xfrm>
+          <a:prstGeom prst="rect">
+            <a:avLst/>
+          </a:prstGeom>
+          <a:noFill/>
+        </p:spPr>
+        <p:txBody>
+          <a:bodyPr wrap="square">
+            <a:spAutoFit/>
+          </a:bodyPr>
+          <a:lstStyle/>
+          <a:p>
+            <a:pPr algn="l"/>
+            <a:r>
+              <a:rPr sz="1500" b="0" i="0">
                 <a:solidFill>
                   <a:srgbClr val="1E2F38"/>
                 </a:solidFill>
                 <a:latin typeface="Calibri"/>
               </a:rPr>
-              <a:t>•  FCHIP applies AI, ML, and GIS to predict risk early</a:t>
-            </a:r>
-          </a:p>
-          <a:p>
-            <a:pPr>
-              <a:spcAft>
-                <a:spcPts val="800"/>
-              </a:spcAft>
-            </a:pPr>
-            <a:r>
-              <a:rPr sz="1400">
+              <a:t>•  FairBanks clinic nurses and outreach coordinators who triage referrals</a:t>
+            </a:r>
+          </a:p>
+        </p:txBody>
+      </p:sp>
+      <p:sp>
+        <p:nvSpPr>
+          <p:cNvPr id="9" name="TextBox 8"/>
+          <p:cNvSpPr txBox="1"/>
+          <p:nvPr/>
+        </p:nvSpPr>
+        <p:spPr>
+          <a:xfrm>
+            <a:off x="5943600" y="3520440"/>
+            <a:ext cx="5760720" cy="1097280"/>
+          </a:xfrm>
+          <a:prstGeom prst="rect">
+            <a:avLst/>
+          </a:prstGeom>
+          <a:noFill/>
+        </p:spPr>
+        <p:txBody>
+          <a:bodyPr wrap="square">
+            <a:spAutoFit/>
+          </a:bodyPr>
+          <a:lstStyle/>
+          <a:p>
+            <a:pPr algn="l"/>
+            <a:r>
+              <a:rPr sz="1500" b="0" i="0">
                 <a:solidFill>
                   <a:srgbClr val="1E2F38"/>
                 </a:solidFill>
                 <a:latin typeface="Calibri"/>
               </a:rPr>
-              <a:t>•  Alerts reach clinics, districts, and partners in time to act</a:t>
-            </a:r>
-          </a:p>
-          <a:p>
-            <a:pPr>
-              <a:spcAft>
-                <a:spcPts val="800"/>
-              </a:spcAft>
-            </a:pPr>
-            <a:r>
-              <a:rPr sz="1400">
+              <a:t>•  Programme managers tracking maternal, child, geriatric (Gericare), and NCD outreach</a:t>
+            </a:r>
+          </a:p>
+        </p:txBody>
+      </p:sp>
+      <p:sp>
+        <p:nvSpPr>
+          <p:cNvPr id="10" name="TextBox 9"/>
+          <p:cNvSpPr txBox="1"/>
+          <p:nvPr/>
+        </p:nvSpPr>
+        <p:spPr>
+          <a:xfrm>
+            <a:off x="5943600" y="4663440"/>
+            <a:ext cx="5760720" cy="1097280"/>
+          </a:xfrm>
+          <a:prstGeom prst="rect">
+            <a:avLst/>
+          </a:prstGeom>
+          <a:noFill/>
+        </p:spPr>
+        <p:txBody>
+          <a:bodyPr wrap="square">
+            <a:spAutoFit/>
+          </a:bodyPr>
+          <a:lstStyle/>
+          <a:p>
+            <a:pPr algn="l"/>
+            <a:r>
+              <a:rPr sz="1500" b="0" i="0">
                 <a:solidFill>
                   <a:srgbClr val="1E2F38"/>
                 </a:solidFill>
                 <a:latin typeface="Calibri"/>
               </a:rPr>
-              <a:t>•  Built on a live medical centre and community programmes</a:t>
-            </a:r>
-          </a:p>
-        </p:txBody>
-      </p:sp>
-      <p:sp>
-        <p:nvSpPr>
-          <p:cNvPr id="8" name="Rectangle 7"/>
+              <a:t>•  Future district and NGO partners who need interoperable community data feeds</a:t>
+            </a:r>
+          </a:p>
+        </p:txBody>
+      </p:sp>
+      <p:sp>
+        <p:nvSpPr>
+          <p:cNvPr id="11" name="Rectangle 10"/>
           <p:cNvSpPr/>
           <p:nvPr/>
         </p:nvSpPr>
         <p:spPr>
           <a:xfrm>
-            <a:off x="0" y="6565392"/>
-            <a:ext cx="12191695" cy="292608"/>
+            <a:off x="0" y="6583680"/>
+            <a:ext cx="12191695" cy="274320"/>
           </a:xfrm>
           <a:prstGeom prst="rect">
             <a:avLst/>
@@ -4910,7 +4791,6 @@
           <a:ln>
             <a:noFill/>
           </a:ln>
-          <a:effectLst/>
         </p:spPr>
         <p:style>
           <a:lnRef idx="1">
@@ -4936,14 +4816,14 @@
       </p:sp>
       <p:sp>
         <p:nvSpPr>
-          <p:cNvPr id="9" name="TextBox 8"/>
+          <p:cNvPr id="12" name="TextBox 11"/>
           <p:cNvSpPr txBox="1"/>
           <p:nvPr/>
         </p:nvSpPr>
         <p:spPr>
           <a:xfrm>
-            <a:off x="365760" y="6574536"/>
-            <a:ext cx="9144000" cy="274320"/>
+            <a:off x="365760" y="6601968"/>
+            <a:ext cx="10058400" cy="228600"/>
           </a:xfrm>
           <a:prstGeom prst="rect">
             <a:avLst/>
@@ -4951,16 +4831,12 @@
           <a:noFill/>
         </p:spPr>
         <p:txBody>
-          <a:bodyPr wrap="square" anchor="ctr">
+          <a:bodyPr wrap="square">
             <a:spAutoFit/>
           </a:bodyPr>
           <a:lstStyle/>
           <a:p>
-            <a:pPr algn="l">
-              <a:spcAft>
-                <a:spcPts val="0"/>
-              </a:spcAft>
-            </a:pPr>
+            <a:pPr algn="l"/>
             <a:r>
               <a:rPr sz="900" b="0" i="0">
                 <a:solidFill>
@@ -4968,21 +4844,21 @@
                 </a:solidFill>
                 <a:latin typeface="Calibri"/>
               </a:rPr>
-              <a:t>FairBanks FCHIP  |  The Gadfly Project Custom Web Applicatio  |  Your health, our mission.</a:t>
-            </a:r>
-          </a:p>
-        </p:txBody>
-      </p:sp>
-      <p:sp>
-        <p:nvSpPr>
-          <p:cNvPr id="10" name="TextBox 9"/>
+              <a:t>FairBanks FCHIP  |  Gadfly Grant 2026  |  Your health, our mission.</a:t>
+            </a:r>
+          </a:p>
+        </p:txBody>
+      </p:sp>
+      <p:sp>
+        <p:nvSpPr>
+          <p:cNvPr id="13" name="TextBox 12"/>
           <p:cNvSpPr txBox="1"/>
           <p:nvPr/>
         </p:nvSpPr>
         <p:spPr>
           <a:xfrm>
-            <a:off x="11094415" y="6574536"/>
-            <a:ext cx="731520" cy="274320"/>
+            <a:off x="11368735" y="6601968"/>
+            <a:ext cx="548640" cy="228600"/>
           </a:xfrm>
           <a:prstGeom prst="rect">
             <a:avLst/>
@@ -4990,16 +4866,12 @@
           <a:noFill/>
         </p:spPr>
         <p:txBody>
-          <a:bodyPr wrap="square" anchor="ctr">
+          <a:bodyPr wrap="square">
             <a:spAutoFit/>
           </a:bodyPr>
           <a:lstStyle/>
           <a:p>
-            <a:pPr algn="r">
-              <a:spcAft>
-                <a:spcPts val="0"/>
-              </a:spcAft>
-            </a:pPr>
+            <a:pPr algn="r"/>
             <a:r>
               <a:rPr sz="900" b="0" i="0">
                 <a:solidFill>
@@ -5039,7 +4911,7 @@
         <p:spPr>
           <a:xfrm>
             <a:off x="0" y="0"/>
-            <a:ext cx="12191695" cy="960120"/>
+            <a:ext cx="12191695" cy="914400"/>
           </a:xfrm>
           <a:prstGeom prst="rect">
             <a:avLst/>
@@ -5050,7 +4922,6 @@
           <a:ln>
             <a:noFill/>
           </a:ln>
-          <a:effectLst/>
         </p:spPr>
         <p:style>
           <a:lnRef idx="1">
@@ -5083,7 +4954,7 @@
         <p:spPr>
           <a:xfrm>
             <a:off x="0" y="0"/>
-            <a:ext cx="164592" cy="960120"/>
+            <a:ext cx="137160" cy="914400"/>
           </a:xfrm>
           <a:prstGeom prst="rect">
             <a:avLst/>
@@ -5094,7 +4965,6 @@
           <a:ln>
             <a:noFill/>
           </a:ln>
-          <a:effectLst/>
         </p:spPr>
         <p:style>
           <a:lnRef idx="1">
@@ -5126,8 +4996,8 @@
         </p:nvSpPr>
         <p:spPr>
           <a:xfrm>
-            <a:off x="457200" y="109728"/>
-            <a:ext cx="10972800" cy="256032"/>
+            <a:off x="411480" y="91440"/>
+            <a:ext cx="10972800" cy="274320"/>
           </a:xfrm>
           <a:prstGeom prst="rect">
             <a:avLst/>
@@ -5135,16 +5005,12 @@
           <a:noFill/>
         </p:spPr>
         <p:txBody>
-          <a:bodyPr wrap="square" anchor="t">
+          <a:bodyPr wrap="square">
             <a:spAutoFit/>
           </a:bodyPr>
           <a:lstStyle/>
           <a:p>
-            <a:pPr algn="l">
-              <a:spcAft>
-                <a:spcPts val="0"/>
-              </a:spcAft>
-            </a:pPr>
+            <a:pPr algn="l"/>
             <a:r>
               <a:rPr sz="1100" b="1" i="0">
                 <a:solidFill>
@@ -5152,7 +5018,7 @@
                 </a:solidFill>
                 <a:latin typeface="Calibri"/>
               </a:rPr>
-              <a:t>PROGRAMME FIT</a:t>
+              <a:t>STACK</a:t>
             </a:r>
           </a:p>
         </p:txBody>
@@ -5165,8 +5031,8 @@
         </p:nvSpPr>
         <p:spPr>
           <a:xfrm>
-            <a:off x="457200" y="384048"/>
-            <a:ext cx="11247120" cy="475488"/>
+            <a:off x="411480" y="384048"/>
+            <a:ext cx="10972800" cy="457200"/>
           </a:xfrm>
           <a:prstGeom prst="rect">
             <a:avLst/>
@@ -5174,74 +5040,48 @@
           <a:noFill/>
         </p:spPr>
         <p:txBody>
-          <a:bodyPr wrap="square" anchor="t">
+          <a:bodyPr wrap="square">
             <a:spAutoFit/>
           </a:bodyPr>
           <a:lstStyle/>
           <a:p>
-            <a:pPr algn="l">
-              <a:spcAft>
-                <a:spcPts val="0"/>
-              </a:spcAft>
-            </a:pPr>
-            <a:r>
-              <a:rPr sz="2200" b="1" i="0">
+            <a:pPr algn="l"/>
+            <a:r>
+              <a:rPr sz="2400" b="1" i="0">
                 <a:solidFill>
                   <a:srgbClr val="0A1F2E"/>
                 </a:solidFill>
                 <a:latin typeface="Calibri"/>
               </a:rPr>
-              <a:t>Why this call matches FCHIP</a:t>
-            </a:r>
-          </a:p>
-        </p:txBody>
-      </p:sp>
-      <p:sp>
-        <p:nvSpPr>
-          <p:cNvPr id="6" name="Rectangle 5"/>
-          <p:cNvSpPr/>
-          <p:nvPr/>
-        </p:nvSpPr>
-        <p:spPr>
-          <a:xfrm>
-            <a:off x="411480" y="1188720"/>
-            <a:ext cx="11338560" cy="1223010"/>
-          </a:xfrm>
-          <a:prstGeom prst="rect">
-            <a:avLst/>
-          </a:prstGeom>
-          <a:solidFill>
-            <a:srgbClr val="FFFFFF"/>
-          </a:solidFill>
-          <a:ln w="9525">
-            <a:solidFill>
-              <a:srgbClr val="D0DCDC"/>
-            </a:solidFill>
-          </a:ln>
-          <a:effectLst/>
-        </p:spPr>
-        <p:style>
-          <a:lnRef idx="1">
-            <a:schemeClr val="accent1"/>
-          </a:lnRef>
-          <a:fillRef idx="3">
-            <a:schemeClr val="accent1"/>
-          </a:fillRef>
-          <a:effectRef idx="2">
-            <a:schemeClr val="accent1"/>
-          </a:effectRef>
-          <a:fontRef idx="minor">
-            <a:schemeClr val="lt1"/>
-          </a:fontRef>
-        </p:style>
-        <p:txBody>
-          <a:bodyPr rtlCol="0" anchor="ctr"/>
-          <a:lstStyle/>
-          <a:p>
-            <a:pPr algn="ctr"/>
-          </a:p>
-        </p:txBody>
-      </p:sp>
+              <a:t>Pragmatic, maintainable, FairBanks-owned</a:t>
+            </a:r>
+          </a:p>
+        </p:txBody>
+      </p:sp>
+      <p:pic>
+        <p:nvPicPr>
+          <p:cNvPr id="6" name="Picture 5" descr="data_flow_iso_labeled_opt.jpg"/>
+          <p:cNvPicPr>
+            <a:picLocks noChangeAspect="1"/>
+          </p:cNvPicPr>
+          <p:nvPr/>
+        </p:nvPicPr>
+        <p:blipFill>
+          <a:blip r:embed="rId2"/>
+          <a:stretch>
+            <a:fillRect/>
+          </a:stretch>
+        </p:blipFill>
+        <p:spPr>
+          <a:xfrm>
+            <a:off x="365760" y="1524762"/>
+            <a:ext cx="6400800" cy="4265676"/>
+          </a:xfrm>
+          <a:prstGeom prst="rect">
+            <a:avLst/>
+          </a:prstGeom>
+        </p:spPr>
+      </p:pic>
       <p:sp>
         <p:nvSpPr>
           <p:cNvPr id="7" name="TextBox 6"/>
@@ -5250,8 +5090,8 @@
         </p:nvSpPr>
         <p:spPr>
           <a:xfrm>
-            <a:off x="594360" y="1252728"/>
-            <a:ext cx="2926080" cy="1085850"/>
+            <a:off x="7040880" y="1188720"/>
+            <a:ext cx="4754880" cy="320040"/>
           </a:xfrm>
           <a:prstGeom prst="rect">
             <a:avLst/>
@@ -5259,24 +5099,20 @@
           <a:noFill/>
         </p:spPr>
         <p:txBody>
-          <a:bodyPr wrap="square" anchor="ctr">
+          <a:bodyPr wrap="square">
             <a:spAutoFit/>
           </a:bodyPr>
           <a:lstStyle/>
           <a:p>
-            <a:pPr algn="l">
-              <a:spcAft>
-                <a:spcPts val="0"/>
-              </a:spcAft>
-            </a:pPr>
-            <a:r>
-              <a:rPr sz="1300" b="1" i="0">
+            <a:pPr algn="l"/>
+            <a:r>
+              <a:rPr sz="1400" b="1" i="0">
                 <a:solidFill>
                   <a:srgbClr val="0D6E6E"/>
                 </a:solidFill>
                 <a:latin typeface="Calibri"/>
               </a:rPr>
-              <a:t>Mission-driven org</a:t>
+              <a:t>Presentation</a:t>
             </a:r>
           </a:p>
         </p:txBody>
@@ -5289,8 +5125,8 @@
         </p:nvSpPr>
         <p:spPr>
           <a:xfrm>
-            <a:off x="3657600" y="1252728"/>
-            <a:ext cx="7772400" cy="1085850"/>
+            <a:off x="7040880" y="1536192"/>
+            <a:ext cx="4754880" cy="502920"/>
           </a:xfrm>
           <a:prstGeom prst="rect">
             <a:avLst/>
@@ -5298,16 +5134,12 @@
           <a:noFill/>
         </p:spPr>
         <p:txBody>
-          <a:bodyPr wrap="square" anchor="ctr">
+          <a:bodyPr wrap="square">
             <a:spAutoFit/>
           </a:bodyPr>
           <a:lstStyle/>
           <a:p>
-            <a:pPr algn="l">
-              <a:spcAft>
-                <a:spcPts val="0"/>
-              </a:spcAft>
-            </a:pPr>
+            <a:pPr algn="l"/>
             <a:r>
               <a:rPr sz="1200" b="0" i="0">
                 <a:solidFill>
@@ -5315,54 +5147,43 @@
                 </a:solidFill>
                 <a:latin typeface="Calibri"/>
               </a:rPr>
-              <a:t>Community health social enterprise serving underserved areas</a:t>
-            </a:r>
-          </a:p>
-        </p:txBody>
-      </p:sp>
-      <p:sp>
-        <p:nvSpPr>
-          <p:cNvPr id="9" name="Rectangle 8"/>
-          <p:cNvSpPr/>
-          <p:nvPr/>
-        </p:nvSpPr>
-        <p:spPr>
-          <a:xfrm>
-            <a:off x="411480" y="2503170"/>
-            <a:ext cx="11338560" cy="1223010"/>
-          </a:xfrm>
-          <a:prstGeom prst="rect">
-            <a:avLst/>
-          </a:prstGeom>
-          <a:solidFill>
-            <a:srgbClr val="FFFFFF"/>
-          </a:solidFill>
-          <a:ln w="9525">
-            <a:solidFill>
-              <a:srgbClr val="D0DCDC"/>
-            </a:solidFill>
-          </a:ln>
-          <a:effectLst/>
-        </p:spPr>
-        <p:style>
-          <a:lnRef idx="1">
-            <a:schemeClr val="accent1"/>
-          </a:lnRef>
-          <a:fillRef idx="3">
-            <a:schemeClr val="accent1"/>
-          </a:fillRef>
-          <a:effectRef idx="2">
-            <a:schemeClr val="accent1"/>
-          </a:effectRef>
-          <a:fontRef idx="minor">
-            <a:schemeClr val="lt1"/>
-          </a:fontRef>
-        </p:style>
-        <p:txBody>
-          <a:bodyPr rtlCol="0" anchor="ctr"/>
-          <a:lstStyle/>
-          <a:p>
-            <a:pPr algn="ctr"/>
+              <a:t>Responsive mobile web (PWA-style) for CHW devices</a:t>
+            </a:r>
+          </a:p>
+        </p:txBody>
+      </p:sp>
+      <p:sp>
+        <p:nvSpPr>
+          <p:cNvPr id="9" name="TextBox 8"/>
+          <p:cNvSpPr txBox="1"/>
+          <p:nvPr/>
+        </p:nvSpPr>
+        <p:spPr>
+          <a:xfrm>
+            <a:off x="7040880" y="2148840"/>
+            <a:ext cx="4754880" cy="320040"/>
+          </a:xfrm>
+          <a:prstGeom prst="rect">
+            <a:avLst/>
+          </a:prstGeom>
+          <a:noFill/>
+        </p:spPr>
+        <p:txBody>
+          <a:bodyPr wrap="square">
+            <a:spAutoFit/>
+          </a:bodyPr>
+          <a:lstStyle/>
+          <a:p>
+            <a:pPr algn="l"/>
+            <a:r>
+              <a:rPr sz="1400" b="1" i="0">
+                <a:solidFill>
+                  <a:srgbClr val="0D6E6E"/>
+                </a:solidFill>
+                <a:latin typeface="Calibri"/>
+              </a:rPr>
+              <a:t>Offline</a:t>
+            </a:r>
           </a:p>
         </p:txBody>
       </p:sp>
@@ -5374,8 +5195,8 @@
         </p:nvSpPr>
         <p:spPr>
           <a:xfrm>
-            <a:off x="594360" y="2567178"/>
-            <a:ext cx="2926080" cy="1085850"/>
+            <a:off x="7040880" y="2496312"/>
+            <a:ext cx="4754880" cy="502920"/>
           </a:xfrm>
           <a:prstGeom prst="rect">
             <a:avLst/>
@@ -5383,24 +5204,20 @@
           <a:noFill/>
         </p:spPr>
         <p:txBody>
-          <a:bodyPr wrap="square" anchor="ctr">
+          <a:bodyPr wrap="square">
             <a:spAutoFit/>
           </a:bodyPr>
           <a:lstStyle/>
           <a:p>
-            <a:pPr algn="l">
-              <a:spcAft>
-                <a:spcPts val="0"/>
-              </a:spcAft>
-            </a:pPr>
-            <a:r>
-              <a:rPr sz="1300" b="1" i="0">
-                <a:solidFill>
-                  <a:srgbClr val="0D6E6E"/>
+            <a:pPr algn="l"/>
+            <a:r>
+              <a:rPr sz="1200" b="0" i="0">
+                <a:solidFill>
+                  <a:srgbClr val="3A4A54"/>
                 </a:solidFill>
                 <a:latin typeface="Calibri"/>
               </a:rPr>
-              <a:t>Custom web / databases</a:t>
+              <a:t>Local queue + retry sync when network returns</a:t>
             </a:r>
           </a:p>
         </p:txBody>
@@ -5413,8 +5230,8 @@
         </p:nvSpPr>
         <p:spPr>
           <a:xfrm>
-            <a:off x="3657600" y="2567178"/>
-            <a:ext cx="7772400" cy="1085850"/>
+            <a:off x="7040880" y="3108960"/>
+            <a:ext cx="4754880" cy="320040"/>
           </a:xfrm>
           <a:prstGeom prst="rect">
             <a:avLst/>
@@ -5422,71 +5239,56 @@
           <a:noFill/>
         </p:spPr>
         <p:txBody>
-          <a:bodyPr wrap="square" anchor="ctr">
+          <a:bodyPr wrap="square">
             <a:spAutoFit/>
           </a:bodyPr>
           <a:lstStyle/>
           <a:p>
-            <a:pPr algn="l">
-              <a:spcAft>
-                <a:spcPts val="0"/>
-              </a:spcAft>
-            </a:pPr>
-            <a:r>
-              <a:rPr sz="1200" b="0" i="0">
-                <a:solidFill>
-                  <a:srgbClr val="3A4A54"/>
+            <a:pPr algn="l"/>
+            <a:r>
+              <a:rPr sz="1400" b="1" i="0">
+                <a:solidFill>
+                  <a:srgbClr val="0D6E6E"/>
                 </a:solidFill>
                 <a:latin typeface="Calibri"/>
               </a:rPr>
-              <a:t>Capture + sync + dashboards are core Gadfly territory</a:t>
-            </a:r>
-          </a:p>
-        </p:txBody>
-      </p:sp>
-      <p:sp>
-        <p:nvSpPr>
-          <p:cNvPr id="12" name="Rectangle 11"/>
-          <p:cNvSpPr/>
-          <p:nvPr/>
-        </p:nvSpPr>
-        <p:spPr>
-          <a:xfrm>
-            <a:off x="411480" y="3817620"/>
-            <a:ext cx="11338560" cy="1223010"/>
-          </a:xfrm>
-          <a:prstGeom prst="rect">
-            <a:avLst/>
-          </a:prstGeom>
-          <a:solidFill>
-            <a:srgbClr val="FFFFFF"/>
-          </a:solidFill>
-          <a:ln w="9525">
-            <a:solidFill>
-              <a:srgbClr val="D0DCDC"/>
-            </a:solidFill>
-          </a:ln>
-          <a:effectLst/>
-        </p:spPr>
-        <p:style>
-          <a:lnRef idx="1">
-            <a:schemeClr val="accent1"/>
-          </a:lnRef>
-          <a:fillRef idx="3">
-            <a:schemeClr val="accent1"/>
-          </a:fillRef>
-          <a:effectRef idx="2">
-            <a:schemeClr val="accent1"/>
-          </a:effectRef>
-          <a:fontRef idx="minor">
-            <a:schemeClr val="lt1"/>
-          </a:fontRef>
-        </p:style>
-        <p:txBody>
-          <a:bodyPr rtlCol="0" anchor="ctr"/>
-          <a:lstStyle/>
-          <a:p>
-            <a:pPr algn="ctr"/>
+              <a:t>Backend</a:t>
+            </a:r>
+          </a:p>
+        </p:txBody>
+      </p:sp>
+      <p:sp>
+        <p:nvSpPr>
+          <p:cNvPr id="12" name="TextBox 11"/>
+          <p:cNvSpPr txBox="1"/>
+          <p:nvPr/>
+        </p:nvSpPr>
+        <p:spPr>
+          <a:xfrm>
+            <a:off x="7040880" y="3456432"/>
+            <a:ext cx="4754880" cy="502920"/>
+          </a:xfrm>
+          <a:prstGeom prst="rect">
+            <a:avLst/>
+          </a:prstGeom>
+          <a:noFill/>
+        </p:spPr>
+        <p:txBody>
+          <a:bodyPr wrap="square">
+            <a:spAutoFit/>
+          </a:bodyPr>
+          <a:lstStyle/>
+          <a:p>
+            <a:pPr algn="l"/>
+            <a:r>
+              <a:rPr sz="1200" b="0" i="0">
+                <a:solidFill>
+                  <a:srgbClr val="3A4A54"/>
+                </a:solidFill>
+                <a:latin typeface="Calibri"/>
+              </a:rPr>
+              <a:t>REST API, PostgreSQL, role-based auth</a:t>
+            </a:r>
           </a:p>
         </p:txBody>
       </p:sp>
@@ -5498,8 +5300,8 @@
         </p:nvSpPr>
         <p:spPr>
           <a:xfrm>
-            <a:off x="594360" y="3881628"/>
-            <a:ext cx="2926080" cy="1085850"/>
+            <a:off x="7040880" y="4069080"/>
+            <a:ext cx="4754880" cy="320040"/>
           </a:xfrm>
           <a:prstGeom prst="rect">
             <a:avLst/>
@@ -5507,24 +5309,20 @@
           <a:noFill/>
         </p:spPr>
         <p:txBody>
-          <a:bodyPr wrap="square" anchor="ctr">
+          <a:bodyPr wrap="square">
             <a:spAutoFit/>
           </a:bodyPr>
           <a:lstStyle/>
           <a:p>
-            <a:pPr algn="l">
-              <a:spcAft>
-                <a:spcPts val="0"/>
-              </a:spcAft>
-            </a:pPr>
-            <a:r>
-              <a:rPr sz="1300" b="1" i="0">
+            <a:pPr algn="l"/>
+            <a:r>
+              <a:rPr sz="1400" b="1" i="0">
                 <a:solidFill>
                   <a:srgbClr val="0D6E6E"/>
                 </a:solidFill>
                 <a:latin typeface="Calibri"/>
               </a:rPr>
-              <a:t>Users served over complexity</a:t>
+              <a:t>Dashboard</a:t>
             </a:r>
           </a:p>
         </p:txBody>
@@ -5537,8 +5335,8 @@
         </p:nvSpPr>
         <p:spPr>
           <a:xfrm>
-            <a:off x="3657600" y="3881628"/>
-            <a:ext cx="7772400" cy="1085850"/>
+            <a:off x="7040880" y="4416552"/>
+            <a:ext cx="4754880" cy="502920"/>
           </a:xfrm>
           <a:prstGeom prst="rect">
             <a:avLst/>
@@ -5546,16 +5344,12 @@
           <a:noFill/>
         </p:spPr>
         <p:txBody>
-          <a:bodyPr wrap="square" anchor="ctr">
+          <a:bodyPr wrap="square">
             <a:spAutoFit/>
           </a:bodyPr>
           <a:lstStyle/>
           <a:p>
-            <a:pPr algn="l">
-              <a:spcAft>
-                <a:spcPts val="0"/>
-              </a:spcAft>
-            </a:pPr>
+            <a:pPr algn="l"/>
             <a:r>
               <a:rPr sz="1200" b="0" i="0">
                 <a:solidFill>
@@ -5563,54 +5357,43 @@
                 </a:solidFill>
                 <a:latin typeface="Calibri"/>
               </a:rPr>
-              <a:t>Priority is CHW usability and community impact</a:t>
-            </a:r>
-          </a:p>
-        </p:txBody>
-      </p:sp>
-      <p:sp>
-        <p:nvSpPr>
-          <p:cNvPr id="15" name="Rectangle 14"/>
-          <p:cNvSpPr/>
-          <p:nvPr/>
-        </p:nvSpPr>
-        <p:spPr>
-          <a:xfrm>
-            <a:off x="411480" y="5132070"/>
-            <a:ext cx="11338560" cy="1223010"/>
-          </a:xfrm>
-          <a:prstGeom prst="rect">
-            <a:avLst/>
-          </a:prstGeom>
-          <a:solidFill>
-            <a:srgbClr val="FFFFFF"/>
-          </a:solidFill>
-          <a:ln w="9525">
-            <a:solidFill>
-              <a:srgbClr val="D0DCDC"/>
-            </a:solidFill>
-          </a:ln>
-          <a:effectLst/>
-        </p:spPr>
-        <p:style>
-          <a:lnRef idx="1">
-            <a:schemeClr val="accent1"/>
-          </a:lnRef>
-          <a:fillRef idx="3">
-            <a:schemeClr val="accent1"/>
-          </a:fillRef>
-          <a:effectRef idx="2">
-            <a:schemeClr val="accent1"/>
-          </a:effectRef>
-          <a:fontRef idx="minor">
-            <a:schemeClr val="lt1"/>
-          </a:fontRef>
-        </p:style>
-        <p:txBody>
-          <a:bodyPr rtlCol="0" anchor="ctr"/>
-          <a:lstStyle/>
-          <a:p>
-            <a:pPr algn="ctr"/>
+              <a:t>Web admin for alerts, maps, and CSV export</a:t>
+            </a:r>
+          </a:p>
+        </p:txBody>
+      </p:sp>
+      <p:sp>
+        <p:nvSpPr>
+          <p:cNvPr id="15" name="TextBox 14"/>
+          <p:cNvSpPr txBox="1"/>
+          <p:nvPr/>
+        </p:nvSpPr>
+        <p:spPr>
+          <a:xfrm>
+            <a:off x="7040880" y="5029200"/>
+            <a:ext cx="4754880" cy="320040"/>
+          </a:xfrm>
+          <a:prstGeom prst="rect">
+            <a:avLst/>
+          </a:prstGeom>
+          <a:noFill/>
+        </p:spPr>
+        <p:txBody>
+          <a:bodyPr wrap="square">
+            <a:spAutoFit/>
+          </a:bodyPr>
+          <a:lstStyle/>
+          <a:p>
+            <a:pPr algn="l"/>
+            <a:r>
+              <a:rPr sz="1400" b="1" i="0">
+                <a:solidFill>
+                  <a:srgbClr val="0D6E6E"/>
+                </a:solidFill>
+                <a:latin typeface="Calibri"/>
+              </a:rPr>
+              <a:t>Hosting</a:t>
+            </a:r>
           </a:p>
         </p:txBody>
       </p:sp>
@@ -5622,8 +5405,8 @@
         </p:nvSpPr>
         <p:spPr>
           <a:xfrm>
-            <a:off x="594360" y="5196078"/>
-            <a:ext cx="2926080" cy="1085850"/>
+            <a:off x="7040880" y="5376672"/>
+            <a:ext cx="4754880" cy="502920"/>
           </a:xfrm>
           <a:prstGeom prst="rect">
             <a:avLst/>
@@ -5631,77 +5414,34 @@
           <a:noFill/>
         </p:spPr>
         <p:txBody>
-          <a:bodyPr wrap="square" anchor="ctr">
+          <a:bodyPr wrap="square">
             <a:spAutoFit/>
           </a:bodyPr>
           <a:lstStyle/>
           <a:p>
-            <a:pPr algn="l">
-              <a:spcAft>
-                <a:spcPts val="0"/>
-              </a:spcAft>
-            </a:pPr>
-            <a:r>
-              <a:rPr sz="1300" b="1" i="0">
-                <a:solidFill>
-                  <a:srgbClr val="0D6E6E"/>
+            <a:pPr algn="l"/>
+            <a:r>
+              <a:rPr sz="1200" b="0" i="0">
+                <a:solidFill>
+                  <a:srgbClr val="3A4A54"/>
                 </a:solidFill>
                 <a:latin typeface="Calibri"/>
               </a:rPr>
-              <a:t>Worldwide eligibility</a:t>
-            </a:r>
-          </a:p>
-        </p:txBody>
-      </p:sp>
-      <p:sp>
-        <p:nvSpPr>
-          <p:cNvPr id="17" name="TextBox 16"/>
-          <p:cNvSpPr txBox="1"/>
-          <p:nvPr/>
-        </p:nvSpPr>
-        <p:spPr>
-          <a:xfrm>
-            <a:off x="3657600" y="5196078"/>
-            <a:ext cx="7772400" cy="1085850"/>
-          </a:xfrm>
-          <a:prstGeom prst="rect">
-            <a:avLst/>
-          </a:prstGeom>
-          <a:noFill/>
-        </p:spPr>
-        <p:txBody>
-          <a:bodyPr wrap="square" anchor="ctr">
-            <a:spAutoFit/>
-          </a:bodyPr>
-          <a:lstStyle/>
-          <a:p>
-            <a:pPr algn="l">
-              <a:spcAft>
-                <a:spcPts val="0"/>
-              </a:spcAft>
-            </a:pPr>
-            <a:r>
-              <a:rPr sz="1200" b="0" i="0">
-                <a:solidFill>
-                  <a:srgbClr val="3A4A54"/>
-                </a:solidFill>
-                <a:latin typeface="Calibri"/>
-              </a:rPr>
-              <a:t>Ugandan organisation qualifies</a:t>
-            </a:r>
-          </a:p>
-        </p:txBody>
-      </p:sp>
-      <p:sp>
-        <p:nvSpPr>
-          <p:cNvPr id="18" name="Rectangle 17"/>
+              <a:t>Documented deploy; FairBanks-operated cloud account</a:t>
+            </a:r>
+          </a:p>
+        </p:txBody>
+      </p:sp>
+      <p:sp>
+        <p:nvSpPr>
+          <p:cNvPr id="17" name="Rectangle 16"/>
           <p:cNvSpPr/>
           <p:nvPr/>
         </p:nvSpPr>
         <p:spPr>
           <a:xfrm>
-            <a:off x="0" y="6565392"/>
-            <a:ext cx="12191695" cy="292608"/>
+            <a:off x="0" y="6583680"/>
+            <a:ext cx="12191695" cy="274320"/>
           </a:xfrm>
           <a:prstGeom prst="rect">
             <a:avLst/>
@@ -5712,7 +5452,6 @@
           <a:ln>
             <a:noFill/>
           </a:ln>
-          <a:effectLst/>
         </p:spPr>
         <p:style>
           <a:lnRef idx="1">
@@ -5738,14 +5477,49 @@
       </p:sp>
       <p:sp>
         <p:nvSpPr>
+          <p:cNvPr id="18" name="TextBox 17"/>
+          <p:cNvSpPr txBox="1"/>
+          <p:nvPr/>
+        </p:nvSpPr>
+        <p:spPr>
+          <a:xfrm>
+            <a:off x="365760" y="6601968"/>
+            <a:ext cx="10058400" cy="228600"/>
+          </a:xfrm>
+          <a:prstGeom prst="rect">
+            <a:avLst/>
+          </a:prstGeom>
+          <a:noFill/>
+        </p:spPr>
+        <p:txBody>
+          <a:bodyPr wrap="square">
+            <a:spAutoFit/>
+          </a:bodyPr>
+          <a:lstStyle/>
+          <a:p>
+            <a:pPr algn="l"/>
+            <a:r>
+              <a:rPr sz="900" b="0" i="0">
+                <a:solidFill>
+                  <a:srgbClr val="FFFFFF"/>
+                </a:solidFill>
+                <a:latin typeface="Calibri"/>
+              </a:rPr>
+              <a:t>FairBanks FCHIP  |  Gadfly Grant 2026  |  Your health, our mission.</a:t>
+            </a:r>
+          </a:p>
+        </p:txBody>
+      </p:sp>
+      <p:sp>
+        <p:nvSpPr>
           <p:cNvPr id="19" name="TextBox 18"/>
           <p:cNvSpPr txBox="1"/>
           <p:nvPr/>
         </p:nvSpPr>
         <p:spPr>
           <a:xfrm>
-            <a:off x="365760" y="6574536"/>
-            <a:ext cx="9144000" cy="274320"/>
+            <a:off x="11368735" y="6601968"/>
+            <a:ext cx="548640" cy="228600"/>
           </a:xfrm>
           <a:prstGeom prst="rect">
             <a:avLst/>
@@ -5753,55 +5527,12 @@
           <a:noFill/>
         </p:spPr>
         <p:txBody>
-          <a:bodyPr wrap="square" anchor="ctr">
+          <a:bodyPr wrap="square">
             <a:spAutoFit/>
           </a:bodyPr>
           <a:lstStyle/>
           <a:p>
-            <a:pPr algn="l">
-              <a:spcAft>
-                <a:spcPts val="0"/>
-              </a:spcAft>
-            </a:pPr>
-            <a:r>
-              <a:rPr sz="900" b="0" i="0">
-                <a:solidFill>
-                  <a:srgbClr val="FFFFFF"/>
-                </a:solidFill>
-                <a:latin typeface="Calibri"/>
-              </a:rPr>
-              <a:t>FairBanks FCHIP  |  The Gadfly Project Custom Web Applicatio  |  Your health, our mission.</a:t>
-            </a:r>
-          </a:p>
-        </p:txBody>
-      </p:sp>
-      <p:sp>
-        <p:nvSpPr>
-          <p:cNvPr id="20" name="TextBox 19"/>
-          <p:cNvSpPr txBox="1"/>
-          <p:nvPr/>
-        </p:nvSpPr>
-        <p:spPr>
-          <a:xfrm>
-            <a:off x="11094415" y="6574536"/>
-            <a:ext cx="731520" cy="274320"/>
-          </a:xfrm>
-          <a:prstGeom prst="rect">
-            <a:avLst/>
-          </a:prstGeom>
-          <a:noFill/>
-        </p:spPr>
-        <p:txBody>
-          <a:bodyPr wrap="square" anchor="ctr">
-            <a:spAutoFit/>
-          </a:bodyPr>
-          <a:lstStyle/>
-          <a:p>
-            <a:pPr algn="r">
-              <a:spcAft>
-                <a:spcPts val="0"/>
-              </a:spcAft>
-            </a:pPr>
+            <a:pPr algn="r"/>
             <a:r>
               <a:rPr sz="900" b="0" i="0">
                 <a:solidFill>
@@ -5841,7 +5572,7 @@
         <p:spPr>
           <a:xfrm>
             <a:off x="0" y="0"/>
-            <a:ext cx="12191695" cy="960120"/>
+            <a:ext cx="12191695" cy="914400"/>
           </a:xfrm>
           <a:prstGeom prst="rect">
             <a:avLst/>
@@ -5852,7 +5583,6 @@
           <a:ln>
             <a:noFill/>
           </a:ln>
-          <a:effectLst/>
         </p:spPr>
         <p:style>
           <a:lnRef idx="1">
@@ -5885,7 +5615,7 @@
         <p:spPr>
           <a:xfrm>
             <a:off x="0" y="0"/>
-            <a:ext cx="164592" cy="960120"/>
+            <a:ext cx="137160" cy="914400"/>
           </a:xfrm>
           <a:prstGeom prst="rect">
             <a:avLst/>
@@ -5896,7 +5626,6 @@
           <a:ln>
             <a:noFill/>
           </a:ln>
-          <a:effectLst/>
         </p:spPr>
         <p:style>
           <a:lnRef idx="1">
@@ -5928,110 +5657,8 @@
         </p:nvSpPr>
         <p:spPr>
           <a:xfrm>
-            <a:off x="457200" y="109728"/>
-            <a:ext cx="10972800" cy="256032"/>
-          </a:xfrm>
-          <a:prstGeom prst="rect">
-            <a:avLst/>
-          </a:prstGeom>
-          <a:noFill/>
-        </p:spPr>
-        <p:txBody>
-          <a:bodyPr wrap="square" anchor="t">
-            <a:spAutoFit/>
-          </a:bodyPr>
-          <a:lstStyle/>
-          <a:p>
-            <a:pPr algn="l">
-              <a:spcAft>
-                <a:spcPts val="0"/>
-              </a:spcAft>
-            </a:pPr>
-            <a:r>
-              <a:rPr sz="1100" b="1" i="0">
-                <a:solidFill>
-                  <a:srgbClr val="C45C26"/>
-                </a:solidFill>
-                <a:latin typeface="Calibri"/>
-              </a:rPr>
-              <a:t>WHY FAIRBANKS</a:t>
-            </a:r>
-          </a:p>
-        </p:txBody>
-      </p:sp>
-      <p:sp>
-        <p:nvSpPr>
-          <p:cNvPr id="5" name="TextBox 4"/>
-          <p:cNvSpPr txBox="1"/>
-          <p:nvPr/>
-        </p:nvSpPr>
-        <p:spPr>
-          <a:xfrm>
-            <a:off x="457200" y="384048"/>
-            <a:ext cx="11247120" cy="475488"/>
-          </a:xfrm>
-          <a:prstGeom prst="rect">
-            <a:avLst/>
-          </a:prstGeom>
-          <a:noFill/>
-        </p:spPr>
-        <p:txBody>
-          <a:bodyPr wrap="square" anchor="t">
-            <a:spAutoFit/>
-          </a:bodyPr>
-          <a:lstStyle/>
-          <a:p>
-            <a:pPr algn="l">
-              <a:spcAft>
-                <a:spcPts val="0"/>
-              </a:spcAft>
-            </a:pPr>
-            <a:r>
-              <a:rPr sz="2200" b="1" i="0">
-                <a:solidFill>
-                  <a:srgbClr val="0A1F2E"/>
-                </a:solidFill>
-                <a:latin typeface="Calibri"/>
-              </a:rPr>
-              <a:t>A live community health ecosystem</a:t>
-            </a:r>
-          </a:p>
-        </p:txBody>
-      </p:sp>
-      <p:pic>
-        <p:nvPicPr>
-          <p:cNvPr id="6" name="Picture 5" descr="outreach_facilitator_canopy_01_opt.jpg"/>
-          <p:cNvPicPr>
-            <a:picLocks noChangeAspect="1"/>
-          </p:cNvPicPr>
-          <p:nvPr/>
-        </p:nvPicPr>
-        <p:blipFill>
-          <a:blip r:embed="rId2"/>
-          <a:stretch>
-            <a:fillRect/>
-          </a:stretch>
-        </p:blipFill>
-        <p:spPr>
-          <a:xfrm>
-            <a:off x="411480" y="1943753"/>
-            <a:ext cx="5486400" cy="3656293"/>
-          </a:xfrm>
-          <a:prstGeom prst="rect">
-            <a:avLst/>
-          </a:prstGeom>
-        </p:spPr>
-      </p:pic>
-      <p:sp>
-        <p:nvSpPr>
-          <p:cNvPr id="7" name="TextBox 6"/>
-          <p:cNvSpPr txBox="1"/>
-          <p:nvPr/>
-        </p:nvSpPr>
-        <p:spPr>
-          <a:xfrm>
-            <a:off x="6217920" y="1234440"/>
-            <a:ext cx="5486400" cy="5074920"/>
+            <a:off x="411480" y="91440"/>
+            <a:ext cx="10972800" cy="274320"/>
           </a:xfrm>
           <a:prstGeom prst="rect">
             <a:avLst/>
@@ -6044,113 +5671,664 @@
           </a:bodyPr>
           <a:lstStyle/>
           <a:p>
-            <a:pPr>
-              <a:spcAft>
-                <a:spcPts val="800"/>
-              </a:spcAft>
-            </a:pPr>
-            <a:r>
-              <a:rPr sz="1400">
-                <a:solidFill>
-                  <a:srgbClr val="1E2F38"/>
+            <a:pPr algn="l"/>
+            <a:r>
+              <a:rPr sz="1100" b="1" i="0">
+                <a:solidFill>
+                  <a:srgbClr val="C45C26"/>
                 </a:solidFill>
                 <a:latin typeface="Calibri"/>
               </a:rPr>
-              <a:t>•  Functioning FairBanks Medical Centre with clinic, pharmacy, and diagnostics</a:t>
-            </a:r>
-          </a:p>
-          <a:p>
-            <a:pPr>
-              <a:spcAft>
-                <a:spcPts val="800"/>
-              </a:spcAft>
-            </a:pPr>
-            <a:r>
-              <a:rPr sz="1400">
-                <a:solidFill>
-                  <a:srgbClr val="1E2F38"/>
+              <a:t>DELIVERY</a:t>
+            </a:r>
+          </a:p>
+        </p:txBody>
+      </p:sp>
+      <p:sp>
+        <p:nvSpPr>
+          <p:cNvPr id="5" name="TextBox 4"/>
+          <p:cNvSpPr txBox="1"/>
+          <p:nvPr/>
+        </p:nvSpPr>
+        <p:spPr>
+          <a:xfrm>
+            <a:off x="411480" y="384048"/>
+            <a:ext cx="10972800" cy="457200"/>
+          </a:xfrm>
+          <a:prstGeom prst="rect">
+            <a:avLst/>
+          </a:prstGeom>
+          <a:noFill/>
+        </p:spPr>
+        <p:txBody>
+          <a:bodyPr wrap="square">
+            <a:spAutoFit/>
+          </a:bodyPr>
+          <a:lstStyle/>
+          <a:p>
+            <a:pPr algn="l"/>
+            <a:r>
+              <a:rPr sz="2400" b="1" i="0">
+                <a:solidFill>
+                  <a:srgbClr val="0A1F2E"/>
                 </a:solidFill>
                 <a:latin typeface="Calibri"/>
               </a:rPr>
-              <a:t>•  Active Community Reach outreach in Bukoto, Kyebando, Kisaasi, Kamwokya, Kikaaya</a:t>
-            </a:r>
-          </a:p>
-          <a:p>
-            <a:pPr>
-              <a:spcAft>
-                <a:spcPts val="800"/>
-              </a:spcAft>
-            </a:pPr>
-            <a:r>
-              <a:rPr sz="1400">
-                <a:solidFill>
-                  <a:srgbClr val="1E2F38"/>
+              <a:t>Discovery → build → hardening → handover</a:t>
+            </a:r>
+          </a:p>
+        </p:txBody>
+      </p:sp>
+      <p:sp>
+        <p:nvSpPr>
+          <p:cNvPr id="6" name="Rectangle 5"/>
+          <p:cNvSpPr/>
+          <p:nvPr/>
+        </p:nvSpPr>
+        <p:spPr>
+          <a:xfrm>
+            <a:off x="457200" y="1143000"/>
+            <a:ext cx="11247120" cy="1051560"/>
+          </a:xfrm>
+          <a:prstGeom prst="rect">
+            <a:avLst/>
+          </a:prstGeom>
+          <a:solidFill>
+            <a:srgbClr val="FFFFFF"/>
+          </a:solidFill>
+          <a:ln>
+            <a:solidFill>
+              <a:srgbClr val="D0DCDC"/>
+            </a:solidFill>
+          </a:ln>
+        </p:spPr>
+        <p:style>
+          <a:lnRef idx="1">
+            <a:schemeClr val="accent1"/>
+          </a:lnRef>
+          <a:fillRef idx="3">
+            <a:schemeClr val="accent1"/>
+          </a:fillRef>
+          <a:effectRef idx="2">
+            <a:schemeClr val="accent1"/>
+          </a:effectRef>
+          <a:fontRef idx="minor">
+            <a:schemeClr val="lt1"/>
+          </a:fontRef>
+        </p:style>
+        <p:txBody>
+          <a:bodyPr rtlCol="0" anchor="ctr"/>
+          <a:lstStyle/>
+          <a:p>
+            <a:pPr algn="ctr"/>
+          </a:p>
+        </p:txBody>
+      </p:sp>
+      <p:sp>
+        <p:nvSpPr>
+          <p:cNvPr id="7" name="TextBox 6"/>
+          <p:cNvSpPr txBox="1"/>
+          <p:nvPr/>
+        </p:nvSpPr>
+        <p:spPr>
+          <a:xfrm>
+            <a:off x="640080" y="1252728"/>
+            <a:ext cx="2011680" cy="365760"/>
+          </a:xfrm>
+          <a:prstGeom prst="rect">
+            <a:avLst/>
+          </a:prstGeom>
+          <a:noFill/>
+        </p:spPr>
+        <p:txBody>
+          <a:bodyPr wrap="square">
+            <a:spAutoFit/>
+          </a:bodyPr>
+          <a:lstStyle/>
+          <a:p>
+            <a:pPr algn="l"/>
+            <a:r>
+              <a:rPr sz="1600" b="1" i="0">
+                <a:solidFill>
+                  <a:srgbClr val="0D6E6E"/>
                 </a:solidFill>
                 <a:latin typeface="Calibri"/>
               </a:rPr>
-              <a:t>•  Trusted CHW and VHT relationships for household visits and referrals</a:t>
-            </a:r>
-          </a:p>
-          <a:p>
-            <a:pPr>
-              <a:spcAft>
-                <a:spcPts val="800"/>
-              </a:spcAft>
-            </a:pPr>
-            <a:r>
-              <a:rPr sz="1400">
-                <a:solidFill>
-                  <a:srgbClr val="1E2F38"/>
+              <a:t>Discovery &amp; UX</a:t>
+            </a:r>
+          </a:p>
+        </p:txBody>
+      </p:sp>
+      <p:sp>
+        <p:nvSpPr>
+          <p:cNvPr id="8" name="TextBox 7"/>
+          <p:cNvSpPr txBox="1"/>
+          <p:nvPr/>
+        </p:nvSpPr>
+        <p:spPr>
+          <a:xfrm>
+            <a:off x="2743200" y="1252728"/>
+            <a:ext cx="1371600" cy="365760"/>
+          </a:xfrm>
+          <a:prstGeom prst="rect">
+            <a:avLst/>
+          </a:prstGeom>
+          <a:noFill/>
+        </p:spPr>
+        <p:txBody>
+          <a:bodyPr wrap="square">
+            <a:spAutoFit/>
+          </a:bodyPr>
+          <a:lstStyle/>
+          <a:p>
+            <a:pPr algn="l"/>
+            <a:r>
+              <a:rPr sz="1300" b="0" i="0">
+                <a:solidFill>
+                  <a:srgbClr val="C45C26"/>
                 </a:solidFill>
                 <a:latin typeface="Calibri"/>
               </a:rPr>
-              <a:t>•  Live programmes: maternal &amp; child health, Gericare, chronic-disease screening</a:t>
-            </a:r>
-          </a:p>
-          <a:p>
-            <a:pPr>
-              <a:spcAft>
-                <a:spcPts val="800"/>
-              </a:spcAft>
-            </a:pPr>
-            <a:r>
-              <a:rPr sz="1400">
+              <a:t>Weeks 1–3</a:t>
+            </a:r>
+          </a:p>
+        </p:txBody>
+      </p:sp>
+      <p:sp>
+        <p:nvSpPr>
+          <p:cNvPr id="9" name="TextBox 8"/>
+          <p:cNvSpPr txBox="1"/>
+          <p:nvPr/>
+        </p:nvSpPr>
+        <p:spPr>
+          <a:xfrm>
+            <a:off x="4206240" y="1252728"/>
+            <a:ext cx="7132320" cy="822960"/>
+          </a:xfrm>
+          <a:prstGeom prst="rect">
+            <a:avLst/>
+          </a:prstGeom>
+          <a:noFill/>
+        </p:spPr>
+        <p:txBody>
+          <a:bodyPr wrap="square">
+            <a:spAutoFit/>
+          </a:bodyPr>
+          <a:lstStyle/>
+          <a:p>
+            <a:pPr algn="l"/>
+            <a:r>
+              <a:rPr sz="1400" b="0" i="0">
                 <a:solidFill>
                   <a:srgbClr val="1E2F38"/>
                 </a:solidFill>
                 <a:latin typeface="Calibri"/>
               </a:rPr>
-              <a:t>•  Digital health records and outreach data ready to feed FCHIP</a:t>
-            </a:r>
-          </a:p>
-          <a:p>
-            <a:pPr>
-              <a:spcAft>
-                <a:spcPts val="800"/>
-              </a:spcAft>
-            </a:pPr>
-            <a:r>
-              <a:rPr sz="1400">
-                <a:solidFill>
-                  <a:srgbClr val="1E2F38"/>
+              <a:t>Field shadowing with CHWs; form design; acceptance criteria</a:t>
+            </a:r>
+          </a:p>
+        </p:txBody>
+      </p:sp>
+      <p:sp>
+        <p:nvSpPr>
+          <p:cNvPr id="10" name="Rectangle 9"/>
+          <p:cNvSpPr/>
+          <p:nvPr/>
+        </p:nvSpPr>
+        <p:spPr>
+          <a:xfrm>
+            <a:off x="457200" y="2377440"/>
+            <a:ext cx="11247120" cy="1051560"/>
+          </a:xfrm>
+          <a:prstGeom prst="rect">
+            <a:avLst/>
+          </a:prstGeom>
+          <a:solidFill>
+            <a:srgbClr val="FFFFFF"/>
+          </a:solidFill>
+          <a:ln>
+            <a:solidFill>
+              <a:srgbClr val="D0DCDC"/>
+            </a:solidFill>
+          </a:ln>
+        </p:spPr>
+        <p:style>
+          <a:lnRef idx="1">
+            <a:schemeClr val="accent1"/>
+          </a:lnRef>
+          <a:fillRef idx="3">
+            <a:schemeClr val="accent1"/>
+          </a:fillRef>
+          <a:effectRef idx="2">
+            <a:schemeClr val="accent1"/>
+          </a:effectRef>
+          <a:fontRef idx="minor">
+            <a:schemeClr val="lt1"/>
+          </a:fontRef>
+        </p:style>
+        <p:txBody>
+          <a:bodyPr rtlCol="0" anchor="ctr"/>
+          <a:lstStyle/>
+          <a:p>
+            <a:pPr algn="ctr"/>
+          </a:p>
+        </p:txBody>
+      </p:sp>
+      <p:sp>
+        <p:nvSpPr>
+          <p:cNvPr id="11" name="TextBox 10"/>
+          <p:cNvSpPr txBox="1"/>
+          <p:nvPr/>
+        </p:nvSpPr>
+        <p:spPr>
+          <a:xfrm>
+            <a:off x="640080" y="2487168"/>
+            <a:ext cx="2011680" cy="365760"/>
+          </a:xfrm>
+          <a:prstGeom prst="rect">
+            <a:avLst/>
+          </a:prstGeom>
+          <a:noFill/>
+        </p:spPr>
+        <p:txBody>
+          <a:bodyPr wrap="square">
+            <a:spAutoFit/>
+          </a:bodyPr>
+          <a:lstStyle/>
+          <a:p>
+            <a:pPr algn="l"/>
+            <a:r>
+              <a:rPr sz="1600" b="1" i="0">
+                <a:solidFill>
+                  <a:srgbClr val="0D6E6E"/>
                 </a:solidFill>
                 <a:latin typeface="Calibri"/>
               </a:rPr>
-              <a:t>•  Research and partnership mindset for ethical, evidence-based scale</a:t>
-            </a:r>
-          </a:p>
-        </p:txBody>
-      </p:sp>
-      <p:sp>
-        <p:nvSpPr>
-          <p:cNvPr id="8" name="Rectangle 7"/>
+              <a:t>Core build</a:t>
+            </a:r>
+          </a:p>
+        </p:txBody>
+      </p:sp>
+      <p:sp>
+        <p:nvSpPr>
+          <p:cNvPr id="12" name="TextBox 11"/>
+          <p:cNvSpPr txBox="1"/>
+          <p:nvPr/>
+        </p:nvSpPr>
+        <p:spPr>
+          <a:xfrm>
+            <a:off x="2743200" y="2487168"/>
+            <a:ext cx="1371600" cy="365760"/>
+          </a:xfrm>
+          <a:prstGeom prst="rect">
+            <a:avLst/>
+          </a:prstGeom>
+          <a:noFill/>
+        </p:spPr>
+        <p:txBody>
+          <a:bodyPr wrap="square">
+            <a:spAutoFit/>
+          </a:bodyPr>
+          <a:lstStyle/>
+          <a:p>
+            <a:pPr algn="l"/>
+            <a:r>
+              <a:rPr sz="1300" b="0" i="0">
+                <a:solidFill>
+                  <a:srgbClr val="C45C26"/>
+                </a:solidFill>
+                <a:latin typeface="Calibri"/>
+              </a:rPr>
+              <a:t>Weeks 4–10</a:t>
+            </a:r>
+          </a:p>
+        </p:txBody>
+      </p:sp>
+      <p:sp>
+        <p:nvSpPr>
+          <p:cNvPr id="13" name="TextBox 12"/>
+          <p:cNvSpPr txBox="1"/>
+          <p:nvPr/>
+        </p:nvSpPr>
+        <p:spPr>
+          <a:xfrm>
+            <a:off x="4206240" y="2487168"/>
+            <a:ext cx="7132320" cy="822960"/>
+          </a:xfrm>
+          <a:prstGeom prst="rect">
+            <a:avLst/>
+          </a:prstGeom>
+          <a:noFill/>
+        </p:spPr>
+        <p:txBody>
+          <a:bodyPr wrap="square">
+            <a:spAutoFit/>
+          </a:bodyPr>
+          <a:lstStyle/>
+          <a:p>
+            <a:pPr algn="l"/>
+            <a:r>
+              <a:rPr sz="1400" b="0" i="0">
+                <a:solidFill>
+                  <a:srgbClr val="1E2F38"/>
+                </a:solidFill>
+                <a:latin typeface="Calibri"/>
+              </a:rPr>
+              <a:t>Capture app, API, sync, dashboard MVP</a:t>
+            </a:r>
+          </a:p>
+        </p:txBody>
+      </p:sp>
+      <p:sp>
+        <p:nvSpPr>
+          <p:cNvPr id="14" name="Rectangle 13"/>
           <p:cNvSpPr/>
           <p:nvPr/>
         </p:nvSpPr>
         <p:spPr>
           <a:xfrm>
-            <a:off x="0" y="6565392"/>
-            <a:ext cx="12191695" cy="292608"/>
+            <a:off x="457200" y="3611880"/>
+            <a:ext cx="11247120" cy="1051560"/>
+          </a:xfrm>
+          <a:prstGeom prst="rect">
+            <a:avLst/>
+          </a:prstGeom>
+          <a:solidFill>
+            <a:srgbClr val="FFFFFF"/>
+          </a:solidFill>
+          <a:ln>
+            <a:solidFill>
+              <a:srgbClr val="D0DCDC"/>
+            </a:solidFill>
+          </a:ln>
+        </p:spPr>
+        <p:style>
+          <a:lnRef idx="1">
+            <a:schemeClr val="accent1"/>
+          </a:lnRef>
+          <a:fillRef idx="3">
+            <a:schemeClr val="accent1"/>
+          </a:fillRef>
+          <a:effectRef idx="2">
+            <a:schemeClr val="accent1"/>
+          </a:effectRef>
+          <a:fontRef idx="minor">
+            <a:schemeClr val="lt1"/>
+          </a:fontRef>
+        </p:style>
+        <p:txBody>
+          <a:bodyPr rtlCol="0" anchor="ctr"/>
+          <a:lstStyle/>
+          <a:p>
+            <a:pPr algn="ctr"/>
+          </a:p>
+        </p:txBody>
+      </p:sp>
+      <p:sp>
+        <p:nvSpPr>
+          <p:cNvPr id="15" name="TextBox 14"/>
+          <p:cNvSpPr txBox="1"/>
+          <p:nvPr/>
+        </p:nvSpPr>
+        <p:spPr>
+          <a:xfrm>
+            <a:off x="640080" y="3721608"/>
+            <a:ext cx="2011680" cy="365760"/>
+          </a:xfrm>
+          <a:prstGeom prst="rect">
+            <a:avLst/>
+          </a:prstGeom>
+          <a:noFill/>
+        </p:spPr>
+        <p:txBody>
+          <a:bodyPr wrap="square">
+            <a:spAutoFit/>
+          </a:bodyPr>
+          <a:lstStyle/>
+          <a:p>
+            <a:pPr algn="l"/>
+            <a:r>
+              <a:rPr sz="1600" b="1" i="0">
+                <a:solidFill>
+                  <a:srgbClr val="0D6E6E"/>
+                </a:solidFill>
+                <a:latin typeface="Calibri"/>
+              </a:rPr>
+              <a:t>Pilot hardening</a:t>
+            </a:r>
+          </a:p>
+        </p:txBody>
+      </p:sp>
+      <p:sp>
+        <p:nvSpPr>
+          <p:cNvPr id="16" name="TextBox 15"/>
+          <p:cNvSpPr txBox="1"/>
+          <p:nvPr/>
+        </p:nvSpPr>
+        <p:spPr>
+          <a:xfrm>
+            <a:off x="2743200" y="3721608"/>
+            <a:ext cx="1371600" cy="365760"/>
+          </a:xfrm>
+          <a:prstGeom prst="rect">
+            <a:avLst/>
+          </a:prstGeom>
+          <a:noFill/>
+        </p:spPr>
+        <p:txBody>
+          <a:bodyPr wrap="square">
+            <a:spAutoFit/>
+          </a:bodyPr>
+          <a:lstStyle/>
+          <a:p>
+            <a:pPr algn="l"/>
+            <a:r>
+              <a:rPr sz="1300" b="0" i="0">
+                <a:solidFill>
+                  <a:srgbClr val="C45C26"/>
+                </a:solidFill>
+                <a:latin typeface="Calibri"/>
+              </a:rPr>
+              <a:t>Weeks 11–14</a:t>
+            </a:r>
+          </a:p>
+        </p:txBody>
+      </p:sp>
+      <p:sp>
+        <p:nvSpPr>
+          <p:cNvPr id="17" name="TextBox 16"/>
+          <p:cNvSpPr txBox="1"/>
+          <p:nvPr/>
+        </p:nvSpPr>
+        <p:spPr>
+          <a:xfrm>
+            <a:off x="4206240" y="3721608"/>
+            <a:ext cx="7132320" cy="822960"/>
+          </a:xfrm>
+          <a:prstGeom prst="rect">
+            <a:avLst/>
+          </a:prstGeom>
+          <a:noFill/>
+        </p:spPr>
+        <p:txBody>
+          <a:bodyPr wrap="square">
+            <a:spAutoFit/>
+          </a:bodyPr>
+          <a:lstStyle/>
+          <a:p>
+            <a:pPr algn="l"/>
+            <a:r>
+              <a:rPr sz="1400" b="0" i="0">
+                <a:solidFill>
+                  <a:srgbClr val="1E2F38"/>
+                </a:solidFill>
+                <a:latin typeface="Calibri"/>
+              </a:rPr>
+              <a:t>Bug fixes, performance, training materials</a:t>
+            </a:r>
+          </a:p>
+        </p:txBody>
+      </p:sp>
+      <p:sp>
+        <p:nvSpPr>
+          <p:cNvPr id="18" name="Rectangle 17"/>
+          <p:cNvSpPr/>
+          <p:nvPr/>
+        </p:nvSpPr>
+        <p:spPr>
+          <a:xfrm>
+            <a:off x="457200" y="4846320"/>
+            <a:ext cx="11247120" cy="1051560"/>
+          </a:xfrm>
+          <a:prstGeom prst="rect">
+            <a:avLst/>
+          </a:prstGeom>
+          <a:solidFill>
+            <a:srgbClr val="FFFFFF"/>
+          </a:solidFill>
+          <a:ln>
+            <a:solidFill>
+              <a:srgbClr val="D0DCDC"/>
+            </a:solidFill>
+          </a:ln>
+        </p:spPr>
+        <p:style>
+          <a:lnRef idx="1">
+            <a:schemeClr val="accent1"/>
+          </a:lnRef>
+          <a:fillRef idx="3">
+            <a:schemeClr val="accent1"/>
+          </a:fillRef>
+          <a:effectRef idx="2">
+            <a:schemeClr val="accent1"/>
+          </a:effectRef>
+          <a:fontRef idx="minor">
+            <a:schemeClr val="lt1"/>
+          </a:fontRef>
+        </p:style>
+        <p:txBody>
+          <a:bodyPr rtlCol="0" anchor="ctr"/>
+          <a:lstStyle/>
+          <a:p>
+            <a:pPr algn="ctr"/>
+          </a:p>
+        </p:txBody>
+      </p:sp>
+      <p:sp>
+        <p:nvSpPr>
+          <p:cNvPr id="19" name="TextBox 18"/>
+          <p:cNvSpPr txBox="1"/>
+          <p:nvPr/>
+        </p:nvSpPr>
+        <p:spPr>
+          <a:xfrm>
+            <a:off x="640080" y="4956048"/>
+            <a:ext cx="2011680" cy="365760"/>
+          </a:xfrm>
+          <a:prstGeom prst="rect">
+            <a:avLst/>
+          </a:prstGeom>
+          <a:noFill/>
+        </p:spPr>
+        <p:txBody>
+          <a:bodyPr wrap="square">
+            <a:spAutoFit/>
+          </a:bodyPr>
+          <a:lstStyle/>
+          <a:p>
+            <a:pPr algn="l"/>
+            <a:r>
+              <a:rPr sz="1600" b="1" i="0">
+                <a:solidFill>
+                  <a:srgbClr val="0D6E6E"/>
+                </a:solidFill>
+                <a:latin typeface="Calibri"/>
+              </a:rPr>
+              <a:t>Handover</a:t>
+            </a:r>
+          </a:p>
+        </p:txBody>
+      </p:sp>
+      <p:sp>
+        <p:nvSpPr>
+          <p:cNvPr id="20" name="TextBox 19"/>
+          <p:cNvSpPr txBox="1"/>
+          <p:nvPr/>
+        </p:nvSpPr>
+        <p:spPr>
+          <a:xfrm>
+            <a:off x="2743200" y="4956048"/>
+            <a:ext cx="1371600" cy="365760"/>
+          </a:xfrm>
+          <a:prstGeom prst="rect">
+            <a:avLst/>
+          </a:prstGeom>
+          <a:noFill/>
+        </p:spPr>
+        <p:txBody>
+          <a:bodyPr wrap="square">
+            <a:spAutoFit/>
+          </a:bodyPr>
+          <a:lstStyle/>
+          <a:p>
+            <a:pPr algn="l"/>
+            <a:r>
+              <a:rPr sz="1300" b="0" i="0">
+                <a:solidFill>
+                  <a:srgbClr val="C45C26"/>
+                </a:solidFill>
+                <a:latin typeface="Calibri"/>
+              </a:rPr>
+              <a:t>Week 15+</a:t>
+            </a:r>
+          </a:p>
+        </p:txBody>
+      </p:sp>
+      <p:sp>
+        <p:nvSpPr>
+          <p:cNvPr id="21" name="TextBox 20"/>
+          <p:cNvSpPr txBox="1"/>
+          <p:nvPr/>
+        </p:nvSpPr>
+        <p:spPr>
+          <a:xfrm>
+            <a:off x="4206240" y="4956048"/>
+            <a:ext cx="7132320" cy="822960"/>
+          </a:xfrm>
+          <a:prstGeom prst="rect">
+            <a:avLst/>
+          </a:prstGeom>
+          <a:noFill/>
+        </p:spPr>
+        <p:txBody>
+          <a:bodyPr wrap="square">
+            <a:spAutoFit/>
+          </a:bodyPr>
+          <a:lstStyle/>
+          <a:p>
+            <a:pPr algn="l"/>
+            <a:r>
+              <a:rPr sz="1400" b="0" i="0">
+                <a:solidFill>
+                  <a:srgbClr val="1E2F38"/>
+                </a:solidFill>
+                <a:latin typeface="Calibri"/>
+              </a:rPr>
+              <a:t>Source repo, docs, admin guide, knowledge transfer sessions</a:t>
+            </a:r>
+          </a:p>
+        </p:txBody>
+      </p:sp>
+      <p:sp>
+        <p:nvSpPr>
+          <p:cNvPr id="22" name="Rectangle 21"/>
+          <p:cNvSpPr/>
+          <p:nvPr/>
+        </p:nvSpPr>
+        <p:spPr>
+          <a:xfrm>
+            <a:off x="0" y="6583680"/>
+            <a:ext cx="12191695" cy="274320"/>
           </a:xfrm>
           <a:prstGeom prst="rect">
             <a:avLst/>
@@ -6161,7 +6339,6 @@
           <a:ln>
             <a:noFill/>
           </a:ln>
-          <a:effectLst/>
         </p:spPr>
         <p:style>
           <a:lnRef idx="1">
@@ -6187,14 +6364,14 @@
       </p:sp>
       <p:sp>
         <p:nvSpPr>
-          <p:cNvPr id="9" name="TextBox 8"/>
+          <p:cNvPr id="23" name="TextBox 22"/>
           <p:cNvSpPr txBox="1"/>
           <p:nvPr/>
         </p:nvSpPr>
         <p:spPr>
           <a:xfrm>
-            <a:off x="365760" y="6574536"/>
-            <a:ext cx="9144000" cy="274320"/>
+            <a:off x="365760" y="6601968"/>
+            <a:ext cx="10058400" cy="228600"/>
           </a:xfrm>
           <a:prstGeom prst="rect">
             <a:avLst/>
@@ -6202,16 +6379,12 @@
           <a:noFill/>
         </p:spPr>
         <p:txBody>
-          <a:bodyPr wrap="square" anchor="ctr">
+          <a:bodyPr wrap="square">
             <a:spAutoFit/>
           </a:bodyPr>
           <a:lstStyle/>
           <a:p>
-            <a:pPr algn="l">
-              <a:spcAft>
-                <a:spcPts val="0"/>
-              </a:spcAft>
-            </a:pPr>
+            <a:pPr algn="l"/>
             <a:r>
               <a:rPr sz="900" b="0" i="0">
                 <a:solidFill>
@@ -6219,21 +6392,21 @@
                 </a:solidFill>
                 <a:latin typeface="Calibri"/>
               </a:rPr>
-              <a:t>FairBanks FCHIP  |  The Gadfly Project Custom Web Applicatio  |  Your health, our mission.</a:t>
-            </a:r>
-          </a:p>
-        </p:txBody>
-      </p:sp>
-      <p:sp>
-        <p:nvSpPr>
-          <p:cNvPr id="10" name="TextBox 9"/>
+              <a:t>FairBanks FCHIP  |  Gadfly Grant 2026  |  Your health, our mission.</a:t>
+            </a:r>
+          </a:p>
+        </p:txBody>
+      </p:sp>
+      <p:sp>
+        <p:nvSpPr>
+          <p:cNvPr id="24" name="TextBox 23"/>
           <p:cNvSpPr txBox="1"/>
           <p:nvPr/>
         </p:nvSpPr>
         <p:spPr>
           <a:xfrm>
-            <a:off x="11094415" y="6574536"/>
-            <a:ext cx="731520" cy="274320"/>
+            <a:off x="11368735" y="6601968"/>
+            <a:ext cx="548640" cy="228600"/>
           </a:xfrm>
           <a:prstGeom prst="rect">
             <a:avLst/>
@@ -6241,16 +6414,12 @@
           <a:noFill/>
         </p:spPr>
         <p:txBody>
-          <a:bodyPr wrap="square" anchor="ctr">
+          <a:bodyPr wrap="square">
             <a:spAutoFit/>
           </a:bodyPr>
           <a:lstStyle/>
           <a:p>
-            <a:pPr algn="r">
-              <a:spcAft>
-                <a:spcPts val="0"/>
-              </a:spcAft>
-            </a:pPr>
+            <a:pPr algn="r"/>
             <a:r>
               <a:rPr sz="900" b="0" i="0">
                 <a:solidFill>
@@ -6290,7 +6459,7 @@
         <p:spPr>
           <a:xfrm>
             <a:off x="0" y="0"/>
-            <a:ext cx="12191695" cy="960120"/>
+            <a:ext cx="12191695" cy="914400"/>
           </a:xfrm>
           <a:prstGeom prst="rect">
             <a:avLst/>
@@ -6301,7 +6470,6 @@
           <a:ln>
             <a:noFill/>
           </a:ln>
-          <a:effectLst/>
         </p:spPr>
         <p:style>
           <a:lnRef idx="1">
@@ -6334,7 +6502,7 @@
         <p:spPr>
           <a:xfrm>
             <a:off x="0" y="0"/>
-            <a:ext cx="164592" cy="960120"/>
+            <a:ext cx="137160" cy="914400"/>
           </a:xfrm>
           <a:prstGeom prst="rect">
             <a:avLst/>
@@ -6345,7 +6513,6 @@
           <a:ln>
             <a:noFill/>
           </a:ln>
-          <a:effectLst/>
         </p:spPr>
         <p:style>
           <a:lnRef idx="1">
@@ -6377,86 +6544,8 @@
         </p:nvSpPr>
         <p:spPr>
           <a:xfrm>
-            <a:off x="457200" y="109728"/>
-            <a:ext cx="10972800" cy="256032"/>
-          </a:xfrm>
-          <a:prstGeom prst="rect">
-            <a:avLst/>
-          </a:prstGeom>
-          <a:noFill/>
-        </p:spPr>
-        <p:txBody>
-          <a:bodyPr wrap="square" anchor="t">
-            <a:spAutoFit/>
-          </a:bodyPr>
-          <a:lstStyle/>
-          <a:p>
-            <a:pPr algn="l">
-              <a:spcAft>
-                <a:spcPts val="0"/>
-              </a:spcAft>
-            </a:pPr>
-            <a:r>
-              <a:rPr sz="1100" b="1" i="0">
-                <a:solidFill>
-                  <a:srgbClr val="C45C26"/>
-                </a:solidFill>
-                <a:latin typeface="Calibri"/>
-              </a:rPr>
-              <a:t>THE PLAN</a:t>
-            </a:r>
-          </a:p>
-        </p:txBody>
-      </p:sp>
-      <p:sp>
-        <p:nvSpPr>
-          <p:cNvPr id="5" name="TextBox 4"/>
-          <p:cNvSpPr txBox="1"/>
-          <p:nvPr/>
-        </p:nvSpPr>
-        <p:spPr>
-          <a:xfrm>
-            <a:off x="457200" y="384048"/>
-            <a:ext cx="11247120" cy="475488"/>
-          </a:xfrm>
-          <a:prstGeom prst="rect">
-            <a:avLst/>
-          </a:prstGeom>
-          <a:noFill/>
-        </p:spPr>
-        <p:txBody>
-          <a:bodyPr wrap="square" anchor="t">
-            <a:spAutoFit/>
-          </a:bodyPr>
-          <a:lstStyle/>
-          <a:p>
-            <a:pPr algn="l">
-              <a:spcAft>
-                <a:spcPts val="0"/>
-              </a:spcAft>
-            </a:pPr>
-            <a:r>
-              <a:rPr sz="2200" b="1" i="0">
-                <a:solidFill>
-                  <a:srgbClr val="0A1F2E"/>
-                </a:solidFill>
-                <a:latin typeface="Calibri"/>
-              </a:rPr>
-              <a:t>Discovery → build → handover</a:t>
-            </a:r>
-          </a:p>
-        </p:txBody>
-      </p:sp>
-      <p:sp>
-        <p:nvSpPr>
-          <p:cNvPr id="6" name="TextBox 5"/>
-          <p:cNvSpPr txBox="1"/>
-          <p:nvPr/>
-        </p:nvSpPr>
-        <p:spPr>
-          <a:xfrm>
-            <a:off x="502920" y="1234440"/>
-            <a:ext cx="5760720" cy="5074920"/>
+            <a:off x="411480" y="91440"/>
+            <a:ext cx="10972800" cy="274320"/>
           </a:xfrm>
           <a:prstGeom prst="rect">
             <a:avLst/>
@@ -6469,58 +6558,57 @@
           </a:bodyPr>
           <a:lstStyle/>
           <a:p>
-            <a:pPr>
-              <a:spcAft>
-                <a:spcPts val="800"/>
-              </a:spcAft>
-            </a:pPr>
-            <a:r>
-              <a:rPr sz="1500">
-                <a:solidFill>
-                  <a:srgbClr val="1E2F38"/>
+            <a:pPr algn="l"/>
+            <a:r>
+              <a:rPr sz="1100" b="1" i="0">
+                <a:solidFill>
+                  <a:srgbClr val="C45C26"/>
                 </a:solidFill>
                 <a:latin typeface="Calibri"/>
               </a:rPr>
-              <a:t>•  Discovery (weeks 1–3): Workflow mapping with CHWs and clinicians; prioritise MVP screens</a:t>
-            </a:r>
-          </a:p>
-          <a:p>
-            <a:pPr>
-              <a:spcAft>
-                <a:spcPts val="800"/>
-              </a:spcAft>
-            </a:pPr>
-            <a:r>
-              <a:rPr sz="1500">
-                <a:solidFill>
-                  <a:srgbClr val="1E2F38"/>
+              <a:t>HANDOVER</a:t>
+            </a:r>
+          </a:p>
+        </p:txBody>
+      </p:sp>
+      <p:sp>
+        <p:nvSpPr>
+          <p:cNvPr id="5" name="TextBox 4"/>
+          <p:cNvSpPr txBox="1"/>
+          <p:nvPr/>
+        </p:nvSpPr>
+        <p:spPr>
+          <a:xfrm>
+            <a:off x="411480" y="384048"/>
+            <a:ext cx="10972800" cy="457200"/>
+          </a:xfrm>
+          <a:prstGeom prst="rect">
+            <a:avLst/>
+          </a:prstGeom>
+          <a:noFill/>
+        </p:spPr>
+        <p:txBody>
+          <a:bodyPr wrap="square">
+            <a:spAutoFit/>
+          </a:bodyPr>
+          <a:lstStyle/>
+          <a:p>
+            <a:pPr algn="l"/>
+            <a:r>
+              <a:rPr sz="2400" b="1" i="0">
+                <a:solidFill>
+                  <a:srgbClr val="0A1F2E"/>
                 </a:solidFill>
                 <a:latin typeface="Calibri"/>
               </a:rPr>
-              <a:t>•  Build (weeks 4–14): Capture, sync, auth, dashboards; iterative field tests</a:t>
-            </a:r>
-          </a:p>
-          <a:p>
-            <a:pPr>
-              <a:spcAft>
-                <a:spcPts val="800"/>
-              </a:spcAft>
-            </a:pPr>
-            <a:r>
-              <a:rPr sz="1500">
-                <a:solidFill>
-                  <a:srgbClr val="1E2F38"/>
-                </a:solidFill>
-                <a:latin typeface="Calibri"/>
-              </a:rPr>
-              <a:t>•  Handover (weeks 15–18): Docs, training, hosting handover, maintenance plan</a:t>
+              <a:t>FairBanks owns the code and the operations</a:t>
             </a:r>
           </a:p>
         </p:txBody>
       </p:sp>
       <p:pic>
         <p:nvPicPr>
-          <p:cNvPr id="7" name="Picture 6" descr="indoor_training_staff_presenting_01_opt.jpg"/>
+          <p:cNvPr id="6" name="Picture 5" descr="indoor_training_staff_presenting_01_opt.jpg"/>
           <p:cNvPicPr>
             <a:picLocks noChangeAspect="1"/>
           </p:cNvPicPr>
@@ -6534,8 +6622,8 @@
         </p:blipFill>
         <p:spPr>
           <a:xfrm>
-            <a:off x="6492240" y="2035160"/>
-            <a:ext cx="5212080" cy="3473479"/>
+            <a:off x="365760" y="1981799"/>
+            <a:ext cx="5029200" cy="3351602"/>
           </a:xfrm>
           <a:prstGeom prst="rect">
             <a:avLst/>
@@ -6544,14 +6632,154 @@
       </p:pic>
       <p:sp>
         <p:nvSpPr>
-          <p:cNvPr id="8" name="Rectangle 7"/>
+          <p:cNvPr id="7" name="TextBox 6"/>
+          <p:cNvSpPr txBox="1"/>
+          <p:nvPr/>
+        </p:nvSpPr>
+        <p:spPr>
+          <a:xfrm>
+            <a:off x="5669280" y="1188720"/>
+            <a:ext cx="6035040" cy="1005840"/>
+          </a:xfrm>
+          <a:prstGeom prst="rect">
+            <a:avLst/>
+          </a:prstGeom>
+          <a:noFill/>
+        </p:spPr>
+        <p:txBody>
+          <a:bodyPr wrap="square">
+            <a:spAutoFit/>
+          </a:bodyPr>
+          <a:lstStyle/>
+          <a:p>
+            <a:pPr algn="l"/>
+            <a:r>
+              <a:rPr sz="1400" b="0" i="0">
+                <a:solidFill>
+                  <a:srgbClr val="1E2F38"/>
+                </a:solidFill>
+                <a:latin typeface="Calibri"/>
+              </a:rPr>
+              <a:t>•  Full source code in FairBanks-owned repository with clear README and environment setup</a:t>
+            </a:r>
+          </a:p>
+        </p:txBody>
+      </p:sp>
+      <p:sp>
+        <p:nvSpPr>
+          <p:cNvPr id="8" name="TextBox 7"/>
+          <p:cNvSpPr txBox="1"/>
+          <p:nvPr/>
+        </p:nvSpPr>
+        <p:spPr>
+          <a:xfrm>
+            <a:off x="5669280" y="2331720"/>
+            <a:ext cx="6035040" cy="1005840"/>
+          </a:xfrm>
+          <a:prstGeom prst="rect">
+            <a:avLst/>
+          </a:prstGeom>
+          <a:noFill/>
+        </p:spPr>
+        <p:txBody>
+          <a:bodyPr wrap="square">
+            <a:spAutoFit/>
+          </a:bodyPr>
+          <a:lstStyle/>
+          <a:p>
+            <a:pPr algn="l"/>
+            <a:r>
+              <a:rPr sz="1400" b="0" i="0">
+                <a:solidFill>
+                  <a:srgbClr val="1E2F38"/>
+                </a:solidFill>
+                <a:latin typeface="Calibri"/>
+              </a:rPr>
+              <a:t>•  Architecture diagram and API documentation for future developers</a:t>
+            </a:r>
+          </a:p>
+        </p:txBody>
+      </p:sp>
+      <p:sp>
+        <p:nvSpPr>
+          <p:cNvPr id="9" name="TextBox 8"/>
+          <p:cNvSpPr txBox="1"/>
+          <p:nvPr/>
+        </p:nvSpPr>
+        <p:spPr>
+          <a:xfrm>
+            <a:off x="5669280" y="3474720"/>
+            <a:ext cx="6035040" cy="1005840"/>
+          </a:xfrm>
+          <a:prstGeom prst="rect">
+            <a:avLst/>
+          </a:prstGeom>
+          <a:noFill/>
+        </p:spPr>
+        <p:txBody>
+          <a:bodyPr wrap="square">
+            <a:spAutoFit/>
+          </a:bodyPr>
+          <a:lstStyle/>
+          <a:p>
+            <a:pPr algn="l"/>
+            <a:r>
+              <a:rPr sz="1400" b="0" i="0">
+                <a:solidFill>
+                  <a:srgbClr val="1E2F38"/>
+                </a:solidFill>
+                <a:latin typeface="Calibri"/>
+              </a:rPr>
+              <a:t>•  Admin and CHW user guides (simple language, screenshots)</a:t>
+            </a:r>
+          </a:p>
+        </p:txBody>
+      </p:sp>
+      <p:sp>
+        <p:nvSpPr>
+          <p:cNvPr id="10" name="TextBox 9"/>
+          <p:cNvSpPr txBox="1"/>
+          <p:nvPr/>
+        </p:nvSpPr>
+        <p:spPr>
+          <a:xfrm>
+            <a:off x="5669280" y="4617720"/>
+            <a:ext cx="6035040" cy="1005840"/>
+          </a:xfrm>
+          <a:prstGeom prst="rect">
+            <a:avLst/>
+          </a:prstGeom>
+          <a:noFill/>
+        </p:spPr>
+        <p:txBody>
+          <a:bodyPr wrap="square">
+            <a:spAutoFit/>
+          </a:bodyPr>
+          <a:lstStyle/>
+          <a:p>
+            <a:pPr algn="l"/>
+            <a:r>
+              <a:rPr sz="1400" b="0" i="0">
+                <a:solidFill>
+                  <a:srgbClr val="1E2F38"/>
+                </a:solidFill>
+                <a:latin typeface="Calibri"/>
+              </a:rPr>
+              <a:t>•  Two live knowledge-transfer sessions with FairBanks technical lead</a:t>
+            </a:r>
+          </a:p>
+        </p:txBody>
+      </p:sp>
+      <p:sp>
+        <p:nvSpPr>
+          <p:cNvPr id="11" name="Rectangle 10"/>
           <p:cNvSpPr/>
           <p:nvPr/>
         </p:nvSpPr>
         <p:spPr>
           <a:xfrm>
-            <a:off x="0" y="6565392"/>
-            <a:ext cx="12191695" cy="292608"/>
+            <a:off x="0" y="6583680"/>
+            <a:ext cx="12191695" cy="274320"/>
           </a:xfrm>
           <a:prstGeom prst="rect">
             <a:avLst/>
@@ -6562,7 +6790,6 @@
           <a:ln>
             <a:noFill/>
           </a:ln>
-          <a:effectLst/>
         </p:spPr>
         <p:style>
           <a:lnRef idx="1">
@@ -6588,14 +6815,14 @@
       </p:sp>
       <p:sp>
         <p:nvSpPr>
-          <p:cNvPr id="9" name="TextBox 8"/>
+          <p:cNvPr id="12" name="TextBox 11"/>
           <p:cNvSpPr txBox="1"/>
           <p:nvPr/>
         </p:nvSpPr>
         <p:spPr>
           <a:xfrm>
-            <a:off x="365760" y="6574536"/>
-            <a:ext cx="9144000" cy="274320"/>
+            <a:off x="365760" y="6601968"/>
+            <a:ext cx="10058400" cy="228600"/>
           </a:xfrm>
           <a:prstGeom prst="rect">
             <a:avLst/>
@@ -6603,16 +6830,12 @@
           <a:noFill/>
         </p:spPr>
         <p:txBody>
-          <a:bodyPr wrap="square" anchor="ctr">
+          <a:bodyPr wrap="square">
             <a:spAutoFit/>
           </a:bodyPr>
           <a:lstStyle/>
           <a:p>
-            <a:pPr algn="l">
-              <a:spcAft>
-                <a:spcPts val="0"/>
-              </a:spcAft>
-            </a:pPr>
+            <a:pPr algn="l"/>
             <a:r>
               <a:rPr sz="900" b="0" i="0">
                 <a:solidFill>
@@ -6620,21 +6843,21 @@
                 </a:solidFill>
                 <a:latin typeface="Calibri"/>
               </a:rPr>
-              <a:t>FairBanks FCHIP  |  The Gadfly Project Custom Web Applicatio  |  Your health, our mission.</a:t>
-            </a:r>
-          </a:p>
-        </p:txBody>
-      </p:sp>
-      <p:sp>
-        <p:nvSpPr>
-          <p:cNvPr id="10" name="TextBox 9"/>
+              <a:t>FairBanks FCHIP  |  Gadfly Grant 2026  |  Your health, our mission.</a:t>
+            </a:r>
+          </a:p>
+        </p:txBody>
+      </p:sp>
+      <p:sp>
+        <p:nvSpPr>
+          <p:cNvPr id="13" name="TextBox 12"/>
           <p:cNvSpPr txBox="1"/>
           <p:nvPr/>
         </p:nvSpPr>
         <p:spPr>
           <a:xfrm>
-            <a:off x="11094415" y="6574536"/>
-            <a:ext cx="731520" cy="274320"/>
+            <a:off x="11368735" y="6601968"/>
+            <a:ext cx="548640" cy="228600"/>
           </a:xfrm>
           <a:prstGeom prst="rect">
             <a:avLst/>
@@ -6642,16 +6865,12 @@
           <a:noFill/>
         </p:spPr>
         <p:txBody>
-          <a:bodyPr wrap="square" anchor="ctr">
+          <a:bodyPr wrap="square">
             <a:spAutoFit/>
           </a:bodyPr>
           <a:lstStyle/>
           <a:p>
-            <a:pPr algn="r">
-              <a:spcAft>
-                <a:spcPts val="0"/>
-              </a:spcAft>
-            </a:pPr>
+            <a:pPr algn="r"/>
             <a:r>
               <a:rPr sz="900" b="0" i="0">
                 <a:solidFill>
@@ -6691,7 +6910,7 @@
         <p:spPr>
           <a:xfrm>
             <a:off x="0" y="0"/>
-            <a:ext cx="12191695" cy="960120"/>
+            <a:ext cx="12191695" cy="914400"/>
           </a:xfrm>
           <a:prstGeom prst="rect">
             <a:avLst/>
@@ -6702,7 +6921,6 @@
           <a:ln>
             <a:noFill/>
           </a:ln>
-          <a:effectLst/>
         </p:spPr>
         <p:style>
           <a:lnRef idx="1">
@@ -6735,7 +6953,7 @@
         <p:spPr>
           <a:xfrm>
             <a:off x="0" y="0"/>
-            <a:ext cx="164592" cy="960120"/>
+            <a:ext cx="137160" cy="914400"/>
           </a:xfrm>
           <a:prstGeom prst="rect">
             <a:avLst/>
@@ -6746,7 +6964,6 @@
           <a:ln>
             <a:noFill/>
           </a:ln>
-          <a:effectLst/>
         </p:spPr>
         <p:style>
           <a:lnRef idx="1">
@@ -6778,8 +6995,8 @@
         </p:nvSpPr>
         <p:spPr>
           <a:xfrm>
-            <a:off x="457200" y="109728"/>
-            <a:ext cx="10972800" cy="256032"/>
+            <a:off x="411480" y="91440"/>
+            <a:ext cx="10972800" cy="274320"/>
           </a:xfrm>
           <a:prstGeom prst="rect">
             <a:avLst/>
@@ -6787,16 +7004,12 @@
           <a:noFill/>
         </p:spPr>
         <p:txBody>
-          <a:bodyPr wrap="square" anchor="t">
+          <a:bodyPr wrap="square">
             <a:spAutoFit/>
           </a:bodyPr>
           <a:lstStyle/>
           <a:p>
-            <a:pPr algn="l">
-              <a:spcAft>
-                <a:spcPts val="0"/>
-              </a:spcAft>
-            </a:pPr>
+            <a:pPr algn="l"/>
             <a:r>
               <a:rPr sz="1100" b="1" i="0">
                 <a:solidFill>
@@ -6804,7 +7017,7 @@
                 </a:solidFill>
                 <a:latin typeface="Calibri"/>
               </a:rPr>
-              <a:t>DEEP TECHNOLOGY</a:t>
+              <a:t>WIN-WIN</a:t>
             </a:r>
           </a:p>
         </p:txBody>
@@ -6817,8 +7030,8 @@
         </p:nvSpPr>
         <p:spPr>
           <a:xfrm>
-            <a:off x="457200" y="384048"/>
-            <a:ext cx="11247120" cy="475488"/>
+            <a:off x="411480" y="384048"/>
+            <a:ext cx="10972800" cy="457200"/>
           </a:xfrm>
           <a:prstGeom prst="rect">
             <a:avLst/>
@@ -6826,62 +7039,34 @@
           <a:noFill/>
         </p:spPr>
         <p:txBody>
-          <a:bodyPr wrap="square" anchor="t">
+          <a:bodyPr wrap="square">
             <a:spAutoFit/>
           </a:bodyPr>
           <a:lstStyle/>
           <a:p>
-            <a:pPr algn="l">
-              <a:spcAft>
-                <a:spcPts val="0"/>
-              </a:spcAft>
-            </a:pPr>
-            <a:r>
-              <a:rPr sz="2200" b="1" i="0">
+            <a:pPr algn="l"/>
+            <a:r>
+              <a:rPr sz="2400" b="1" i="0">
                 <a:solidFill>
                   <a:srgbClr val="0A1F2E"/>
                 </a:solidFill>
                 <a:latin typeface="Calibri"/>
               </a:rPr>
-              <a:t>Intelligence rooted in African community care</a:t>
-            </a:r>
-          </a:p>
-        </p:txBody>
-      </p:sp>
-      <p:pic>
-        <p:nvPicPr>
-          <p:cNvPr id="6" name="Picture 5" descr="deep_tech_collage_opt.jpg"/>
-          <p:cNvPicPr>
-            <a:picLocks noChangeAspect="1"/>
-          </p:cNvPicPr>
-          <p:nvPr/>
-        </p:nvPicPr>
-        <p:blipFill>
-          <a:blip r:embed="rId2"/>
-          <a:stretch>
-            <a:fillRect/>
-          </a:stretch>
-        </p:blipFill>
-        <p:spPr>
-          <a:xfrm>
-            <a:off x="411480" y="2065630"/>
-            <a:ext cx="5120640" cy="3412540"/>
-          </a:xfrm>
-          <a:prstGeom prst="rect">
-            <a:avLst/>
-          </a:prstGeom>
-        </p:spPr>
-      </p:pic>
-      <p:sp>
-        <p:nvSpPr>
-          <p:cNvPr id="7" name="Rectangle 6"/>
+              <a:t>Engineering impact both sides can measure</a:t>
+            </a:r>
+          </a:p>
+        </p:txBody>
+      </p:sp>
+      <p:sp>
+        <p:nvSpPr>
+          <p:cNvPr id="6" name="Rectangle 5"/>
           <p:cNvSpPr/>
           <p:nvPr/>
         </p:nvSpPr>
         <p:spPr>
           <a:xfrm>
-            <a:off x="5852160" y="1197864"/>
-            <a:ext cx="5852160" cy="766572"/>
+            <a:off x="457200" y="1280160"/>
+            <a:ext cx="5577840" cy="4389120"/>
           </a:xfrm>
           <a:prstGeom prst="rect">
             <a:avLst/>
@@ -6889,12 +7074,11 @@
           <a:solidFill>
             <a:srgbClr val="FFFFFF"/>
           </a:solidFill>
-          <a:ln w="9525">
+          <a:ln>
             <a:solidFill>
               <a:srgbClr val="D0DCDC"/>
             </a:solidFill>
           </a:ln>
-          <a:effectLst/>
         </p:spPr>
         <p:style>
           <a:lnRef idx="1">
@@ -6920,14 +7104,49 @@
       </p:sp>
       <p:sp>
         <p:nvSpPr>
+          <p:cNvPr id="7" name="TextBox 6"/>
+          <p:cNvSpPr txBox="1"/>
+          <p:nvPr/>
+        </p:nvSpPr>
+        <p:spPr>
+          <a:xfrm>
+            <a:off x="685800" y="1508760"/>
+            <a:ext cx="5120640" cy="457200"/>
+          </a:xfrm>
+          <a:prstGeom prst="rect">
+            <a:avLst/>
+          </a:prstGeom>
+          <a:noFill/>
+        </p:spPr>
+        <p:txBody>
+          <a:bodyPr wrap="square">
+            <a:spAutoFit/>
+          </a:bodyPr>
+          <a:lstStyle/>
+          <a:p>
+            <a:pPr algn="l"/>
+            <a:r>
+              <a:rPr sz="2000" b="1" i="0">
+                <a:solidFill>
+                  <a:srgbClr val="C45C26"/>
+                </a:solidFill>
+                <a:latin typeface="Calibri"/>
+              </a:rPr>
+              <a:t>For FairBanks</a:t>
+            </a:r>
+          </a:p>
+        </p:txBody>
+      </p:sp>
+      <p:sp>
+        <p:nvSpPr>
           <p:cNvPr id="8" name="TextBox 7"/>
           <p:cNvSpPr txBox="1"/>
           <p:nvPr/>
         </p:nvSpPr>
         <p:spPr>
           <a:xfrm>
-            <a:off x="6035040" y="1252728"/>
-            <a:ext cx="5486400" cy="274320"/>
+            <a:off x="685800" y="2103120"/>
+            <a:ext cx="5120640" cy="3200400"/>
           </a:xfrm>
           <a:prstGeom prst="rect">
             <a:avLst/>
@@ -6935,77 +7154,34 @@
           <a:noFill/>
         </p:spPr>
         <p:txBody>
-          <a:bodyPr wrap="square" anchor="t">
+          <a:bodyPr wrap="square">
             <a:spAutoFit/>
           </a:bodyPr>
           <a:lstStyle/>
           <a:p>
-            <a:pPr algn="l">
-              <a:spcAft>
-                <a:spcPts val="0"/>
-              </a:spcAft>
-            </a:pPr>
-            <a:r>
-              <a:rPr sz="1400" b="1" i="0">
-                <a:solidFill>
-                  <a:srgbClr val="0D6E6E"/>
+            <a:pPr algn="l"/>
+            <a:r>
+              <a:rPr sz="1600" b="0" i="0">
+                <a:solidFill>
+                  <a:srgbClr val="1E2F38"/>
                 </a:solidFill>
                 <a:latin typeface="Calibri"/>
               </a:rPr>
-              <a:t>Artificial Intelligence</a:t>
-            </a:r>
-          </a:p>
-        </p:txBody>
-      </p:sp>
-      <p:sp>
-        <p:nvSpPr>
-          <p:cNvPr id="9" name="TextBox 8"/>
-          <p:cNvSpPr txBox="1"/>
-          <p:nvPr/>
-        </p:nvSpPr>
-        <p:spPr>
-          <a:xfrm>
-            <a:off x="6035040" y="1527048"/>
-            <a:ext cx="5486400" cy="365760"/>
-          </a:xfrm>
-          <a:prstGeom prst="rect">
-            <a:avLst/>
-          </a:prstGeom>
-          <a:noFill/>
-        </p:spPr>
-        <p:txBody>
-          <a:bodyPr wrap="square" anchor="t">
-            <a:spAutoFit/>
-          </a:bodyPr>
-          <a:lstStyle/>
-          <a:p>
-            <a:pPr algn="l">
-              <a:spcAft>
-                <a:spcPts val="0"/>
-              </a:spcAft>
-            </a:pPr>
-            <a:r>
-              <a:rPr sz="1200" b="0" i="0">
-                <a:solidFill>
-                  <a:srgbClr val="3A4A54"/>
-                </a:solidFill>
-                <a:latin typeface="Calibri"/>
-              </a:rPr>
-              <a:t>Outbreak early warning; maternal and NCD risk scoring</a:t>
-            </a:r>
-          </a:p>
-        </p:txBody>
-      </p:sp>
-      <p:sp>
-        <p:nvSpPr>
-          <p:cNvPr id="10" name="Rectangle 9"/>
+              <a:t>A production-ready pilot: CHW capture app, sync pipeline, and operations dashboard — validated in live outreach, not a slide deck.</a:t>
+            </a:r>
+          </a:p>
+        </p:txBody>
+      </p:sp>
+      <p:sp>
+        <p:nvSpPr>
+          <p:cNvPr id="9" name="Rectangle 8"/>
           <p:cNvSpPr/>
           <p:nvPr/>
         </p:nvSpPr>
         <p:spPr>
           <a:xfrm>
-            <a:off x="5852160" y="2074164"/>
-            <a:ext cx="5852160" cy="766572"/>
+            <a:off x="6309360" y="1280160"/>
+            <a:ext cx="5577840" cy="4389120"/>
           </a:xfrm>
           <a:prstGeom prst="rect">
             <a:avLst/>
@@ -7013,12 +7189,11 @@
           <a:solidFill>
             <a:srgbClr val="FFFFFF"/>
           </a:solidFill>
-          <a:ln w="9525">
+          <a:ln>
             <a:solidFill>
               <a:srgbClr val="D0DCDC"/>
             </a:solidFill>
           </a:ln>
-          <a:effectLst/>
         </p:spPr>
         <p:style>
           <a:lnRef idx="1">
@@ -7044,14 +7219,49 @@
       </p:sp>
       <p:sp>
         <p:nvSpPr>
+          <p:cNvPr id="10" name="TextBox 9"/>
+          <p:cNvSpPr txBox="1"/>
+          <p:nvPr/>
+        </p:nvSpPr>
+        <p:spPr>
+          <a:xfrm>
+            <a:off x="6537960" y="1508760"/>
+            <a:ext cx="5120640" cy="457200"/>
+          </a:xfrm>
+          <a:prstGeom prst="rect">
+            <a:avLst/>
+          </a:prstGeom>
+          <a:noFill/>
+        </p:spPr>
+        <p:txBody>
+          <a:bodyPr wrap="square">
+            <a:spAutoFit/>
+          </a:bodyPr>
+          <a:lstStyle/>
+          <a:p>
+            <a:pPr algn="l"/>
+            <a:r>
+              <a:rPr sz="2000" b="1" i="0">
+                <a:solidFill>
+                  <a:srgbClr val="C45C26"/>
+                </a:solidFill>
+                <a:latin typeface="Calibri"/>
+              </a:rPr>
+              <a:t>For Gadfly</a:t>
+            </a:r>
+          </a:p>
+        </p:txBody>
+      </p:sp>
+      <p:sp>
+        <p:nvSpPr>
           <p:cNvPr id="11" name="TextBox 10"/>
           <p:cNvSpPr txBox="1"/>
           <p:nvPr/>
         </p:nvSpPr>
         <p:spPr>
           <a:xfrm>
-            <a:off x="6035040" y="2129028"/>
-            <a:ext cx="5486400" cy="274320"/>
+            <a:off x="6537960" y="2103120"/>
+            <a:ext cx="5120640" cy="3200400"/>
           </a:xfrm>
           <a:prstGeom prst="rect">
             <a:avLst/>
@@ -7059,24 +7269,20 @@
           <a:noFill/>
         </p:spPr>
         <p:txBody>
-          <a:bodyPr wrap="square" anchor="t">
+          <a:bodyPr wrap="square">
             <a:spAutoFit/>
           </a:bodyPr>
           <a:lstStyle/>
           <a:p>
-            <a:pPr algn="l">
-              <a:spcAft>
-                <a:spcPts val="0"/>
-              </a:spcAft>
-            </a:pPr>
-            <a:r>
-              <a:rPr sz="1400" b="1" i="0">
-                <a:solidFill>
-                  <a:srgbClr val="0D6E6E"/>
+            <a:pPr algn="l"/>
+            <a:r>
+              <a:rPr sz="1600" b="0" i="0">
+                <a:solidFill>
+                  <a:srgbClr val="1E2F38"/>
                 </a:solidFill>
                 <a:latin typeface="Calibri"/>
               </a:rPr>
-              <a:t>Machine Learning</a:t>
+              <a:t>A mission-aligned build with real users (CHWs, clinic staff, programme managers), measurable community impact, and a portfolio case in African primary care.</a:t>
             </a:r>
           </a:p>
         </p:txBody>
@@ -7089,8 +7295,8 @@
         </p:nvSpPr>
         <p:spPr>
           <a:xfrm>
-            <a:off x="6035040" y="2403348"/>
-            <a:ext cx="5486400" cy="365760"/>
+            <a:off x="457200" y="5943600"/>
+            <a:ext cx="11247120" cy="365760"/>
           </a:xfrm>
           <a:prstGeom prst="rect">
             <a:avLst/>
@@ -7098,24 +7304,20 @@
           <a:noFill/>
         </p:spPr>
         <p:txBody>
-          <a:bodyPr wrap="square" anchor="t">
+          <a:bodyPr wrap="square">
             <a:spAutoFit/>
           </a:bodyPr>
           <a:lstStyle/>
           <a:p>
-            <a:pPr algn="l">
-              <a:spcAft>
-                <a:spcPts val="0"/>
-              </a:spcAft>
-            </a:pPr>
-            <a:r>
-              <a:rPr sz="1200" b="0" i="0">
-                <a:solidFill>
-                  <a:srgbClr val="3A4A54"/>
+            <a:pPr algn="ctr"/>
+            <a:r>
+              <a:rPr sz="1600" b="1" i="1">
+                <a:solidFill>
+                  <a:srgbClr val="0D6E6E"/>
                 </a:solidFill>
                 <a:latin typeface="Calibri"/>
               </a:rPr>
-              <a:t>Learn from community patterns, seasons, and outreach outcomes</a:t>
+              <a:t>Your health, our mission.</a:t>
             </a:r>
           </a:p>
         </p:txBody>
@@ -7128,504 +7330,8 @@
         </p:nvSpPr>
         <p:spPr>
           <a:xfrm>
-            <a:off x="5852160" y="2950464"/>
-            <a:ext cx="5852160" cy="766572"/>
-          </a:xfrm>
-          <a:prstGeom prst="rect">
-            <a:avLst/>
-          </a:prstGeom>
-          <a:solidFill>
-            <a:srgbClr val="FFFFFF"/>
-          </a:solidFill>
-          <a:ln w="9525">
-            <a:solidFill>
-              <a:srgbClr val="D0DCDC"/>
-            </a:solidFill>
-          </a:ln>
-          <a:effectLst/>
-        </p:spPr>
-        <p:style>
-          <a:lnRef idx="1">
-            <a:schemeClr val="accent1"/>
-          </a:lnRef>
-          <a:fillRef idx="3">
-            <a:schemeClr val="accent1"/>
-          </a:fillRef>
-          <a:effectRef idx="2">
-            <a:schemeClr val="accent1"/>
-          </a:effectRef>
-          <a:fontRef idx="minor">
-            <a:schemeClr val="lt1"/>
-          </a:fontRef>
-        </p:style>
-        <p:txBody>
-          <a:bodyPr rtlCol="0" anchor="ctr"/>
-          <a:lstStyle/>
-          <a:p>
-            <a:pPr algn="ctr"/>
-          </a:p>
-        </p:txBody>
-      </p:sp>
-      <p:sp>
-        <p:nvSpPr>
-          <p:cNvPr id="14" name="TextBox 13"/>
-          <p:cNvSpPr txBox="1"/>
-          <p:nvPr/>
-        </p:nvSpPr>
-        <p:spPr>
-          <a:xfrm>
-            <a:off x="6035040" y="3005328"/>
-            <a:ext cx="5486400" cy="274320"/>
-          </a:xfrm>
-          <a:prstGeom prst="rect">
-            <a:avLst/>
-          </a:prstGeom>
-          <a:noFill/>
-        </p:spPr>
-        <p:txBody>
-          <a:bodyPr wrap="square" anchor="t">
-            <a:spAutoFit/>
-          </a:bodyPr>
-          <a:lstStyle/>
-          <a:p>
-            <a:pPr algn="l">
-              <a:spcAft>
-                <a:spcPts val="0"/>
-              </a:spcAft>
-            </a:pPr>
-            <a:r>
-              <a:rPr sz="1400" b="1" i="0">
-                <a:solidFill>
-                  <a:srgbClr val="0D6E6E"/>
-                </a:solidFill>
-                <a:latin typeface="Calibri"/>
-              </a:rPr>
-              <a:t>GIS Mapping</a:t>
-            </a:r>
-          </a:p>
-        </p:txBody>
-      </p:sp>
-      <p:sp>
-        <p:nvSpPr>
-          <p:cNvPr id="15" name="TextBox 14"/>
-          <p:cNvSpPr txBox="1"/>
-          <p:nvPr/>
-        </p:nvSpPr>
-        <p:spPr>
-          <a:xfrm>
-            <a:off x="6035040" y="3279648"/>
-            <a:ext cx="5486400" cy="365760"/>
-          </a:xfrm>
-          <a:prstGeom prst="rect">
-            <a:avLst/>
-          </a:prstGeom>
-          <a:noFill/>
-        </p:spPr>
-        <p:txBody>
-          <a:bodyPr wrap="square" anchor="t">
-            <a:spAutoFit/>
-          </a:bodyPr>
-          <a:lstStyle/>
-          <a:p>
-            <a:pPr algn="l">
-              <a:spcAft>
-                <a:spcPts val="0"/>
-              </a:spcAft>
-            </a:pPr>
-            <a:r>
-              <a:rPr sz="1200" b="0" i="0">
-                <a:solidFill>
-                  <a:srgbClr val="3A4A54"/>
-                </a:solidFill>
-                <a:latin typeface="Calibri"/>
-              </a:rPr>
-              <a:t>Disease distribution, hotspots, and resource gaps</a:t>
-            </a:r>
-          </a:p>
-        </p:txBody>
-      </p:sp>
-      <p:sp>
-        <p:nvSpPr>
-          <p:cNvPr id="16" name="Rectangle 15"/>
-          <p:cNvSpPr/>
-          <p:nvPr/>
-        </p:nvSpPr>
-        <p:spPr>
-          <a:xfrm>
-            <a:off x="5852160" y="3826764"/>
-            <a:ext cx="5852160" cy="766572"/>
-          </a:xfrm>
-          <a:prstGeom prst="rect">
-            <a:avLst/>
-          </a:prstGeom>
-          <a:solidFill>
-            <a:srgbClr val="FFFFFF"/>
-          </a:solidFill>
-          <a:ln w="9525">
-            <a:solidFill>
-              <a:srgbClr val="D0DCDC"/>
-            </a:solidFill>
-          </a:ln>
-          <a:effectLst/>
-        </p:spPr>
-        <p:style>
-          <a:lnRef idx="1">
-            <a:schemeClr val="accent1"/>
-          </a:lnRef>
-          <a:fillRef idx="3">
-            <a:schemeClr val="accent1"/>
-          </a:fillRef>
-          <a:effectRef idx="2">
-            <a:schemeClr val="accent1"/>
-          </a:effectRef>
-          <a:fontRef idx="minor">
-            <a:schemeClr val="lt1"/>
-          </a:fontRef>
-        </p:style>
-        <p:txBody>
-          <a:bodyPr rtlCol="0" anchor="ctr"/>
-          <a:lstStyle/>
-          <a:p>
-            <a:pPr algn="ctr"/>
-          </a:p>
-        </p:txBody>
-      </p:sp>
-      <p:sp>
-        <p:nvSpPr>
-          <p:cNvPr id="17" name="TextBox 16"/>
-          <p:cNvSpPr txBox="1"/>
-          <p:nvPr/>
-        </p:nvSpPr>
-        <p:spPr>
-          <a:xfrm>
-            <a:off x="6035040" y="3881628"/>
-            <a:ext cx="5486400" cy="274320"/>
-          </a:xfrm>
-          <a:prstGeom prst="rect">
-            <a:avLst/>
-          </a:prstGeom>
-          <a:noFill/>
-        </p:spPr>
-        <p:txBody>
-          <a:bodyPr wrap="square" anchor="t">
-            <a:spAutoFit/>
-          </a:bodyPr>
-          <a:lstStyle/>
-          <a:p>
-            <a:pPr algn="l">
-              <a:spcAft>
-                <a:spcPts val="0"/>
-              </a:spcAft>
-            </a:pPr>
-            <a:r>
-              <a:rPr sz="1400" b="1" i="0">
-                <a:solidFill>
-                  <a:srgbClr val="0D6E6E"/>
-                </a:solidFill>
-                <a:latin typeface="Calibri"/>
-              </a:rPr>
-              <a:t>Mobile Data Collection</a:t>
-            </a:r>
-          </a:p>
-        </p:txBody>
-      </p:sp>
-      <p:sp>
-        <p:nvSpPr>
-          <p:cNvPr id="18" name="TextBox 17"/>
-          <p:cNvSpPr txBox="1"/>
-          <p:nvPr/>
-        </p:nvSpPr>
-        <p:spPr>
-          <a:xfrm>
-            <a:off x="6035040" y="4155948"/>
-            <a:ext cx="5486400" cy="365760"/>
-          </a:xfrm>
-          <a:prstGeom prst="rect">
-            <a:avLst/>
-          </a:prstGeom>
-          <a:noFill/>
-        </p:spPr>
-        <p:txBody>
-          <a:bodyPr wrap="square" anchor="t">
-            <a:spAutoFit/>
-          </a:bodyPr>
-          <a:lstStyle/>
-          <a:p>
-            <a:pPr algn="l">
-              <a:spcAft>
-                <a:spcPts val="0"/>
-              </a:spcAft>
-            </a:pPr>
-            <a:r>
-              <a:rPr sz="1200" b="0" i="0">
-                <a:solidFill>
-                  <a:srgbClr val="3A4A54"/>
-                </a:solidFill>
-                <a:latin typeface="Calibri"/>
-              </a:rPr>
-              <a:t>Offline-capable CHW/VHT capture at household level</a:t>
-            </a:r>
-          </a:p>
-        </p:txBody>
-      </p:sp>
-      <p:sp>
-        <p:nvSpPr>
-          <p:cNvPr id="19" name="Rectangle 18"/>
-          <p:cNvSpPr/>
-          <p:nvPr/>
-        </p:nvSpPr>
-        <p:spPr>
-          <a:xfrm>
-            <a:off x="5852160" y="4703064"/>
-            <a:ext cx="5852160" cy="766572"/>
-          </a:xfrm>
-          <a:prstGeom prst="rect">
-            <a:avLst/>
-          </a:prstGeom>
-          <a:solidFill>
-            <a:srgbClr val="FFFFFF"/>
-          </a:solidFill>
-          <a:ln w="9525">
-            <a:solidFill>
-              <a:srgbClr val="D0DCDC"/>
-            </a:solidFill>
-          </a:ln>
-          <a:effectLst/>
-        </p:spPr>
-        <p:style>
-          <a:lnRef idx="1">
-            <a:schemeClr val="accent1"/>
-          </a:lnRef>
-          <a:fillRef idx="3">
-            <a:schemeClr val="accent1"/>
-          </a:fillRef>
-          <a:effectRef idx="2">
-            <a:schemeClr val="accent1"/>
-          </a:effectRef>
-          <a:fontRef idx="minor">
-            <a:schemeClr val="lt1"/>
-          </a:fontRef>
-        </p:style>
-        <p:txBody>
-          <a:bodyPr rtlCol="0" anchor="ctr"/>
-          <a:lstStyle/>
-          <a:p>
-            <a:pPr algn="ctr"/>
-          </a:p>
-        </p:txBody>
-      </p:sp>
-      <p:sp>
-        <p:nvSpPr>
-          <p:cNvPr id="20" name="TextBox 19"/>
-          <p:cNvSpPr txBox="1"/>
-          <p:nvPr/>
-        </p:nvSpPr>
-        <p:spPr>
-          <a:xfrm>
-            <a:off x="6035040" y="4757928"/>
-            <a:ext cx="5486400" cy="274320"/>
-          </a:xfrm>
-          <a:prstGeom prst="rect">
-            <a:avLst/>
-          </a:prstGeom>
-          <a:noFill/>
-        </p:spPr>
-        <p:txBody>
-          <a:bodyPr wrap="square" anchor="t">
-            <a:spAutoFit/>
-          </a:bodyPr>
-          <a:lstStyle/>
-          <a:p>
-            <a:pPr algn="l">
-              <a:spcAft>
-                <a:spcPts val="0"/>
-              </a:spcAft>
-            </a:pPr>
-            <a:r>
-              <a:rPr sz="1400" b="1" i="0">
-                <a:solidFill>
-                  <a:srgbClr val="0D6E6E"/>
-                </a:solidFill>
-                <a:latin typeface="Calibri"/>
-              </a:rPr>
-              <a:t>Cloud Computing</a:t>
-            </a:r>
-          </a:p>
-        </p:txBody>
-      </p:sp>
-      <p:sp>
-        <p:nvSpPr>
-          <p:cNvPr id="21" name="TextBox 20"/>
-          <p:cNvSpPr txBox="1"/>
-          <p:nvPr/>
-        </p:nvSpPr>
-        <p:spPr>
-          <a:xfrm>
-            <a:off x="6035040" y="5032248"/>
-            <a:ext cx="5486400" cy="365760"/>
-          </a:xfrm>
-          <a:prstGeom prst="rect">
-            <a:avLst/>
-          </a:prstGeom>
-          <a:noFill/>
-        </p:spPr>
-        <p:txBody>
-          <a:bodyPr wrap="square" anchor="t">
-            <a:spAutoFit/>
-          </a:bodyPr>
-          <a:lstStyle/>
-          <a:p>
-            <a:pPr algn="l">
-              <a:spcAft>
-                <a:spcPts val="0"/>
-              </a:spcAft>
-            </a:pPr>
-            <a:r>
-              <a:rPr sz="1200" b="0" i="0">
-                <a:solidFill>
-                  <a:srgbClr val="3A4A54"/>
-                </a:solidFill>
-                <a:latin typeface="Calibri"/>
-              </a:rPr>
-              <a:t>Secure sync across facilities and partners</a:t>
-            </a:r>
-          </a:p>
-        </p:txBody>
-      </p:sp>
-      <p:sp>
-        <p:nvSpPr>
-          <p:cNvPr id="22" name="Rectangle 21"/>
-          <p:cNvSpPr/>
-          <p:nvPr/>
-        </p:nvSpPr>
-        <p:spPr>
-          <a:xfrm>
-            <a:off x="5852160" y="5579364"/>
-            <a:ext cx="5852160" cy="766572"/>
-          </a:xfrm>
-          <a:prstGeom prst="rect">
-            <a:avLst/>
-          </a:prstGeom>
-          <a:solidFill>
-            <a:srgbClr val="FFFFFF"/>
-          </a:solidFill>
-          <a:ln w="9525">
-            <a:solidFill>
-              <a:srgbClr val="D0DCDC"/>
-            </a:solidFill>
-          </a:ln>
-          <a:effectLst/>
-        </p:spPr>
-        <p:style>
-          <a:lnRef idx="1">
-            <a:schemeClr val="accent1"/>
-          </a:lnRef>
-          <a:fillRef idx="3">
-            <a:schemeClr val="accent1"/>
-          </a:fillRef>
-          <a:effectRef idx="2">
-            <a:schemeClr val="accent1"/>
-          </a:effectRef>
-          <a:fontRef idx="minor">
-            <a:schemeClr val="lt1"/>
-          </a:fontRef>
-        </p:style>
-        <p:txBody>
-          <a:bodyPr rtlCol="0" anchor="ctr"/>
-          <a:lstStyle/>
-          <a:p>
-            <a:pPr algn="ctr"/>
-          </a:p>
-        </p:txBody>
-      </p:sp>
-      <p:sp>
-        <p:nvSpPr>
-          <p:cNvPr id="23" name="TextBox 22"/>
-          <p:cNvSpPr txBox="1"/>
-          <p:nvPr/>
-        </p:nvSpPr>
-        <p:spPr>
-          <a:xfrm>
-            <a:off x="6035040" y="5634228"/>
-            <a:ext cx="5486400" cy="274320"/>
-          </a:xfrm>
-          <a:prstGeom prst="rect">
-            <a:avLst/>
-          </a:prstGeom>
-          <a:noFill/>
-        </p:spPr>
-        <p:txBody>
-          <a:bodyPr wrap="square" anchor="t">
-            <a:spAutoFit/>
-          </a:bodyPr>
-          <a:lstStyle/>
-          <a:p>
-            <a:pPr algn="l">
-              <a:spcAft>
-                <a:spcPts val="0"/>
-              </a:spcAft>
-            </a:pPr>
-            <a:r>
-              <a:rPr sz="1400" b="1" i="0">
-                <a:solidFill>
-                  <a:srgbClr val="0D6E6E"/>
-                </a:solidFill>
-                <a:latin typeface="Calibri"/>
-              </a:rPr>
-              <a:t>Analytics Dashboards</a:t>
-            </a:r>
-          </a:p>
-        </p:txBody>
-      </p:sp>
-      <p:sp>
-        <p:nvSpPr>
-          <p:cNvPr id="24" name="TextBox 23"/>
-          <p:cNvSpPr txBox="1"/>
-          <p:nvPr/>
-        </p:nvSpPr>
-        <p:spPr>
-          <a:xfrm>
-            <a:off x="6035040" y="5908548"/>
-            <a:ext cx="5486400" cy="365760"/>
-          </a:xfrm>
-          <a:prstGeom prst="rect">
-            <a:avLst/>
-          </a:prstGeom>
-          <a:noFill/>
-        </p:spPr>
-        <p:txBody>
-          <a:bodyPr wrap="square" anchor="t">
-            <a:spAutoFit/>
-          </a:bodyPr>
-          <a:lstStyle/>
-          <a:p>
-            <a:pPr algn="l">
-              <a:spcAft>
-                <a:spcPts val="0"/>
-              </a:spcAft>
-            </a:pPr>
-            <a:r>
-              <a:rPr sz="1200" b="0" i="0">
-                <a:solidFill>
-                  <a:srgbClr val="3A4A54"/>
-                </a:solidFill>
-                <a:latin typeface="Calibri"/>
-              </a:rPr>
-              <a:t>Real-time views for clinics, districts, and NGOs</a:t>
-            </a:r>
-          </a:p>
-        </p:txBody>
-      </p:sp>
-      <p:sp>
-        <p:nvSpPr>
-          <p:cNvPr id="25" name="Rectangle 24"/>
-          <p:cNvSpPr/>
-          <p:nvPr/>
-        </p:nvSpPr>
-        <p:spPr>
-          <a:xfrm>
-            <a:off x="0" y="6565392"/>
-            <a:ext cx="12191695" cy="292608"/>
+            <a:off x="0" y="6583680"/>
+            <a:ext cx="12191695" cy="274320"/>
           </a:xfrm>
           <a:prstGeom prst="rect">
             <a:avLst/>
@@ -7636,7 +7342,6 @@
           <a:ln>
             <a:noFill/>
           </a:ln>
-          <a:effectLst/>
         </p:spPr>
         <p:style>
           <a:lnRef idx="1">
@@ -7662,14 +7367,14 @@
       </p:sp>
       <p:sp>
         <p:nvSpPr>
-          <p:cNvPr id="26" name="TextBox 25"/>
+          <p:cNvPr id="14" name="TextBox 13"/>
           <p:cNvSpPr txBox="1"/>
           <p:nvPr/>
         </p:nvSpPr>
         <p:spPr>
           <a:xfrm>
-            <a:off x="365760" y="6574536"/>
-            <a:ext cx="9144000" cy="274320"/>
+            <a:off x="365760" y="6601968"/>
+            <a:ext cx="10058400" cy="228600"/>
           </a:xfrm>
           <a:prstGeom prst="rect">
             <a:avLst/>
@@ -7677,16 +7382,12 @@
           <a:noFill/>
         </p:spPr>
         <p:txBody>
-          <a:bodyPr wrap="square" anchor="ctr">
+          <a:bodyPr wrap="square">
             <a:spAutoFit/>
           </a:bodyPr>
           <a:lstStyle/>
           <a:p>
-            <a:pPr algn="l">
-              <a:spcAft>
-                <a:spcPts val="0"/>
-              </a:spcAft>
-            </a:pPr>
+            <a:pPr algn="l"/>
             <a:r>
               <a:rPr sz="900" b="0" i="0">
                 <a:solidFill>
@@ -7694,21 +7395,21 @@
                 </a:solidFill>
                 <a:latin typeface="Calibri"/>
               </a:rPr>
-              <a:t>FairBanks FCHIP  |  The Gadfly Project Custom Web Applicatio  |  Your health, our mission.</a:t>
-            </a:r>
-          </a:p>
-        </p:txBody>
-      </p:sp>
-      <p:sp>
-        <p:nvSpPr>
-          <p:cNvPr id="27" name="TextBox 26"/>
+              <a:t>FairBanks FCHIP  |  Gadfly Grant 2026  |  Your health, our mission.</a:t>
+            </a:r>
+          </a:p>
+        </p:txBody>
+      </p:sp>
+      <p:sp>
+        <p:nvSpPr>
+          <p:cNvPr id="15" name="TextBox 14"/>
           <p:cNvSpPr txBox="1"/>
           <p:nvPr/>
         </p:nvSpPr>
         <p:spPr>
           <a:xfrm>
-            <a:off x="11094415" y="6574536"/>
-            <a:ext cx="731520" cy="274320"/>
+            <a:off x="11368735" y="6601968"/>
+            <a:ext cx="548640" cy="228600"/>
           </a:xfrm>
           <a:prstGeom prst="rect">
             <a:avLst/>
@@ -7716,16 +7417,12 @@
           <a:noFill/>
         </p:spPr>
         <p:txBody>
-          <a:bodyPr wrap="square" anchor="ctr">
+          <a:bodyPr wrap="square">
             <a:spAutoFit/>
           </a:bodyPr>
           <a:lstStyle/>
           <a:p>
-            <a:pPr algn="r">
-              <a:spcAft>
-                <a:spcPts val="0"/>
-              </a:spcAft>
-            </a:pPr>
+            <a:pPr algn="r"/>
             <a:r>
               <a:rPr sz="900" b="0" i="0">
                 <a:solidFill>
@@ -7734,455 +7431,6 @@
                 <a:latin typeface="Calibri"/>
               </a:rPr>
               <a:t>8</a:t>
-            </a:r>
-          </a:p>
-        </p:txBody>
-      </p:sp>
-    </p:spTree>
-  </p:cSld>
-  <p:clrMapOvr>
-    <a:masterClrMapping/>
-  </p:clrMapOvr>
-</p:sld>
-</file>
-
-<file path=ppt/slides/slide9.xml><?xml version="1.0" encoding="utf-8"?>
-<p:sld xmlns:a="http://schemas.openxmlformats.org/drawingml/2006/main" xmlns:p="http://schemas.openxmlformats.org/presentationml/2006/main" xmlns:r="http://schemas.openxmlformats.org/officeDocument/2006/relationships">
-  <p:cSld>
-    <p:spTree>
-      <p:nvGrpSpPr>
-        <p:cNvPr id="1" name=""/>
-        <p:cNvGrpSpPr/>
-        <p:nvPr/>
-      </p:nvGrpSpPr>
-      <p:grpSpPr/>
-      <p:sp>
-        <p:nvSpPr>
-          <p:cNvPr id="2" name="Rectangle 1"/>
-          <p:cNvSpPr/>
-          <p:nvPr/>
-        </p:nvSpPr>
-        <p:spPr>
-          <a:xfrm>
-            <a:off x="0" y="0"/>
-            <a:ext cx="12191695" cy="960120"/>
-          </a:xfrm>
-          <a:prstGeom prst="rect">
-            <a:avLst/>
-          </a:prstGeom>
-          <a:solidFill>
-            <a:srgbClr val="F7F5F0"/>
-          </a:solidFill>
-          <a:ln>
-            <a:noFill/>
-          </a:ln>
-          <a:effectLst/>
-        </p:spPr>
-        <p:style>
-          <a:lnRef idx="1">
-            <a:schemeClr val="accent1"/>
-          </a:lnRef>
-          <a:fillRef idx="3">
-            <a:schemeClr val="accent1"/>
-          </a:fillRef>
-          <a:effectRef idx="2">
-            <a:schemeClr val="accent1"/>
-          </a:effectRef>
-          <a:fontRef idx="minor">
-            <a:schemeClr val="lt1"/>
-          </a:fontRef>
-        </p:style>
-        <p:txBody>
-          <a:bodyPr rtlCol="0" anchor="ctr"/>
-          <a:lstStyle/>
-          <a:p>
-            <a:pPr algn="ctr"/>
-          </a:p>
-        </p:txBody>
-      </p:sp>
-      <p:sp>
-        <p:nvSpPr>
-          <p:cNvPr id="3" name="Rectangle 2"/>
-          <p:cNvSpPr/>
-          <p:nvPr/>
-        </p:nvSpPr>
-        <p:spPr>
-          <a:xfrm>
-            <a:off x="0" y="0"/>
-            <a:ext cx="164592" cy="960120"/>
-          </a:xfrm>
-          <a:prstGeom prst="rect">
-            <a:avLst/>
-          </a:prstGeom>
-          <a:solidFill>
-            <a:srgbClr val="0D6E6E"/>
-          </a:solidFill>
-          <a:ln>
-            <a:noFill/>
-          </a:ln>
-          <a:effectLst/>
-        </p:spPr>
-        <p:style>
-          <a:lnRef idx="1">
-            <a:schemeClr val="accent1"/>
-          </a:lnRef>
-          <a:fillRef idx="3">
-            <a:schemeClr val="accent1"/>
-          </a:fillRef>
-          <a:effectRef idx="2">
-            <a:schemeClr val="accent1"/>
-          </a:effectRef>
-          <a:fontRef idx="minor">
-            <a:schemeClr val="lt1"/>
-          </a:fontRef>
-        </p:style>
-        <p:txBody>
-          <a:bodyPr rtlCol="0" anchor="ctr"/>
-          <a:lstStyle/>
-          <a:p>
-            <a:pPr algn="ctr"/>
-          </a:p>
-        </p:txBody>
-      </p:sp>
-      <p:sp>
-        <p:nvSpPr>
-          <p:cNvPr id="4" name="TextBox 3"/>
-          <p:cNvSpPr txBox="1"/>
-          <p:nvPr/>
-        </p:nvSpPr>
-        <p:spPr>
-          <a:xfrm>
-            <a:off x="457200" y="109728"/>
-            <a:ext cx="10972800" cy="256032"/>
-          </a:xfrm>
-          <a:prstGeom prst="rect">
-            <a:avLst/>
-          </a:prstGeom>
-          <a:noFill/>
-        </p:spPr>
-        <p:txBody>
-          <a:bodyPr wrap="square" anchor="t">
-            <a:spAutoFit/>
-          </a:bodyPr>
-          <a:lstStyle/>
-          <a:p>
-            <a:pPr algn="l">
-              <a:spcAft>
-                <a:spcPts val="0"/>
-              </a:spcAft>
-            </a:pPr>
-            <a:r>
-              <a:rPr sz="1100" b="1" i="0">
-                <a:solidFill>
-                  <a:srgbClr val="C45C26"/>
-                </a:solidFill>
-                <a:latin typeface="Calibri"/>
-              </a:rPr>
-              <a:t>OUR MODEL</a:t>
-            </a:r>
-          </a:p>
-        </p:txBody>
-      </p:sp>
-      <p:sp>
-        <p:nvSpPr>
-          <p:cNvPr id="5" name="TextBox 4"/>
-          <p:cNvSpPr txBox="1"/>
-          <p:nvPr/>
-        </p:nvSpPr>
-        <p:spPr>
-          <a:xfrm>
-            <a:off x="457200" y="384048"/>
-            <a:ext cx="11247120" cy="475488"/>
-          </a:xfrm>
-          <a:prstGeom prst="rect">
-            <a:avLst/>
-          </a:prstGeom>
-          <a:noFill/>
-        </p:spPr>
-        <p:txBody>
-          <a:bodyPr wrap="square" anchor="t">
-            <a:spAutoFit/>
-          </a:bodyPr>
-          <a:lstStyle/>
-          <a:p>
-            <a:pPr algn="l">
-              <a:spcAft>
-                <a:spcPts val="0"/>
-              </a:spcAft>
-            </a:pPr>
-            <a:r>
-              <a:rPr sz="2200" b="1" i="0">
-                <a:solidFill>
-                  <a:srgbClr val="0A1F2E"/>
-                </a:solidFill>
-                <a:latin typeface="Calibri"/>
-              </a:rPr>
-              <a:t>Communities first — intelligence that serves care</a:t>
-            </a:r>
-          </a:p>
-        </p:txBody>
-      </p:sp>
-      <p:sp>
-        <p:nvSpPr>
-          <p:cNvPr id="6" name="TextBox 5"/>
-          <p:cNvSpPr txBox="1"/>
-          <p:nvPr/>
-        </p:nvSpPr>
-        <p:spPr>
-          <a:xfrm>
-            <a:off x="502920" y="1234440"/>
-            <a:ext cx="5760720" cy="5074920"/>
-          </a:xfrm>
-          <a:prstGeom prst="rect">
-            <a:avLst/>
-          </a:prstGeom>
-          <a:noFill/>
-        </p:spPr>
-        <p:txBody>
-          <a:bodyPr wrap="square">
-            <a:spAutoFit/>
-          </a:bodyPr>
-          <a:lstStyle/>
-          <a:p>
-            <a:pPr>
-              <a:spcAft>
-                <a:spcPts val="800"/>
-              </a:spcAft>
-            </a:pPr>
-            <a:r>
-              <a:rPr sz="1400">
-                <a:solidFill>
-                  <a:srgbClr val="1E2F38"/>
-                </a:solidFill>
-                <a:latin typeface="Calibri"/>
-              </a:rPr>
-              <a:t>•  Community members identify needs and own solutions</a:t>
-            </a:r>
-          </a:p>
-          <a:p>
-            <a:pPr>
-              <a:spcAft>
-                <a:spcPts val="800"/>
-              </a:spcAft>
-            </a:pPr>
-            <a:r>
-              <a:rPr sz="1400">
-                <a:solidFill>
-                  <a:srgbClr val="1E2F38"/>
-                </a:solidFill>
-                <a:latin typeface="Calibri"/>
-              </a:rPr>
-              <a:t>•  CHWs / VHTs bridge homes to clinics</a:t>
-            </a:r>
-          </a:p>
-          <a:p>
-            <a:pPr>
-              <a:spcAft>
-                <a:spcPts val="800"/>
-              </a:spcAft>
-            </a:pPr>
-            <a:r>
-              <a:rPr sz="1400">
-                <a:solidFill>
-                  <a:srgbClr val="1E2F38"/>
-                </a:solidFill>
-                <a:latin typeface="Calibri"/>
-              </a:rPr>
-              <a:t>•  FairBanks Community Reach programmes deliver outreach</a:t>
-            </a:r>
-          </a:p>
-          <a:p>
-            <a:pPr>
-              <a:spcAft>
-                <a:spcPts val="800"/>
-              </a:spcAft>
-            </a:pPr>
-            <a:r>
-              <a:rPr sz="1400">
-                <a:solidFill>
-                  <a:srgbClr val="1E2F38"/>
-                </a:solidFill>
-                <a:latin typeface="Calibri"/>
-              </a:rPr>
-              <a:t>•  FairBanks Medical Centre provides clinical care</a:t>
-            </a:r>
-          </a:p>
-          <a:p>
-            <a:pPr>
-              <a:spcAft>
-                <a:spcPts val="800"/>
-              </a:spcAft>
-            </a:pPr>
-            <a:r>
-              <a:rPr sz="1400">
-                <a:solidFill>
-                  <a:srgbClr val="1E2F38"/>
-                </a:solidFill>
-                <a:latin typeface="Calibri"/>
-              </a:rPr>
-              <a:t>•  Research, partnerships, and skills strengthen the system</a:t>
-            </a:r>
-          </a:p>
-          <a:p>
-            <a:pPr>
-              <a:spcAft>
-                <a:spcPts val="800"/>
-              </a:spcAft>
-            </a:pPr>
-            <a:r>
-              <a:rPr sz="1400">
-                <a:solidFill>
-                  <a:srgbClr val="1E2F38"/>
-                </a:solidFill>
-                <a:latin typeface="Calibri"/>
-              </a:rPr>
-              <a:t>•  Livelihoods and empowerment make health gains last</a:t>
-            </a:r>
-          </a:p>
-        </p:txBody>
-      </p:sp>
-      <p:pic>
-        <p:nvPicPr>
-          <p:cNvPr id="7" name="Picture 6" descr="gis_hotspots_opt.jpg"/>
-          <p:cNvPicPr>
-            <a:picLocks noChangeAspect="1"/>
-          </p:cNvPicPr>
-          <p:nvPr/>
-        </p:nvPicPr>
-        <p:blipFill>
-          <a:blip r:embed="rId2"/>
-          <a:stretch>
-            <a:fillRect/>
-          </a:stretch>
-        </p:blipFill>
-        <p:spPr>
-          <a:xfrm>
-            <a:off x="6492240" y="2035160"/>
-            <a:ext cx="5212080" cy="3473479"/>
-          </a:xfrm>
-          <a:prstGeom prst="rect">
-            <a:avLst/>
-          </a:prstGeom>
-        </p:spPr>
-      </p:pic>
-      <p:sp>
-        <p:nvSpPr>
-          <p:cNvPr id="8" name="Rectangle 7"/>
-          <p:cNvSpPr/>
-          <p:nvPr/>
-        </p:nvSpPr>
-        <p:spPr>
-          <a:xfrm>
-            <a:off x="0" y="6565392"/>
-            <a:ext cx="12191695" cy="292608"/>
-          </a:xfrm>
-          <a:prstGeom prst="rect">
-            <a:avLst/>
-          </a:prstGeom>
-          <a:solidFill>
-            <a:srgbClr val="0A1F2E"/>
-          </a:solidFill>
-          <a:ln>
-            <a:noFill/>
-          </a:ln>
-          <a:effectLst/>
-        </p:spPr>
-        <p:style>
-          <a:lnRef idx="1">
-            <a:schemeClr val="accent1"/>
-          </a:lnRef>
-          <a:fillRef idx="3">
-            <a:schemeClr val="accent1"/>
-          </a:fillRef>
-          <a:effectRef idx="2">
-            <a:schemeClr val="accent1"/>
-          </a:effectRef>
-          <a:fontRef idx="minor">
-            <a:schemeClr val="lt1"/>
-          </a:fontRef>
-        </p:style>
-        <p:txBody>
-          <a:bodyPr rtlCol="0" anchor="ctr"/>
-          <a:lstStyle/>
-          <a:p>
-            <a:pPr algn="ctr"/>
-          </a:p>
-        </p:txBody>
-      </p:sp>
-      <p:sp>
-        <p:nvSpPr>
-          <p:cNvPr id="9" name="TextBox 8"/>
-          <p:cNvSpPr txBox="1"/>
-          <p:nvPr/>
-        </p:nvSpPr>
-        <p:spPr>
-          <a:xfrm>
-            <a:off x="365760" y="6574536"/>
-            <a:ext cx="9144000" cy="274320"/>
-          </a:xfrm>
-          <a:prstGeom prst="rect">
-            <a:avLst/>
-          </a:prstGeom>
-          <a:noFill/>
-        </p:spPr>
-        <p:txBody>
-          <a:bodyPr wrap="square" anchor="ctr">
-            <a:spAutoFit/>
-          </a:bodyPr>
-          <a:lstStyle/>
-          <a:p>
-            <a:pPr algn="l">
-              <a:spcAft>
-                <a:spcPts val="0"/>
-              </a:spcAft>
-            </a:pPr>
-            <a:r>
-              <a:rPr sz="900" b="0" i="0">
-                <a:solidFill>
-                  <a:srgbClr val="FFFFFF"/>
-                </a:solidFill>
-                <a:latin typeface="Calibri"/>
-              </a:rPr>
-              <a:t>FairBanks FCHIP  |  The Gadfly Project Custom Web Applicatio  |  Your health, our mission.</a:t>
-            </a:r>
-          </a:p>
-        </p:txBody>
-      </p:sp>
-      <p:sp>
-        <p:nvSpPr>
-          <p:cNvPr id="10" name="TextBox 9"/>
-          <p:cNvSpPr txBox="1"/>
-          <p:nvPr/>
-        </p:nvSpPr>
-        <p:spPr>
-          <a:xfrm>
-            <a:off x="11094415" y="6574536"/>
-            <a:ext cx="731520" cy="274320"/>
-          </a:xfrm>
-          <a:prstGeom prst="rect">
-            <a:avLst/>
-          </a:prstGeom>
-          <a:noFill/>
-        </p:spPr>
-        <p:txBody>
-          <a:bodyPr wrap="square" anchor="ctr">
-            <a:spAutoFit/>
-          </a:bodyPr>
-          <a:lstStyle/>
-          <a:p>
-            <a:pPr algn="r">
-              <a:spcAft>
-                <a:spcPts val="0"/>
-              </a:spcAft>
-            </a:pPr>
-            <a:r>
-              <a:rPr sz="900" b="0" i="0">
-                <a:solidFill>
-                  <a:srgbClr val="FFFFFF"/>
-                </a:solidFill>
-                <a:latin typeface="Calibri"/>
-              </a:rPr>
-              <a:t>9</a:t>
             </a:r>
           </a:p>
         </p:txBody>

--- a/applications/gadfly/documents/gadfly_ppt.pptx
+++ b/applications/gadfly/documents/gadfly_ppt.pptx
@@ -3184,7 +3184,17 @@
           </a:bodyPr>
           <a:lstStyle/>
           <a:p>
-            <a:pPr algn="l"/>
+            <a:pPr algn="l">
+              <a:lnSpc>
+                <a:spcPct val="115000"/>
+              </a:lnSpc>
+              <a:spcBef>
+                <a:spcPts val="0"/>
+              </a:spcBef>
+              <a:spcAft>
+                <a:spcPts val="200"/>
+              </a:spcAft>
+            </a:pPr>
             <a:r>
               <a:rPr sz="1300" b="1" i="0">
                 <a:solidFill>
@@ -3219,7 +3229,17 @@
           </a:bodyPr>
           <a:lstStyle/>
           <a:p>
-            <a:pPr algn="l"/>
+            <a:pPr algn="l">
+              <a:lnSpc>
+                <a:spcPct val="115000"/>
+              </a:lnSpc>
+              <a:spcBef>
+                <a:spcPts val="0"/>
+              </a:spcBef>
+              <a:spcAft>
+                <a:spcPts val="200"/>
+              </a:spcAft>
+            </a:pPr>
             <a:r>
               <a:rPr sz="2600" b="1" i="0">
                 <a:solidFill>
@@ -3254,7 +3274,17 @@
           </a:bodyPr>
           <a:lstStyle/>
           <a:p>
-            <a:pPr algn="l"/>
+            <a:pPr algn="l">
+              <a:lnSpc>
+                <a:spcPct val="115000"/>
+              </a:lnSpc>
+              <a:spcBef>
+                <a:spcPts val="0"/>
+              </a:spcBef>
+              <a:spcAft>
+                <a:spcPts val="200"/>
+              </a:spcAft>
+            </a:pPr>
             <a:r>
               <a:rPr sz="1400" b="0" i="1">
                 <a:solidFill>
@@ -3289,7 +3319,17 @@
           </a:bodyPr>
           <a:lstStyle/>
           <a:p>
-            <a:pPr algn="l"/>
+            <a:pPr algn="l">
+              <a:lnSpc>
+                <a:spcPct val="115000"/>
+              </a:lnSpc>
+              <a:spcBef>
+                <a:spcPts val="0"/>
+              </a:spcBef>
+              <a:spcAft>
+                <a:spcPts val="200"/>
+              </a:spcAft>
+            </a:pPr>
             <a:r>
               <a:rPr sz="1300" b="1" i="0">
                 <a:solidFill>
@@ -3428,7 +3468,17 @@
           </a:bodyPr>
           <a:lstStyle/>
           <a:p>
-            <a:pPr algn="l"/>
+            <a:pPr algn="l">
+              <a:lnSpc>
+                <a:spcPct val="115000"/>
+              </a:lnSpc>
+              <a:spcBef>
+                <a:spcPts val="0"/>
+              </a:spcBef>
+              <a:spcAft>
+                <a:spcPts val="200"/>
+              </a:spcAft>
+            </a:pPr>
             <a:r>
               <a:rPr sz="1100" b="1" i="0">
                 <a:solidFill>
@@ -3463,7 +3513,17 @@
           </a:bodyPr>
           <a:lstStyle/>
           <a:p>
-            <a:pPr algn="l"/>
+            <a:pPr algn="l">
+              <a:lnSpc>
+                <a:spcPct val="115000"/>
+              </a:lnSpc>
+              <a:spcBef>
+                <a:spcPts val="0"/>
+              </a:spcBef>
+              <a:spcAft>
+                <a:spcPts val="200"/>
+              </a:spcAft>
+            </a:pPr>
             <a:r>
               <a:rPr sz="2400" b="1" i="0">
                 <a:solidFill>
@@ -3498,9 +3558,19 @@
           </a:bodyPr>
           <a:lstStyle/>
           <a:p>
-            <a:pPr algn="l"/>
-            <a:r>
-              <a:rPr sz="2000" b="0" i="0">
+            <a:pPr algn="l">
+              <a:lnSpc>
+                <a:spcPct val="128000"/>
+              </a:lnSpc>
+              <a:spcBef>
+                <a:spcPts val="0"/>
+              </a:spcBef>
+              <a:spcAft>
+                <a:spcPts val="1400"/>
+              </a:spcAft>
+            </a:pPr>
+            <a:r>
+              <a:rPr sz="2600" b="0" i="0">
                 <a:solidFill>
                   <a:srgbClr val="1E2F38"/>
                 </a:solidFill>
@@ -3510,9 +3580,19 @@
             </a:r>
           </a:p>
           <a:p>
-            <a:pPr algn="l"/>
-            <a:r>
-              <a:rPr sz="2000" b="0" i="0">
+            <a:pPr algn="l">
+              <a:lnSpc>
+                <a:spcPct val="128000"/>
+              </a:lnSpc>
+              <a:spcBef>
+                <a:spcPts val="0"/>
+              </a:spcBef>
+              <a:spcAft>
+                <a:spcPts val="1400"/>
+              </a:spcAft>
+            </a:pPr>
+            <a:r>
+              <a:rPr sz="2600" b="0" i="0">
                 <a:solidFill>
                   <a:srgbClr val="1E2F38"/>
                 </a:solidFill>
@@ -3522,9 +3602,19 @@
             </a:r>
           </a:p>
           <a:p>
-            <a:pPr algn="l"/>
-            <a:r>
-              <a:rPr sz="2000" b="0" i="0">
+            <a:pPr algn="l">
+              <a:lnSpc>
+                <a:spcPct val="128000"/>
+              </a:lnSpc>
+              <a:spcBef>
+                <a:spcPts val="0"/>
+              </a:spcBef>
+              <a:spcAft>
+                <a:spcPts val="200"/>
+              </a:spcAft>
+            </a:pPr>
+            <a:r>
+              <a:rPr sz="2600" b="0" i="0">
                 <a:solidFill>
                   <a:srgbClr val="1E2F38"/>
                 </a:solidFill>
@@ -3624,7 +3714,17 @@
           </a:bodyPr>
           <a:lstStyle/>
           <a:p>
-            <a:pPr algn="l"/>
+            <a:pPr algn="l">
+              <a:lnSpc>
+                <a:spcPct val="115000"/>
+              </a:lnSpc>
+              <a:spcBef>
+                <a:spcPts val="0"/>
+              </a:spcBef>
+              <a:spcAft>
+                <a:spcPts val="200"/>
+              </a:spcAft>
+            </a:pPr>
             <a:r>
               <a:rPr sz="900" b="0" i="0">
                 <a:solidFill>
@@ -3659,7 +3759,17 @@
           </a:bodyPr>
           <a:lstStyle/>
           <a:p>
-            <a:pPr algn="r"/>
+            <a:pPr algn="r">
+              <a:lnSpc>
+                <a:spcPct val="115000"/>
+              </a:lnSpc>
+              <a:spcBef>
+                <a:spcPts val="0"/>
+              </a:spcBef>
+              <a:spcAft>
+                <a:spcPts val="200"/>
+              </a:spcAft>
+            </a:pPr>
             <a:r>
               <a:rPr sz="900" b="0" i="0">
                 <a:solidFill>
@@ -3798,7 +3908,17 @@
           </a:bodyPr>
           <a:lstStyle/>
           <a:p>
-            <a:pPr algn="l"/>
+            <a:pPr algn="l">
+              <a:lnSpc>
+                <a:spcPct val="115000"/>
+              </a:lnSpc>
+              <a:spcBef>
+                <a:spcPts val="0"/>
+              </a:spcBef>
+              <a:spcAft>
+                <a:spcPts val="200"/>
+              </a:spcAft>
+            </a:pPr>
             <a:r>
               <a:rPr sz="1100" b="1" i="0">
                 <a:solidFill>
@@ -3833,7 +3953,17 @@
           </a:bodyPr>
           <a:lstStyle/>
           <a:p>
-            <a:pPr algn="l"/>
+            <a:pPr algn="l">
+              <a:lnSpc>
+                <a:spcPct val="115000"/>
+              </a:lnSpc>
+              <a:spcBef>
+                <a:spcPts val="0"/>
+              </a:spcBef>
+              <a:spcAft>
+                <a:spcPts val="200"/>
+              </a:spcAft>
+            </a:pPr>
             <a:r>
               <a:rPr sz="2400" b="1" i="0">
                 <a:solidFill>
@@ -3956,7 +4086,17 @@
           </a:bodyPr>
           <a:lstStyle/>
           <a:p>
-            <a:pPr algn="l"/>
+            <a:pPr algn="l">
+              <a:lnSpc>
+                <a:spcPct val="115000"/>
+              </a:lnSpc>
+              <a:spcBef>
+                <a:spcPts val="0"/>
+              </a:spcBef>
+              <a:spcAft>
+                <a:spcPts val="200"/>
+              </a:spcAft>
+            </a:pPr>
             <a:r>
               <a:rPr sz="1800" b="1" i="0">
                 <a:solidFill>
@@ -3991,9 +4131,19 @@
           </a:bodyPr>
           <a:lstStyle/>
           <a:p>
-            <a:pPr algn="l"/>
-            <a:r>
-              <a:rPr sz="1400" b="0" i="0">
+            <a:pPr algn="l">
+              <a:lnSpc>
+                <a:spcPct val="128000"/>
+              </a:lnSpc>
+              <a:spcBef>
+                <a:spcPts val="0"/>
+              </a:spcBef>
+              <a:spcAft>
+                <a:spcPts val="200"/>
+              </a:spcAft>
+            </a:pPr>
+            <a:r>
+              <a:rPr sz="1900" b="0" i="0">
                 <a:solidFill>
                   <a:srgbClr val="3A4A54"/>
                 </a:solidFill>
@@ -4114,7 +4264,17 @@
           </a:bodyPr>
           <a:lstStyle/>
           <a:p>
-            <a:pPr algn="l"/>
+            <a:pPr algn="l">
+              <a:lnSpc>
+                <a:spcPct val="115000"/>
+              </a:lnSpc>
+              <a:spcBef>
+                <a:spcPts val="0"/>
+              </a:spcBef>
+              <a:spcAft>
+                <a:spcPts val="200"/>
+              </a:spcAft>
+            </a:pPr>
             <a:r>
               <a:rPr sz="1800" b="1" i="0">
                 <a:solidFill>
@@ -4149,9 +4309,19 @@
           </a:bodyPr>
           <a:lstStyle/>
           <a:p>
-            <a:pPr algn="l"/>
-            <a:r>
-              <a:rPr sz="1400" b="0" i="0">
+            <a:pPr algn="l">
+              <a:lnSpc>
+                <a:spcPct val="128000"/>
+              </a:lnSpc>
+              <a:spcBef>
+                <a:spcPts val="0"/>
+              </a:spcBef>
+              <a:spcAft>
+                <a:spcPts val="200"/>
+              </a:spcAft>
+            </a:pPr>
+            <a:r>
+              <a:rPr sz="2600" b="0" i="0">
                 <a:solidFill>
                   <a:srgbClr val="3A4A54"/>
                 </a:solidFill>
@@ -4272,7 +4442,17 @@
           </a:bodyPr>
           <a:lstStyle/>
           <a:p>
-            <a:pPr algn="l"/>
+            <a:pPr algn="l">
+              <a:lnSpc>
+                <a:spcPct val="115000"/>
+              </a:lnSpc>
+              <a:spcBef>
+                <a:spcPts val="0"/>
+              </a:spcBef>
+              <a:spcAft>
+                <a:spcPts val="200"/>
+              </a:spcAft>
+            </a:pPr>
             <a:r>
               <a:rPr sz="1800" b="1" i="0">
                 <a:solidFill>
@@ -4307,9 +4487,19 @@
           </a:bodyPr>
           <a:lstStyle/>
           <a:p>
-            <a:pPr algn="l"/>
-            <a:r>
-              <a:rPr sz="1400" b="0" i="0">
+            <a:pPr algn="l">
+              <a:lnSpc>
+                <a:spcPct val="128000"/>
+              </a:lnSpc>
+              <a:spcBef>
+                <a:spcPts val="0"/>
+              </a:spcBef>
+              <a:spcAft>
+                <a:spcPts val="200"/>
+              </a:spcAft>
+            </a:pPr>
+            <a:r>
+              <a:rPr sz="2600" b="0" i="0">
                 <a:solidFill>
                   <a:srgbClr val="3A4A54"/>
                 </a:solidFill>
@@ -4385,7 +4575,17 @@
           </a:bodyPr>
           <a:lstStyle/>
           <a:p>
-            <a:pPr algn="l"/>
+            <a:pPr algn="l">
+              <a:lnSpc>
+                <a:spcPct val="115000"/>
+              </a:lnSpc>
+              <a:spcBef>
+                <a:spcPts val="0"/>
+              </a:spcBef>
+              <a:spcAft>
+                <a:spcPts val="200"/>
+              </a:spcAft>
+            </a:pPr>
             <a:r>
               <a:rPr sz="900" b="0" i="0">
                 <a:solidFill>
@@ -4420,7 +4620,17 @@
           </a:bodyPr>
           <a:lstStyle/>
           <a:p>
-            <a:pPr algn="r"/>
+            <a:pPr algn="r">
+              <a:lnSpc>
+                <a:spcPct val="115000"/>
+              </a:lnSpc>
+              <a:spcBef>
+                <a:spcPts val="0"/>
+              </a:spcBef>
+              <a:spcAft>
+                <a:spcPts val="200"/>
+              </a:spcAft>
+            </a:pPr>
             <a:r>
               <a:rPr sz="900" b="0" i="0">
                 <a:solidFill>
@@ -4559,7 +4769,17 @@
           </a:bodyPr>
           <a:lstStyle/>
           <a:p>
-            <a:pPr algn="l"/>
+            <a:pPr algn="l">
+              <a:lnSpc>
+                <a:spcPct val="115000"/>
+              </a:lnSpc>
+              <a:spcBef>
+                <a:spcPts val="0"/>
+              </a:spcBef>
+              <a:spcAft>
+                <a:spcPts val="200"/>
+              </a:spcAft>
+            </a:pPr>
             <a:r>
               <a:rPr sz="1100" b="1" i="0">
                 <a:solidFill>
@@ -4594,7 +4814,17 @@
           </a:bodyPr>
           <a:lstStyle/>
           <a:p>
-            <a:pPr algn="l"/>
+            <a:pPr algn="l">
+              <a:lnSpc>
+                <a:spcPct val="115000"/>
+              </a:lnSpc>
+              <a:spcBef>
+                <a:spcPts val="0"/>
+              </a:spcBef>
+              <a:spcAft>
+                <a:spcPts val="200"/>
+              </a:spcAft>
+            </a:pPr>
             <a:r>
               <a:rPr sz="2400" b="1" i="0">
                 <a:solidFill>
@@ -4653,9 +4883,19 @@
           </a:bodyPr>
           <a:lstStyle/>
           <a:p>
-            <a:pPr algn="l"/>
-            <a:r>
-              <a:rPr sz="1500" b="0" i="0">
+            <a:pPr algn="l">
+              <a:lnSpc>
+                <a:spcPct val="115000"/>
+              </a:lnSpc>
+              <a:spcBef>
+                <a:spcPts val="0"/>
+              </a:spcBef>
+              <a:spcAft>
+                <a:spcPts val="200"/>
+              </a:spcAft>
+            </a:pPr>
+            <a:r>
+              <a:rPr sz="1900" b="0" i="0">
                 <a:solidFill>
                   <a:srgbClr val="1E2F38"/>
                 </a:solidFill>
@@ -4688,9 +4928,19 @@
           </a:bodyPr>
           <a:lstStyle/>
           <a:p>
-            <a:pPr algn="l"/>
-            <a:r>
-              <a:rPr sz="1500" b="0" i="0">
+            <a:pPr algn="l">
+              <a:lnSpc>
+                <a:spcPct val="115000"/>
+              </a:lnSpc>
+              <a:spcBef>
+                <a:spcPts val="0"/>
+              </a:spcBef>
+              <a:spcAft>
+                <a:spcPts val="200"/>
+              </a:spcAft>
+            </a:pPr>
+            <a:r>
+              <a:rPr sz="1900" b="0" i="0">
                 <a:solidFill>
                   <a:srgbClr val="1E2F38"/>
                 </a:solidFill>
@@ -4723,9 +4973,19 @@
           </a:bodyPr>
           <a:lstStyle/>
           <a:p>
-            <a:pPr algn="l"/>
-            <a:r>
-              <a:rPr sz="1500" b="0" i="0">
+            <a:pPr algn="l">
+              <a:lnSpc>
+                <a:spcPct val="115000"/>
+              </a:lnSpc>
+              <a:spcBef>
+                <a:spcPts val="0"/>
+              </a:spcBef>
+              <a:spcAft>
+                <a:spcPts val="200"/>
+              </a:spcAft>
+            </a:pPr>
+            <a:r>
+              <a:rPr sz="1900" b="0" i="0">
                 <a:solidFill>
                   <a:srgbClr val="1E2F38"/>
                 </a:solidFill>
@@ -4758,9 +5018,19 @@
           </a:bodyPr>
           <a:lstStyle/>
           <a:p>
-            <a:pPr algn="l"/>
-            <a:r>
-              <a:rPr sz="1500" b="0" i="0">
+            <a:pPr algn="l">
+              <a:lnSpc>
+                <a:spcPct val="115000"/>
+              </a:lnSpc>
+              <a:spcBef>
+                <a:spcPts val="0"/>
+              </a:spcBef>
+              <a:spcAft>
+                <a:spcPts val="200"/>
+              </a:spcAft>
+            </a:pPr>
+            <a:r>
+              <a:rPr sz="1900" b="0" i="0">
                 <a:solidFill>
                   <a:srgbClr val="1E2F38"/>
                 </a:solidFill>
@@ -4836,7 +5106,17 @@
           </a:bodyPr>
           <a:lstStyle/>
           <a:p>
-            <a:pPr algn="l"/>
+            <a:pPr algn="l">
+              <a:lnSpc>
+                <a:spcPct val="115000"/>
+              </a:lnSpc>
+              <a:spcBef>
+                <a:spcPts val="0"/>
+              </a:spcBef>
+              <a:spcAft>
+                <a:spcPts val="200"/>
+              </a:spcAft>
+            </a:pPr>
             <a:r>
               <a:rPr sz="900" b="0" i="0">
                 <a:solidFill>
@@ -4871,7 +5151,17 @@
           </a:bodyPr>
           <a:lstStyle/>
           <a:p>
-            <a:pPr algn="r"/>
+            <a:pPr algn="r">
+              <a:lnSpc>
+                <a:spcPct val="115000"/>
+              </a:lnSpc>
+              <a:spcBef>
+                <a:spcPts val="0"/>
+              </a:spcBef>
+              <a:spcAft>
+                <a:spcPts val="200"/>
+              </a:spcAft>
+            </a:pPr>
             <a:r>
               <a:rPr sz="900" b="0" i="0">
                 <a:solidFill>
@@ -5010,7 +5300,17 @@
           </a:bodyPr>
           <a:lstStyle/>
           <a:p>
-            <a:pPr algn="l"/>
+            <a:pPr algn="l">
+              <a:lnSpc>
+                <a:spcPct val="115000"/>
+              </a:lnSpc>
+              <a:spcBef>
+                <a:spcPts val="0"/>
+              </a:spcBef>
+              <a:spcAft>
+                <a:spcPts val="200"/>
+              </a:spcAft>
+            </a:pPr>
             <a:r>
               <a:rPr sz="1100" b="1" i="0">
                 <a:solidFill>
@@ -5045,7 +5345,17 @@
           </a:bodyPr>
           <a:lstStyle/>
           <a:p>
-            <a:pPr algn="l"/>
+            <a:pPr algn="l">
+              <a:lnSpc>
+                <a:spcPct val="115000"/>
+              </a:lnSpc>
+              <a:spcBef>
+                <a:spcPts val="0"/>
+              </a:spcBef>
+              <a:spcAft>
+                <a:spcPts val="200"/>
+              </a:spcAft>
+            </a:pPr>
             <a:r>
               <a:rPr sz="2400" b="1" i="0">
                 <a:solidFill>
@@ -5104,7 +5414,17 @@
           </a:bodyPr>
           <a:lstStyle/>
           <a:p>
-            <a:pPr algn="l"/>
+            <a:pPr algn="l">
+              <a:lnSpc>
+                <a:spcPct val="115000"/>
+              </a:lnSpc>
+              <a:spcBef>
+                <a:spcPts val="0"/>
+              </a:spcBef>
+              <a:spcAft>
+                <a:spcPts val="200"/>
+              </a:spcAft>
+            </a:pPr>
             <a:r>
               <a:rPr sz="1400" b="1" i="0">
                 <a:solidFill>
@@ -5139,7 +5459,17 @@
           </a:bodyPr>
           <a:lstStyle/>
           <a:p>
-            <a:pPr algn="l"/>
+            <a:pPr algn="l">
+              <a:lnSpc>
+                <a:spcPct val="115000"/>
+              </a:lnSpc>
+              <a:spcBef>
+                <a:spcPts val="0"/>
+              </a:spcBef>
+              <a:spcAft>
+                <a:spcPts val="200"/>
+              </a:spcAft>
+            </a:pPr>
             <a:r>
               <a:rPr sz="1200" b="0" i="0">
                 <a:solidFill>
@@ -5174,7 +5504,17 @@
           </a:bodyPr>
           <a:lstStyle/>
           <a:p>
-            <a:pPr algn="l"/>
+            <a:pPr algn="l">
+              <a:lnSpc>
+                <a:spcPct val="115000"/>
+              </a:lnSpc>
+              <a:spcBef>
+                <a:spcPts val="0"/>
+              </a:spcBef>
+              <a:spcAft>
+                <a:spcPts val="200"/>
+              </a:spcAft>
+            </a:pPr>
             <a:r>
               <a:rPr sz="1400" b="1" i="0">
                 <a:solidFill>
@@ -5209,7 +5549,17 @@
           </a:bodyPr>
           <a:lstStyle/>
           <a:p>
-            <a:pPr algn="l"/>
+            <a:pPr algn="l">
+              <a:lnSpc>
+                <a:spcPct val="115000"/>
+              </a:lnSpc>
+              <a:spcBef>
+                <a:spcPts val="0"/>
+              </a:spcBef>
+              <a:spcAft>
+                <a:spcPts val="200"/>
+              </a:spcAft>
+            </a:pPr>
             <a:r>
               <a:rPr sz="1200" b="0" i="0">
                 <a:solidFill>
@@ -5244,7 +5594,17 @@
           </a:bodyPr>
           <a:lstStyle/>
           <a:p>
-            <a:pPr algn="l"/>
+            <a:pPr algn="l">
+              <a:lnSpc>
+                <a:spcPct val="115000"/>
+              </a:lnSpc>
+              <a:spcBef>
+                <a:spcPts val="0"/>
+              </a:spcBef>
+              <a:spcAft>
+                <a:spcPts val="200"/>
+              </a:spcAft>
+            </a:pPr>
             <a:r>
               <a:rPr sz="1400" b="1" i="0">
                 <a:solidFill>
@@ -5279,7 +5639,17 @@
           </a:bodyPr>
           <a:lstStyle/>
           <a:p>
-            <a:pPr algn="l"/>
+            <a:pPr algn="l">
+              <a:lnSpc>
+                <a:spcPct val="115000"/>
+              </a:lnSpc>
+              <a:spcBef>
+                <a:spcPts val="0"/>
+              </a:spcBef>
+              <a:spcAft>
+                <a:spcPts val="200"/>
+              </a:spcAft>
+            </a:pPr>
             <a:r>
               <a:rPr sz="1200" b="0" i="0">
                 <a:solidFill>
@@ -5314,7 +5684,17 @@
           </a:bodyPr>
           <a:lstStyle/>
           <a:p>
-            <a:pPr algn="l"/>
+            <a:pPr algn="l">
+              <a:lnSpc>
+                <a:spcPct val="115000"/>
+              </a:lnSpc>
+              <a:spcBef>
+                <a:spcPts val="0"/>
+              </a:spcBef>
+              <a:spcAft>
+                <a:spcPts val="200"/>
+              </a:spcAft>
+            </a:pPr>
             <a:r>
               <a:rPr sz="1400" b="1" i="0">
                 <a:solidFill>
@@ -5349,7 +5729,17 @@
           </a:bodyPr>
           <a:lstStyle/>
           <a:p>
-            <a:pPr algn="l"/>
+            <a:pPr algn="l">
+              <a:lnSpc>
+                <a:spcPct val="115000"/>
+              </a:lnSpc>
+              <a:spcBef>
+                <a:spcPts val="0"/>
+              </a:spcBef>
+              <a:spcAft>
+                <a:spcPts val="200"/>
+              </a:spcAft>
+            </a:pPr>
             <a:r>
               <a:rPr sz="1200" b="0" i="0">
                 <a:solidFill>
@@ -5384,7 +5774,17 @@
           </a:bodyPr>
           <a:lstStyle/>
           <a:p>
-            <a:pPr algn="l"/>
+            <a:pPr algn="l">
+              <a:lnSpc>
+                <a:spcPct val="115000"/>
+              </a:lnSpc>
+              <a:spcBef>
+                <a:spcPts val="0"/>
+              </a:spcBef>
+              <a:spcAft>
+                <a:spcPts val="200"/>
+              </a:spcAft>
+            </a:pPr>
             <a:r>
               <a:rPr sz="1400" b="1" i="0">
                 <a:solidFill>
@@ -5419,7 +5819,17 @@
           </a:bodyPr>
           <a:lstStyle/>
           <a:p>
-            <a:pPr algn="l"/>
+            <a:pPr algn="l">
+              <a:lnSpc>
+                <a:spcPct val="115000"/>
+              </a:lnSpc>
+              <a:spcBef>
+                <a:spcPts val="0"/>
+              </a:spcBef>
+              <a:spcAft>
+                <a:spcPts val="200"/>
+              </a:spcAft>
+            </a:pPr>
             <a:r>
               <a:rPr sz="1200" b="0" i="0">
                 <a:solidFill>
@@ -5497,7 +5907,17 @@
           </a:bodyPr>
           <a:lstStyle/>
           <a:p>
-            <a:pPr algn="l"/>
+            <a:pPr algn="l">
+              <a:lnSpc>
+                <a:spcPct val="115000"/>
+              </a:lnSpc>
+              <a:spcBef>
+                <a:spcPts val="0"/>
+              </a:spcBef>
+              <a:spcAft>
+                <a:spcPts val="200"/>
+              </a:spcAft>
+            </a:pPr>
             <a:r>
               <a:rPr sz="900" b="0" i="0">
                 <a:solidFill>
@@ -5532,7 +5952,17 @@
           </a:bodyPr>
           <a:lstStyle/>
           <a:p>
-            <a:pPr algn="r"/>
+            <a:pPr algn="r">
+              <a:lnSpc>
+                <a:spcPct val="115000"/>
+              </a:lnSpc>
+              <a:spcBef>
+                <a:spcPts val="0"/>
+              </a:spcBef>
+              <a:spcAft>
+                <a:spcPts val="200"/>
+              </a:spcAft>
+            </a:pPr>
             <a:r>
               <a:rPr sz="900" b="0" i="0">
                 <a:solidFill>
@@ -5671,7 +6101,17 @@
           </a:bodyPr>
           <a:lstStyle/>
           <a:p>
-            <a:pPr algn="l"/>
+            <a:pPr algn="l">
+              <a:lnSpc>
+                <a:spcPct val="115000"/>
+              </a:lnSpc>
+              <a:spcBef>
+                <a:spcPts val="0"/>
+              </a:spcBef>
+              <a:spcAft>
+                <a:spcPts val="200"/>
+              </a:spcAft>
+            </a:pPr>
             <a:r>
               <a:rPr sz="1100" b="1" i="0">
                 <a:solidFill>
@@ -5706,7 +6146,17 @@
           </a:bodyPr>
           <a:lstStyle/>
           <a:p>
-            <a:pPr algn="l"/>
+            <a:pPr algn="l">
+              <a:lnSpc>
+                <a:spcPct val="115000"/>
+              </a:lnSpc>
+              <a:spcBef>
+                <a:spcPts val="0"/>
+              </a:spcBef>
+              <a:spcAft>
+                <a:spcPts val="200"/>
+              </a:spcAft>
+            </a:pPr>
             <a:r>
               <a:rPr sz="2400" b="1" i="0">
                 <a:solidFill>
@@ -5786,7 +6236,17 @@
           </a:bodyPr>
           <a:lstStyle/>
           <a:p>
-            <a:pPr algn="l"/>
+            <a:pPr algn="l">
+              <a:lnSpc>
+                <a:spcPct val="115000"/>
+              </a:lnSpc>
+              <a:spcBef>
+                <a:spcPts val="0"/>
+              </a:spcBef>
+              <a:spcAft>
+                <a:spcPts val="200"/>
+              </a:spcAft>
+            </a:pPr>
             <a:r>
               <a:rPr sz="1600" b="1" i="0">
                 <a:solidFill>
@@ -5821,7 +6281,17 @@
           </a:bodyPr>
           <a:lstStyle/>
           <a:p>
-            <a:pPr algn="l"/>
+            <a:pPr algn="l">
+              <a:lnSpc>
+                <a:spcPct val="115000"/>
+              </a:lnSpc>
+              <a:spcBef>
+                <a:spcPts val="0"/>
+              </a:spcBef>
+              <a:spcAft>
+                <a:spcPts val="200"/>
+              </a:spcAft>
+            </a:pPr>
             <a:r>
               <a:rPr sz="1300" b="0" i="0">
                 <a:solidFill>
@@ -5856,9 +6326,19 @@
           </a:bodyPr>
           <a:lstStyle/>
           <a:p>
-            <a:pPr algn="l"/>
-            <a:r>
-              <a:rPr sz="1400" b="0" i="0">
+            <a:pPr algn="l">
+              <a:lnSpc>
+                <a:spcPct val="115000"/>
+              </a:lnSpc>
+              <a:spcBef>
+                <a:spcPts val="0"/>
+              </a:spcBef>
+              <a:spcAft>
+                <a:spcPts val="200"/>
+              </a:spcAft>
+            </a:pPr>
+            <a:r>
+              <a:rPr sz="1800" b="0" i="0">
                 <a:solidFill>
                   <a:srgbClr val="1E2F38"/>
                 </a:solidFill>
@@ -5936,7 +6416,17 @@
           </a:bodyPr>
           <a:lstStyle/>
           <a:p>
-            <a:pPr algn="l"/>
+            <a:pPr algn="l">
+              <a:lnSpc>
+                <a:spcPct val="115000"/>
+              </a:lnSpc>
+              <a:spcBef>
+                <a:spcPts val="0"/>
+              </a:spcBef>
+              <a:spcAft>
+                <a:spcPts val="200"/>
+              </a:spcAft>
+            </a:pPr>
             <a:r>
               <a:rPr sz="1600" b="1" i="0">
                 <a:solidFill>
@@ -5971,7 +6461,17 @@
           </a:bodyPr>
           <a:lstStyle/>
           <a:p>
-            <a:pPr algn="l"/>
+            <a:pPr algn="l">
+              <a:lnSpc>
+                <a:spcPct val="115000"/>
+              </a:lnSpc>
+              <a:spcBef>
+                <a:spcPts val="0"/>
+              </a:spcBef>
+              <a:spcAft>
+                <a:spcPts val="200"/>
+              </a:spcAft>
+            </a:pPr>
             <a:r>
               <a:rPr sz="1300" b="0" i="0">
                 <a:solidFill>
@@ -6006,9 +6506,19 @@
           </a:bodyPr>
           <a:lstStyle/>
           <a:p>
-            <a:pPr algn="l"/>
-            <a:r>
-              <a:rPr sz="1400" b="0" i="0">
+            <a:pPr algn="l">
+              <a:lnSpc>
+                <a:spcPct val="115000"/>
+              </a:lnSpc>
+              <a:spcBef>
+                <a:spcPts val="0"/>
+              </a:spcBef>
+              <a:spcAft>
+                <a:spcPts val="200"/>
+              </a:spcAft>
+            </a:pPr>
+            <a:r>
+              <a:rPr sz="1800" b="0" i="0">
                 <a:solidFill>
                   <a:srgbClr val="1E2F38"/>
                 </a:solidFill>
@@ -6086,7 +6596,17 @@
           </a:bodyPr>
           <a:lstStyle/>
           <a:p>
-            <a:pPr algn="l"/>
+            <a:pPr algn="l">
+              <a:lnSpc>
+                <a:spcPct val="115000"/>
+              </a:lnSpc>
+              <a:spcBef>
+                <a:spcPts val="0"/>
+              </a:spcBef>
+              <a:spcAft>
+                <a:spcPts val="200"/>
+              </a:spcAft>
+            </a:pPr>
             <a:r>
               <a:rPr sz="1600" b="1" i="0">
                 <a:solidFill>
@@ -6121,7 +6641,17 @@
           </a:bodyPr>
           <a:lstStyle/>
           <a:p>
-            <a:pPr algn="l"/>
+            <a:pPr algn="l">
+              <a:lnSpc>
+                <a:spcPct val="115000"/>
+              </a:lnSpc>
+              <a:spcBef>
+                <a:spcPts val="0"/>
+              </a:spcBef>
+              <a:spcAft>
+                <a:spcPts val="200"/>
+              </a:spcAft>
+            </a:pPr>
             <a:r>
               <a:rPr sz="1300" b="0" i="0">
                 <a:solidFill>
@@ -6156,9 +6686,19 @@
           </a:bodyPr>
           <a:lstStyle/>
           <a:p>
-            <a:pPr algn="l"/>
-            <a:r>
-              <a:rPr sz="1400" b="0" i="0">
+            <a:pPr algn="l">
+              <a:lnSpc>
+                <a:spcPct val="115000"/>
+              </a:lnSpc>
+              <a:spcBef>
+                <a:spcPts val="0"/>
+              </a:spcBef>
+              <a:spcAft>
+                <a:spcPts val="200"/>
+              </a:spcAft>
+            </a:pPr>
+            <a:r>
+              <a:rPr sz="1800" b="0" i="0">
                 <a:solidFill>
                   <a:srgbClr val="1E2F38"/>
                 </a:solidFill>
@@ -6236,7 +6776,17 @@
           </a:bodyPr>
           <a:lstStyle/>
           <a:p>
-            <a:pPr algn="l"/>
+            <a:pPr algn="l">
+              <a:lnSpc>
+                <a:spcPct val="115000"/>
+              </a:lnSpc>
+              <a:spcBef>
+                <a:spcPts val="0"/>
+              </a:spcBef>
+              <a:spcAft>
+                <a:spcPts val="200"/>
+              </a:spcAft>
+            </a:pPr>
             <a:r>
               <a:rPr sz="1600" b="1" i="0">
                 <a:solidFill>
@@ -6271,7 +6821,17 @@
           </a:bodyPr>
           <a:lstStyle/>
           <a:p>
-            <a:pPr algn="l"/>
+            <a:pPr algn="l">
+              <a:lnSpc>
+                <a:spcPct val="115000"/>
+              </a:lnSpc>
+              <a:spcBef>
+                <a:spcPts val="0"/>
+              </a:spcBef>
+              <a:spcAft>
+                <a:spcPts val="200"/>
+              </a:spcAft>
+            </a:pPr>
             <a:r>
               <a:rPr sz="1300" b="0" i="0">
                 <a:solidFill>
@@ -6306,9 +6866,19 @@
           </a:bodyPr>
           <a:lstStyle/>
           <a:p>
-            <a:pPr algn="l"/>
-            <a:r>
-              <a:rPr sz="1400" b="0" i="0">
+            <a:pPr algn="l">
+              <a:lnSpc>
+                <a:spcPct val="115000"/>
+              </a:lnSpc>
+              <a:spcBef>
+                <a:spcPts val="0"/>
+              </a:spcBef>
+              <a:spcAft>
+                <a:spcPts val="200"/>
+              </a:spcAft>
+            </a:pPr>
+            <a:r>
+              <a:rPr sz="1800" b="0" i="0">
                 <a:solidFill>
                   <a:srgbClr val="1E2F38"/>
                 </a:solidFill>
@@ -6384,7 +6954,17 @@
           </a:bodyPr>
           <a:lstStyle/>
           <a:p>
-            <a:pPr algn="l"/>
+            <a:pPr algn="l">
+              <a:lnSpc>
+                <a:spcPct val="115000"/>
+              </a:lnSpc>
+              <a:spcBef>
+                <a:spcPts val="0"/>
+              </a:spcBef>
+              <a:spcAft>
+                <a:spcPts val="200"/>
+              </a:spcAft>
+            </a:pPr>
             <a:r>
               <a:rPr sz="900" b="0" i="0">
                 <a:solidFill>
@@ -6419,7 +6999,17 @@
           </a:bodyPr>
           <a:lstStyle/>
           <a:p>
-            <a:pPr algn="r"/>
+            <a:pPr algn="r">
+              <a:lnSpc>
+                <a:spcPct val="115000"/>
+              </a:lnSpc>
+              <a:spcBef>
+                <a:spcPts val="0"/>
+              </a:spcBef>
+              <a:spcAft>
+                <a:spcPts val="200"/>
+              </a:spcAft>
+            </a:pPr>
             <a:r>
               <a:rPr sz="900" b="0" i="0">
                 <a:solidFill>
@@ -6558,7 +7148,17 @@
           </a:bodyPr>
           <a:lstStyle/>
           <a:p>
-            <a:pPr algn="l"/>
+            <a:pPr algn="l">
+              <a:lnSpc>
+                <a:spcPct val="115000"/>
+              </a:lnSpc>
+              <a:spcBef>
+                <a:spcPts val="0"/>
+              </a:spcBef>
+              <a:spcAft>
+                <a:spcPts val="200"/>
+              </a:spcAft>
+            </a:pPr>
             <a:r>
               <a:rPr sz="1100" b="1" i="0">
                 <a:solidFill>
@@ -6593,7 +7193,17 @@
           </a:bodyPr>
           <a:lstStyle/>
           <a:p>
-            <a:pPr algn="l"/>
+            <a:pPr algn="l">
+              <a:lnSpc>
+                <a:spcPct val="115000"/>
+              </a:lnSpc>
+              <a:spcBef>
+                <a:spcPts val="0"/>
+              </a:spcBef>
+              <a:spcAft>
+                <a:spcPts val="200"/>
+              </a:spcAft>
+            </a:pPr>
             <a:r>
               <a:rPr sz="2400" b="1" i="0">
                 <a:solidFill>
@@ -6652,9 +7262,19 @@
           </a:bodyPr>
           <a:lstStyle/>
           <a:p>
-            <a:pPr algn="l"/>
-            <a:r>
-              <a:rPr sz="1400" b="0" i="0">
+            <a:pPr algn="l">
+              <a:lnSpc>
+                <a:spcPct val="115000"/>
+              </a:lnSpc>
+              <a:spcBef>
+                <a:spcPts val="0"/>
+              </a:spcBef>
+              <a:spcAft>
+                <a:spcPts val="200"/>
+              </a:spcAft>
+            </a:pPr>
+            <a:r>
+              <a:rPr sz="1800" b="0" i="0">
                 <a:solidFill>
                   <a:srgbClr val="1E2F38"/>
                 </a:solidFill>
@@ -6687,9 +7307,19 @@
           </a:bodyPr>
           <a:lstStyle/>
           <a:p>
-            <a:pPr algn="l"/>
-            <a:r>
-              <a:rPr sz="1400" b="0" i="0">
+            <a:pPr algn="l">
+              <a:lnSpc>
+                <a:spcPct val="115000"/>
+              </a:lnSpc>
+              <a:spcBef>
+                <a:spcPts val="0"/>
+              </a:spcBef>
+              <a:spcAft>
+                <a:spcPts val="200"/>
+              </a:spcAft>
+            </a:pPr>
+            <a:r>
+              <a:rPr sz="1800" b="0" i="0">
                 <a:solidFill>
                   <a:srgbClr val="1E2F38"/>
                 </a:solidFill>
@@ -6722,9 +7352,19 @@
           </a:bodyPr>
           <a:lstStyle/>
           <a:p>
-            <a:pPr algn="l"/>
-            <a:r>
-              <a:rPr sz="1400" b="0" i="0">
+            <a:pPr algn="l">
+              <a:lnSpc>
+                <a:spcPct val="115000"/>
+              </a:lnSpc>
+              <a:spcBef>
+                <a:spcPts val="0"/>
+              </a:spcBef>
+              <a:spcAft>
+                <a:spcPts val="200"/>
+              </a:spcAft>
+            </a:pPr>
+            <a:r>
+              <a:rPr sz="1800" b="0" i="0">
                 <a:solidFill>
                   <a:srgbClr val="1E2F38"/>
                 </a:solidFill>
@@ -6757,9 +7397,19 @@
           </a:bodyPr>
           <a:lstStyle/>
           <a:p>
-            <a:pPr algn="l"/>
-            <a:r>
-              <a:rPr sz="1400" b="0" i="0">
+            <a:pPr algn="l">
+              <a:lnSpc>
+                <a:spcPct val="115000"/>
+              </a:lnSpc>
+              <a:spcBef>
+                <a:spcPts val="0"/>
+              </a:spcBef>
+              <a:spcAft>
+                <a:spcPts val="200"/>
+              </a:spcAft>
+            </a:pPr>
+            <a:r>
+              <a:rPr sz="1800" b="0" i="0">
                 <a:solidFill>
                   <a:srgbClr val="1E2F38"/>
                 </a:solidFill>
@@ -6835,7 +7485,17 @@
           </a:bodyPr>
           <a:lstStyle/>
           <a:p>
-            <a:pPr algn="l"/>
+            <a:pPr algn="l">
+              <a:lnSpc>
+                <a:spcPct val="115000"/>
+              </a:lnSpc>
+              <a:spcBef>
+                <a:spcPts val="0"/>
+              </a:spcBef>
+              <a:spcAft>
+                <a:spcPts val="200"/>
+              </a:spcAft>
+            </a:pPr>
             <a:r>
               <a:rPr sz="900" b="0" i="0">
                 <a:solidFill>
@@ -6870,7 +7530,17 @@
           </a:bodyPr>
           <a:lstStyle/>
           <a:p>
-            <a:pPr algn="r"/>
+            <a:pPr algn="r">
+              <a:lnSpc>
+                <a:spcPct val="115000"/>
+              </a:lnSpc>
+              <a:spcBef>
+                <a:spcPts val="0"/>
+              </a:spcBef>
+              <a:spcAft>
+                <a:spcPts val="200"/>
+              </a:spcAft>
+            </a:pPr>
             <a:r>
               <a:rPr sz="900" b="0" i="0">
                 <a:solidFill>
@@ -7009,7 +7679,17 @@
           </a:bodyPr>
           <a:lstStyle/>
           <a:p>
-            <a:pPr algn="l"/>
+            <a:pPr algn="l">
+              <a:lnSpc>
+                <a:spcPct val="115000"/>
+              </a:lnSpc>
+              <a:spcBef>
+                <a:spcPts val="0"/>
+              </a:spcBef>
+              <a:spcAft>
+                <a:spcPts val="200"/>
+              </a:spcAft>
+            </a:pPr>
             <a:r>
               <a:rPr sz="1100" b="1" i="0">
                 <a:solidFill>
@@ -7044,7 +7724,17 @@
           </a:bodyPr>
           <a:lstStyle/>
           <a:p>
-            <a:pPr algn="l"/>
+            <a:pPr algn="l">
+              <a:lnSpc>
+                <a:spcPct val="115000"/>
+              </a:lnSpc>
+              <a:spcBef>
+                <a:spcPts val="0"/>
+              </a:spcBef>
+              <a:spcAft>
+                <a:spcPts val="200"/>
+              </a:spcAft>
+            </a:pPr>
             <a:r>
               <a:rPr sz="2400" b="1" i="0">
                 <a:solidFill>
@@ -7124,7 +7814,17 @@
           </a:bodyPr>
           <a:lstStyle/>
           <a:p>
-            <a:pPr algn="l"/>
+            <a:pPr algn="l">
+              <a:lnSpc>
+                <a:spcPct val="115000"/>
+              </a:lnSpc>
+              <a:spcBef>
+                <a:spcPts val="0"/>
+              </a:spcBef>
+              <a:spcAft>
+                <a:spcPts val="200"/>
+              </a:spcAft>
+            </a:pPr>
             <a:r>
               <a:rPr sz="2000" b="1" i="0">
                 <a:solidFill>
@@ -7159,9 +7859,19 @@
           </a:bodyPr>
           <a:lstStyle/>
           <a:p>
-            <a:pPr algn="l"/>
-            <a:r>
-              <a:rPr sz="1600" b="0" i="0">
+            <a:pPr algn="l">
+              <a:lnSpc>
+                <a:spcPct val="115000"/>
+              </a:lnSpc>
+              <a:spcBef>
+                <a:spcPts val="0"/>
+              </a:spcBef>
+              <a:spcAft>
+                <a:spcPts val="200"/>
+              </a:spcAft>
+            </a:pPr>
+            <a:r>
+              <a:rPr sz="2000" b="0" i="0">
                 <a:solidFill>
                   <a:srgbClr val="1E2F38"/>
                 </a:solidFill>
@@ -7239,7 +7949,17 @@
           </a:bodyPr>
           <a:lstStyle/>
           <a:p>
-            <a:pPr algn="l"/>
+            <a:pPr algn="l">
+              <a:lnSpc>
+                <a:spcPct val="115000"/>
+              </a:lnSpc>
+              <a:spcBef>
+                <a:spcPts val="0"/>
+              </a:spcBef>
+              <a:spcAft>
+                <a:spcPts val="200"/>
+              </a:spcAft>
+            </a:pPr>
             <a:r>
               <a:rPr sz="2000" b="1" i="0">
                 <a:solidFill>
@@ -7274,9 +7994,19 @@
           </a:bodyPr>
           <a:lstStyle/>
           <a:p>
-            <a:pPr algn="l"/>
-            <a:r>
-              <a:rPr sz="1600" b="0" i="0">
+            <a:pPr algn="l">
+              <a:lnSpc>
+                <a:spcPct val="115000"/>
+              </a:lnSpc>
+              <a:spcBef>
+                <a:spcPts val="0"/>
+              </a:spcBef>
+              <a:spcAft>
+                <a:spcPts val="200"/>
+              </a:spcAft>
+            </a:pPr>
+            <a:r>
+              <a:rPr sz="2000" b="0" i="0">
                 <a:solidFill>
                   <a:srgbClr val="1E2F38"/>
                 </a:solidFill>
@@ -7309,7 +8039,17 @@
           </a:bodyPr>
           <a:lstStyle/>
           <a:p>
-            <a:pPr algn="ctr"/>
+            <a:pPr algn="ctr">
+              <a:lnSpc>
+                <a:spcPct val="115000"/>
+              </a:lnSpc>
+              <a:spcBef>
+                <a:spcPts val="0"/>
+              </a:spcBef>
+              <a:spcAft>
+                <a:spcPts val="200"/>
+              </a:spcAft>
+            </a:pPr>
             <a:r>
               <a:rPr sz="1600" b="1" i="1">
                 <a:solidFill>
@@ -7387,7 +8127,17 @@
           </a:bodyPr>
           <a:lstStyle/>
           <a:p>
-            <a:pPr algn="l"/>
+            <a:pPr algn="l">
+              <a:lnSpc>
+                <a:spcPct val="115000"/>
+              </a:lnSpc>
+              <a:spcBef>
+                <a:spcPts val="0"/>
+              </a:spcBef>
+              <a:spcAft>
+                <a:spcPts val="200"/>
+              </a:spcAft>
+            </a:pPr>
             <a:r>
               <a:rPr sz="900" b="0" i="0">
                 <a:solidFill>
@@ -7422,7 +8172,17 @@
           </a:bodyPr>
           <a:lstStyle/>
           <a:p>
-            <a:pPr algn="r"/>
+            <a:pPr algn="r">
+              <a:lnSpc>
+                <a:spcPct val="115000"/>
+              </a:lnSpc>
+              <a:spcBef>
+                <a:spcPts val="0"/>
+              </a:spcBef>
+              <a:spcAft>
+                <a:spcPts val="200"/>
+              </a:spcAft>
+            </a:pPr>
             <a:r>
               <a:rPr sz="900" b="0" i="0">
                 <a:solidFill>

--- a/applications/gadfly/documents/gadfly_ppt.pptx
+++ b/applications/gadfly/documents/gadfly_ppt.pptx
@@ -3347,6 +3347,96 @@
   <p:clrMapOvr>
     <a:masterClrMapping/>
   </p:clrMapOvr>
+  <p:timing>
+    <p:tnLst>
+      <p:par>
+        <p:cTn id="1" dur="indefinite" restart="never" nodeType="tmRoot">
+          <p:childTnLst>
+            <p:seq concurrent="true" nextAc="seek">
+              <p:cTn id="2" dur="indefinite" nodeType="mainSeq">
+                <p:childTnLst>
+                  <p:par>
+                    <p:cTn id="9" fill="hold">
+                      <p:stCondLst>
+                        <p:cond delay="0"/>
+                      </p:stCondLst>
+                      <p:childTnLst>
+                        <p:par>
+                          <p:cTn id="3" presetID="10" presetClass="entr" presetSubtype="0" fill="hold" nodeType="withEffect">
+                            <p:stCondLst>
+                              <p:cond delay="0"/>
+                            </p:stCondLst>
+                            <p:childTnLst>
+                              <p:animEffect transition="in" filter="fade">
+                                <p:cBhvr>
+                                  <p:cTn id="4" dur="450"/>
+                                  <p:tgtEl>
+                                    <p:spTgt spid="2"/>
+                                  </p:tgtEl>
+                                </p:cBhvr>
+                              </p:animEffect>
+                            </p:childTnLst>
+                          </p:cTn>
+                        </p:par>
+                        <p:par>
+                          <p:cTn id="5" presetID="10" presetClass="entr" presetSubtype="0" fill="hold" nodeType="withEffect">
+                            <p:stCondLst>
+                              <p:cond delay="200"/>
+                            </p:stCondLst>
+                            <p:childTnLst>
+                              <p:animEffect transition="in" filter="fade">
+                                <p:cBhvr>
+                                  <p:cTn id="6" dur="450"/>
+                                  <p:tgtEl>
+                                    <p:spTgt spid="3"/>
+                                  </p:tgtEl>
+                                </p:cBhvr>
+                              </p:animEffect>
+                            </p:childTnLst>
+                          </p:cTn>
+                        </p:par>
+                        <p:par>
+                          <p:cTn id="7" presetID="10" presetClass="entr" presetSubtype="0" fill="hold" nodeType="withEffect">
+                            <p:stCondLst>
+                              <p:cond delay="200"/>
+                            </p:stCondLst>
+                            <p:childTnLst>
+                              <p:animEffect transition="in" filter="fade">
+                                <p:cBhvr>
+                                  <p:cTn id="8" dur="450"/>
+                                  <p:tgtEl>
+                                    <p:spTgt spid="4"/>
+                                  </p:tgtEl>
+                                </p:cBhvr>
+                              </p:animEffect>
+                            </p:childTnLst>
+                          </p:cTn>
+                        </p:par>
+                      </p:childTnLst>
+                    </p:cTn>
+                  </p:par>
+                </p:childTnLst>
+              </p:cTn>
+              <p:prevCondLst>
+                <p:cond evt="onPrev" delay="0">
+                  <p:tgtEl>
+                    <p:sldTgt/>
+                  </p:tgtEl>
+                </p:cond>
+              </p:prevCondLst>
+              <p:nextCondLst>
+                <p:cond evt="onNext" delay="0">
+                  <p:tgtEl>
+                    <p:sldTgt/>
+                  </p:tgtEl>
+                </p:cond>
+              </p:nextCondLst>
+            </p:seq>
+          </p:childTnLst>
+        </p:cTn>
+      </p:par>
+    </p:tnLst>
+  </p:timing>
 </p:sld>
 </file>
 
@@ -3787,6 +3877,96 @@
   <p:clrMapOvr>
     <a:masterClrMapping/>
   </p:clrMapOvr>
+  <p:timing>
+    <p:tnLst>
+      <p:par>
+        <p:cTn id="1" dur="indefinite" restart="never" nodeType="tmRoot">
+          <p:childTnLst>
+            <p:seq concurrent="true" nextAc="seek">
+              <p:cTn id="2" dur="indefinite" nodeType="mainSeq">
+                <p:childTnLst>
+                  <p:par>
+                    <p:cTn id="9" fill="hold">
+                      <p:stCondLst>
+                        <p:cond delay="0"/>
+                      </p:stCondLst>
+                      <p:childTnLst>
+                        <p:par>
+                          <p:cTn id="3" presetID="10" presetClass="entr" presetSubtype="0" fill="hold" nodeType="withEffect">
+                            <p:stCondLst>
+                              <p:cond delay="0"/>
+                            </p:stCondLst>
+                            <p:childTnLst>
+                              <p:animEffect transition="in" filter="fade">
+                                <p:cBhvr>
+                                  <p:cTn id="4" dur="450"/>
+                                  <p:tgtEl>
+                                    <p:spTgt spid="2"/>
+                                  </p:tgtEl>
+                                </p:cBhvr>
+                              </p:animEffect>
+                            </p:childTnLst>
+                          </p:cTn>
+                        </p:par>
+                        <p:par>
+                          <p:cTn id="5" presetID="10" presetClass="entr" presetSubtype="0" fill="hold" nodeType="withEffect">
+                            <p:stCondLst>
+                              <p:cond delay="200"/>
+                            </p:stCondLst>
+                            <p:childTnLst>
+                              <p:animEffect transition="in" filter="fade">
+                                <p:cBhvr>
+                                  <p:cTn id="6" dur="450"/>
+                                  <p:tgtEl>
+                                    <p:spTgt spid="3"/>
+                                  </p:tgtEl>
+                                </p:cBhvr>
+                              </p:animEffect>
+                            </p:childTnLst>
+                          </p:cTn>
+                        </p:par>
+                        <p:par>
+                          <p:cTn id="7" presetID="10" presetClass="entr" presetSubtype="0" fill="hold" nodeType="withEffect">
+                            <p:stCondLst>
+                              <p:cond delay="200"/>
+                            </p:stCondLst>
+                            <p:childTnLst>
+                              <p:animEffect transition="in" filter="fade">
+                                <p:cBhvr>
+                                  <p:cTn id="8" dur="450"/>
+                                  <p:tgtEl>
+                                    <p:spTgt spid="4"/>
+                                  </p:tgtEl>
+                                </p:cBhvr>
+                              </p:animEffect>
+                            </p:childTnLst>
+                          </p:cTn>
+                        </p:par>
+                      </p:childTnLst>
+                    </p:cTn>
+                  </p:par>
+                </p:childTnLst>
+              </p:cTn>
+              <p:prevCondLst>
+                <p:cond evt="onPrev" delay="0">
+                  <p:tgtEl>
+                    <p:sldTgt/>
+                  </p:tgtEl>
+                </p:cond>
+              </p:prevCondLst>
+              <p:nextCondLst>
+                <p:cond evt="onNext" delay="0">
+                  <p:tgtEl>
+                    <p:sldTgt/>
+                  </p:tgtEl>
+                </p:cond>
+              </p:nextCondLst>
+            </p:seq>
+          </p:childTnLst>
+        </p:cTn>
+      </p:par>
+    </p:tnLst>
+  </p:timing>
 </p:sld>
 </file>
 
@@ -4648,6 +4828,96 @@
   <p:clrMapOvr>
     <a:masterClrMapping/>
   </p:clrMapOvr>
+  <p:timing>
+    <p:tnLst>
+      <p:par>
+        <p:cTn id="1" dur="indefinite" restart="never" nodeType="tmRoot">
+          <p:childTnLst>
+            <p:seq concurrent="true" nextAc="seek">
+              <p:cTn id="2" dur="indefinite" nodeType="mainSeq">
+                <p:childTnLst>
+                  <p:par>
+                    <p:cTn id="9" fill="hold">
+                      <p:stCondLst>
+                        <p:cond delay="0"/>
+                      </p:stCondLst>
+                      <p:childTnLst>
+                        <p:par>
+                          <p:cTn id="3" presetID="10" presetClass="entr" presetSubtype="0" fill="hold" nodeType="withEffect">
+                            <p:stCondLst>
+                              <p:cond delay="0"/>
+                            </p:stCondLst>
+                            <p:childTnLst>
+                              <p:animEffect transition="in" filter="fade">
+                                <p:cBhvr>
+                                  <p:cTn id="4" dur="450"/>
+                                  <p:tgtEl>
+                                    <p:spTgt spid="2"/>
+                                  </p:tgtEl>
+                                </p:cBhvr>
+                              </p:animEffect>
+                            </p:childTnLst>
+                          </p:cTn>
+                        </p:par>
+                        <p:par>
+                          <p:cTn id="5" presetID="10" presetClass="entr" presetSubtype="0" fill="hold" nodeType="withEffect">
+                            <p:stCondLst>
+                              <p:cond delay="200"/>
+                            </p:stCondLst>
+                            <p:childTnLst>
+                              <p:animEffect transition="in" filter="fade">
+                                <p:cBhvr>
+                                  <p:cTn id="6" dur="450"/>
+                                  <p:tgtEl>
+                                    <p:spTgt spid="3"/>
+                                  </p:tgtEl>
+                                </p:cBhvr>
+                              </p:animEffect>
+                            </p:childTnLst>
+                          </p:cTn>
+                        </p:par>
+                        <p:par>
+                          <p:cTn id="7" presetID="10" presetClass="entr" presetSubtype="0" fill="hold" nodeType="withEffect">
+                            <p:stCondLst>
+                              <p:cond delay="200"/>
+                            </p:stCondLst>
+                            <p:childTnLst>
+                              <p:animEffect transition="in" filter="fade">
+                                <p:cBhvr>
+                                  <p:cTn id="8" dur="450"/>
+                                  <p:tgtEl>
+                                    <p:spTgt spid="4"/>
+                                  </p:tgtEl>
+                                </p:cBhvr>
+                              </p:animEffect>
+                            </p:childTnLst>
+                          </p:cTn>
+                        </p:par>
+                      </p:childTnLst>
+                    </p:cTn>
+                  </p:par>
+                </p:childTnLst>
+              </p:cTn>
+              <p:prevCondLst>
+                <p:cond evt="onPrev" delay="0">
+                  <p:tgtEl>
+                    <p:sldTgt/>
+                  </p:tgtEl>
+                </p:cond>
+              </p:prevCondLst>
+              <p:nextCondLst>
+                <p:cond evt="onNext" delay="0">
+                  <p:tgtEl>
+                    <p:sldTgt/>
+                  </p:tgtEl>
+                </p:cond>
+              </p:nextCondLst>
+            </p:seq>
+          </p:childTnLst>
+        </p:cTn>
+      </p:par>
+    </p:tnLst>
+  </p:timing>
 </p:sld>
 </file>
 
@@ -5179,6 +5449,96 @@
   <p:clrMapOvr>
     <a:masterClrMapping/>
   </p:clrMapOvr>
+  <p:timing>
+    <p:tnLst>
+      <p:par>
+        <p:cTn id="1" dur="indefinite" restart="never" nodeType="tmRoot">
+          <p:childTnLst>
+            <p:seq concurrent="true" nextAc="seek">
+              <p:cTn id="2" dur="indefinite" nodeType="mainSeq">
+                <p:childTnLst>
+                  <p:par>
+                    <p:cTn id="9" fill="hold">
+                      <p:stCondLst>
+                        <p:cond delay="0"/>
+                      </p:stCondLst>
+                      <p:childTnLst>
+                        <p:par>
+                          <p:cTn id="3" presetID="10" presetClass="entr" presetSubtype="0" fill="hold" nodeType="withEffect">
+                            <p:stCondLst>
+                              <p:cond delay="0"/>
+                            </p:stCondLst>
+                            <p:childTnLst>
+                              <p:animEffect transition="in" filter="fade">
+                                <p:cBhvr>
+                                  <p:cTn id="4" dur="450"/>
+                                  <p:tgtEl>
+                                    <p:spTgt spid="2"/>
+                                  </p:tgtEl>
+                                </p:cBhvr>
+                              </p:animEffect>
+                            </p:childTnLst>
+                          </p:cTn>
+                        </p:par>
+                        <p:par>
+                          <p:cTn id="5" presetID="10" presetClass="entr" presetSubtype="0" fill="hold" nodeType="withEffect">
+                            <p:stCondLst>
+                              <p:cond delay="200"/>
+                            </p:stCondLst>
+                            <p:childTnLst>
+                              <p:animEffect transition="in" filter="fade">
+                                <p:cBhvr>
+                                  <p:cTn id="6" dur="450"/>
+                                  <p:tgtEl>
+                                    <p:spTgt spid="3"/>
+                                  </p:tgtEl>
+                                </p:cBhvr>
+                              </p:animEffect>
+                            </p:childTnLst>
+                          </p:cTn>
+                        </p:par>
+                        <p:par>
+                          <p:cTn id="7" presetID="10" presetClass="entr" presetSubtype="0" fill="hold" nodeType="withEffect">
+                            <p:stCondLst>
+                              <p:cond delay="200"/>
+                            </p:stCondLst>
+                            <p:childTnLst>
+                              <p:animEffect transition="in" filter="fade">
+                                <p:cBhvr>
+                                  <p:cTn id="8" dur="450"/>
+                                  <p:tgtEl>
+                                    <p:spTgt spid="4"/>
+                                  </p:tgtEl>
+                                </p:cBhvr>
+                              </p:animEffect>
+                            </p:childTnLst>
+                          </p:cTn>
+                        </p:par>
+                      </p:childTnLst>
+                    </p:cTn>
+                  </p:par>
+                </p:childTnLst>
+              </p:cTn>
+              <p:prevCondLst>
+                <p:cond evt="onPrev" delay="0">
+                  <p:tgtEl>
+                    <p:sldTgt/>
+                  </p:tgtEl>
+                </p:cond>
+              </p:prevCondLst>
+              <p:nextCondLst>
+                <p:cond evt="onNext" delay="0">
+                  <p:tgtEl>
+                    <p:sldTgt/>
+                  </p:tgtEl>
+                </p:cond>
+              </p:nextCondLst>
+            </p:seq>
+          </p:childTnLst>
+        </p:cTn>
+      </p:par>
+    </p:tnLst>
+  </p:timing>
 </p:sld>
 </file>
 
@@ -5980,6 +6340,96 @@
   <p:clrMapOvr>
     <a:masterClrMapping/>
   </p:clrMapOvr>
+  <p:timing>
+    <p:tnLst>
+      <p:par>
+        <p:cTn id="1" dur="indefinite" restart="never" nodeType="tmRoot">
+          <p:childTnLst>
+            <p:seq concurrent="true" nextAc="seek">
+              <p:cTn id="2" dur="indefinite" nodeType="mainSeq">
+                <p:childTnLst>
+                  <p:par>
+                    <p:cTn id="9" fill="hold">
+                      <p:stCondLst>
+                        <p:cond delay="0"/>
+                      </p:stCondLst>
+                      <p:childTnLst>
+                        <p:par>
+                          <p:cTn id="3" presetID="10" presetClass="entr" presetSubtype="0" fill="hold" nodeType="withEffect">
+                            <p:stCondLst>
+                              <p:cond delay="0"/>
+                            </p:stCondLst>
+                            <p:childTnLst>
+                              <p:animEffect transition="in" filter="fade">
+                                <p:cBhvr>
+                                  <p:cTn id="4" dur="450"/>
+                                  <p:tgtEl>
+                                    <p:spTgt spid="2"/>
+                                  </p:tgtEl>
+                                </p:cBhvr>
+                              </p:animEffect>
+                            </p:childTnLst>
+                          </p:cTn>
+                        </p:par>
+                        <p:par>
+                          <p:cTn id="5" presetID="10" presetClass="entr" presetSubtype="0" fill="hold" nodeType="withEffect">
+                            <p:stCondLst>
+                              <p:cond delay="200"/>
+                            </p:stCondLst>
+                            <p:childTnLst>
+                              <p:animEffect transition="in" filter="fade">
+                                <p:cBhvr>
+                                  <p:cTn id="6" dur="450"/>
+                                  <p:tgtEl>
+                                    <p:spTgt spid="3"/>
+                                  </p:tgtEl>
+                                </p:cBhvr>
+                              </p:animEffect>
+                            </p:childTnLst>
+                          </p:cTn>
+                        </p:par>
+                        <p:par>
+                          <p:cTn id="7" presetID="10" presetClass="entr" presetSubtype="0" fill="hold" nodeType="withEffect">
+                            <p:stCondLst>
+                              <p:cond delay="200"/>
+                            </p:stCondLst>
+                            <p:childTnLst>
+                              <p:animEffect transition="in" filter="fade">
+                                <p:cBhvr>
+                                  <p:cTn id="8" dur="450"/>
+                                  <p:tgtEl>
+                                    <p:spTgt spid="4"/>
+                                  </p:tgtEl>
+                                </p:cBhvr>
+                              </p:animEffect>
+                            </p:childTnLst>
+                          </p:cTn>
+                        </p:par>
+                      </p:childTnLst>
+                    </p:cTn>
+                  </p:par>
+                </p:childTnLst>
+              </p:cTn>
+              <p:prevCondLst>
+                <p:cond evt="onPrev" delay="0">
+                  <p:tgtEl>
+                    <p:sldTgt/>
+                  </p:tgtEl>
+                </p:cond>
+              </p:prevCondLst>
+              <p:nextCondLst>
+                <p:cond evt="onNext" delay="0">
+                  <p:tgtEl>
+                    <p:sldTgt/>
+                  </p:tgtEl>
+                </p:cond>
+              </p:nextCondLst>
+            </p:seq>
+          </p:childTnLst>
+        </p:cTn>
+      </p:par>
+    </p:tnLst>
+  </p:timing>
 </p:sld>
 </file>
 
@@ -7027,6 +7477,96 @@
   <p:clrMapOvr>
     <a:masterClrMapping/>
   </p:clrMapOvr>
+  <p:timing>
+    <p:tnLst>
+      <p:par>
+        <p:cTn id="1" dur="indefinite" restart="never" nodeType="tmRoot">
+          <p:childTnLst>
+            <p:seq concurrent="true" nextAc="seek">
+              <p:cTn id="2" dur="indefinite" nodeType="mainSeq">
+                <p:childTnLst>
+                  <p:par>
+                    <p:cTn id="9" fill="hold">
+                      <p:stCondLst>
+                        <p:cond delay="0"/>
+                      </p:stCondLst>
+                      <p:childTnLst>
+                        <p:par>
+                          <p:cTn id="3" presetID="10" presetClass="entr" presetSubtype="0" fill="hold" nodeType="withEffect">
+                            <p:stCondLst>
+                              <p:cond delay="0"/>
+                            </p:stCondLst>
+                            <p:childTnLst>
+                              <p:animEffect transition="in" filter="fade">
+                                <p:cBhvr>
+                                  <p:cTn id="4" dur="450"/>
+                                  <p:tgtEl>
+                                    <p:spTgt spid="2"/>
+                                  </p:tgtEl>
+                                </p:cBhvr>
+                              </p:animEffect>
+                            </p:childTnLst>
+                          </p:cTn>
+                        </p:par>
+                        <p:par>
+                          <p:cTn id="5" presetID="10" presetClass="entr" presetSubtype="0" fill="hold" nodeType="withEffect">
+                            <p:stCondLst>
+                              <p:cond delay="200"/>
+                            </p:stCondLst>
+                            <p:childTnLst>
+                              <p:animEffect transition="in" filter="fade">
+                                <p:cBhvr>
+                                  <p:cTn id="6" dur="450"/>
+                                  <p:tgtEl>
+                                    <p:spTgt spid="3"/>
+                                  </p:tgtEl>
+                                </p:cBhvr>
+                              </p:animEffect>
+                            </p:childTnLst>
+                          </p:cTn>
+                        </p:par>
+                        <p:par>
+                          <p:cTn id="7" presetID="10" presetClass="entr" presetSubtype="0" fill="hold" nodeType="withEffect">
+                            <p:stCondLst>
+                              <p:cond delay="200"/>
+                            </p:stCondLst>
+                            <p:childTnLst>
+                              <p:animEffect transition="in" filter="fade">
+                                <p:cBhvr>
+                                  <p:cTn id="8" dur="450"/>
+                                  <p:tgtEl>
+                                    <p:spTgt spid="4"/>
+                                  </p:tgtEl>
+                                </p:cBhvr>
+                              </p:animEffect>
+                            </p:childTnLst>
+                          </p:cTn>
+                        </p:par>
+                      </p:childTnLst>
+                    </p:cTn>
+                  </p:par>
+                </p:childTnLst>
+              </p:cTn>
+              <p:prevCondLst>
+                <p:cond evt="onPrev" delay="0">
+                  <p:tgtEl>
+                    <p:sldTgt/>
+                  </p:tgtEl>
+                </p:cond>
+              </p:prevCondLst>
+              <p:nextCondLst>
+                <p:cond evt="onNext" delay="0">
+                  <p:tgtEl>
+                    <p:sldTgt/>
+                  </p:tgtEl>
+                </p:cond>
+              </p:nextCondLst>
+            </p:seq>
+          </p:childTnLst>
+        </p:cTn>
+      </p:par>
+    </p:tnLst>
+  </p:timing>
 </p:sld>
 </file>
 
@@ -7558,6 +8098,96 @@
   <p:clrMapOvr>
     <a:masterClrMapping/>
   </p:clrMapOvr>
+  <p:timing>
+    <p:tnLst>
+      <p:par>
+        <p:cTn id="1" dur="indefinite" restart="never" nodeType="tmRoot">
+          <p:childTnLst>
+            <p:seq concurrent="true" nextAc="seek">
+              <p:cTn id="2" dur="indefinite" nodeType="mainSeq">
+                <p:childTnLst>
+                  <p:par>
+                    <p:cTn id="9" fill="hold">
+                      <p:stCondLst>
+                        <p:cond delay="0"/>
+                      </p:stCondLst>
+                      <p:childTnLst>
+                        <p:par>
+                          <p:cTn id="3" presetID="10" presetClass="entr" presetSubtype="0" fill="hold" nodeType="withEffect">
+                            <p:stCondLst>
+                              <p:cond delay="0"/>
+                            </p:stCondLst>
+                            <p:childTnLst>
+                              <p:animEffect transition="in" filter="fade">
+                                <p:cBhvr>
+                                  <p:cTn id="4" dur="450"/>
+                                  <p:tgtEl>
+                                    <p:spTgt spid="2"/>
+                                  </p:tgtEl>
+                                </p:cBhvr>
+                              </p:animEffect>
+                            </p:childTnLst>
+                          </p:cTn>
+                        </p:par>
+                        <p:par>
+                          <p:cTn id="5" presetID="10" presetClass="entr" presetSubtype="0" fill="hold" nodeType="withEffect">
+                            <p:stCondLst>
+                              <p:cond delay="200"/>
+                            </p:stCondLst>
+                            <p:childTnLst>
+                              <p:animEffect transition="in" filter="fade">
+                                <p:cBhvr>
+                                  <p:cTn id="6" dur="450"/>
+                                  <p:tgtEl>
+                                    <p:spTgt spid="3"/>
+                                  </p:tgtEl>
+                                </p:cBhvr>
+                              </p:animEffect>
+                            </p:childTnLst>
+                          </p:cTn>
+                        </p:par>
+                        <p:par>
+                          <p:cTn id="7" presetID="10" presetClass="entr" presetSubtype="0" fill="hold" nodeType="withEffect">
+                            <p:stCondLst>
+                              <p:cond delay="200"/>
+                            </p:stCondLst>
+                            <p:childTnLst>
+                              <p:animEffect transition="in" filter="fade">
+                                <p:cBhvr>
+                                  <p:cTn id="8" dur="450"/>
+                                  <p:tgtEl>
+                                    <p:spTgt spid="4"/>
+                                  </p:tgtEl>
+                                </p:cBhvr>
+                              </p:animEffect>
+                            </p:childTnLst>
+                          </p:cTn>
+                        </p:par>
+                      </p:childTnLst>
+                    </p:cTn>
+                  </p:par>
+                </p:childTnLst>
+              </p:cTn>
+              <p:prevCondLst>
+                <p:cond evt="onPrev" delay="0">
+                  <p:tgtEl>
+                    <p:sldTgt/>
+                  </p:tgtEl>
+                </p:cond>
+              </p:prevCondLst>
+              <p:nextCondLst>
+                <p:cond evt="onNext" delay="0">
+                  <p:tgtEl>
+                    <p:sldTgt/>
+                  </p:tgtEl>
+                </p:cond>
+              </p:nextCondLst>
+            </p:seq>
+          </p:childTnLst>
+        </p:cTn>
+      </p:par>
+    </p:tnLst>
+  </p:timing>
 </p:sld>
 </file>
 
@@ -8200,6 +8830,96 @@
   <p:clrMapOvr>
     <a:masterClrMapping/>
   </p:clrMapOvr>
+  <p:timing>
+    <p:tnLst>
+      <p:par>
+        <p:cTn id="1" dur="indefinite" restart="never" nodeType="tmRoot">
+          <p:childTnLst>
+            <p:seq concurrent="true" nextAc="seek">
+              <p:cTn id="2" dur="indefinite" nodeType="mainSeq">
+                <p:childTnLst>
+                  <p:par>
+                    <p:cTn id="9" fill="hold">
+                      <p:stCondLst>
+                        <p:cond delay="0"/>
+                      </p:stCondLst>
+                      <p:childTnLst>
+                        <p:par>
+                          <p:cTn id="3" presetID="10" presetClass="entr" presetSubtype="0" fill="hold" nodeType="withEffect">
+                            <p:stCondLst>
+                              <p:cond delay="0"/>
+                            </p:stCondLst>
+                            <p:childTnLst>
+                              <p:animEffect transition="in" filter="fade">
+                                <p:cBhvr>
+                                  <p:cTn id="4" dur="450"/>
+                                  <p:tgtEl>
+                                    <p:spTgt spid="2"/>
+                                  </p:tgtEl>
+                                </p:cBhvr>
+                              </p:animEffect>
+                            </p:childTnLst>
+                          </p:cTn>
+                        </p:par>
+                        <p:par>
+                          <p:cTn id="5" presetID="10" presetClass="entr" presetSubtype="0" fill="hold" nodeType="withEffect">
+                            <p:stCondLst>
+                              <p:cond delay="200"/>
+                            </p:stCondLst>
+                            <p:childTnLst>
+                              <p:animEffect transition="in" filter="fade">
+                                <p:cBhvr>
+                                  <p:cTn id="6" dur="450"/>
+                                  <p:tgtEl>
+                                    <p:spTgt spid="3"/>
+                                  </p:tgtEl>
+                                </p:cBhvr>
+                              </p:animEffect>
+                            </p:childTnLst>
+                          </p:cTn>
+                        </p:par>
+                        <p:par>
+                          <p:cTn id="7" presetID="10" presetClass="entr" presetSubtype="0" fill="hold" nodeType="withEffect">
+                            <p:stCondLst>
+                              <p:cond delay="200"/>
+                            </p:stCondLst>
+                            <p:childTnLst>
+                              <p:animEffect transition="in" filter="fade">
+                                <p:cBhvr>
+                                  <p:cTn id="8" dur="450"/>
+                                  <p:tgtEl>
+                                    <p:spTgt spid="4"/>
+                                  </p:tgtEl>
+                                </p:cBhvr>
+                              </p:animEffect>
+                            </p:childTnLst>
+                          </p:cTn>
+                        </p:par>
+                      </p:childTnLst>
+                    </p:cTn>
+                  </p:par>
+                </p:childTnLst>
+              </p:cTn>
+              <p:prevCondLst>
+                <p:cond evt="onPrev" delay="0">
+                  <p:tgtEl>
+                    <p:sldTgt/>
+                  </p:tgtEl>
+                </p:cond>
+              </p:prevCondLst>
+              <p:nextCondLst>
+                <p:cond evt="onNext" delay="0">
+                  <p:tgtEl>
+                    <p:sldTgt/>
+                  </p:tgtEl>
+                </p:cond>
+              </p:nextCondLst>
+            </p:seq>
+          </p:childTnLst>
+        </p:cTn>
+      </p:par>
+    </p:tnLst>
+  </p:timing>
 </p:sld>
 </file>
 
